--- a/docs/showcase/grocery-strategy.pptx
+++ b/docs/showcase/grocery-strategy.pptx
@@ -179,7 +179,7 @@
                         <a:solidFill>
                           <a:srgbClr val="C24E26"/>
                         </a:solidFill>
-                        <a:latin typeface="Inter"/>
+                        <a:latin typeface="Arial"/>
                       </a:rPr>
                       <a:t>47%</a:t>
                     </a:r>
@@ -195,7 +195,7 @@
                       <a:solidFill>
                         <a:srgbClr val="C24E26"/>
                       </a:solidFill>
-                      <a:latin typeface="Inter"/>
+                      <a:latin typeface="Arial"/>
                     </a:defRPr>
                   </a:pPr>
                 </a:p>
@@ -220,7 +220,7 @@
                         <a:solidFill>
                           <a:srgbClr val="C24E26"/>
                         </a:solidFill>
-                        <a:latin typeface="Inter"/>
+                        <a:latin typeface="Arial"/>
                       </a:rPr>
                       <a:t>36%  Large stores, -11 pts</a:t>
                     </a:r>
@@ -236,7 +236,7 @@
                       <a:solidFill>
                         <a:srgbClr val="C24E26"/>
                       </a:solidFill>
-                      <a:latin typeface="Inter"/>
+                      <a:latin typeface="Arial"/>
                     </a:defRPr>
                   </a:pPr>
                 </a:p>
@@ -342,7 +342,7 @@
                         <a:solidFill>
                           <a:srgbClr val="1E2226"/>
                         </a:solidFill>
-                        <a:latin typeface="Inter"/>
+                        <a:latin typeface="Arial"/>
                       </a:rPr>
                       <a:t>14%</a:t>
                     </a:r>
@@ -358,7 +358,7 @@
                       <a:solidFill>
                         <a:srgbClr val="1E2226"/>
                       </a:solidFill>
-                      <a:latin typeface="Inter"/>
+                      <a:latin typeface="Arial"/>
                     </a:defRPr>
                   </a:pPr>
                 </a:p>
@@ -383,7 +383,7 @@
                         <a:solidFill>
                           <a:srgbClr val="1E2226"/>
                         </a:solidFill>
-                        <a:latin typeface="Inter"/>
+                        <a:latin typeface="Arial"/>
                       </a:rPr>
                       <a:t>25%  Discounters</a:t>
                     </a:r>
@@ -399,7 +399,7 @@
                       <a:solidFill>
                         <a:srgbClr val="1E2226"/>
                       </a:solidFill>
-                      <a:latin typeface="Inter"/>
+                      <a:latin typeface="Arial"/>
                     </a:defRPr>
                   </a:pPr>
                 </a:p>
@@ -505,7 +505,7 @@
                         <a:solidFill>
                           <a:srgbClr val="1E2226"/>
                         </a:solidFill>
-                        <a:latin typeface="Inter"/>
+                        <a:latin typeface="Arial"/>
                       </a:rPr>
                       <a:t>21%</a:t>
                     </a:r>
@@ -521,7 +521,7 @@
                       <a:solidFill>
                         <a:srgbClr val="1E2226"/>
                       </a:solidFill>
-                      <a:latin typeface="Inter"/>
+                      <a:latin typeface="Arial"/>
                     </a:defRPr>
                   </a:pPr>
                 </a:p>
@@ -546,7 +546,7 @@
                         <a:solidFill>
                           <a:srgbClr val="1E2226"/>
                         </a:solidFill>
-                        <a:latin typeface="Inter"/>
+                        <a:latin typeface="Arial"/>
                       </a:rPr>
                       <a:t>21%  Convenience</a:t>
                     </a:r>
@@ -562,7 +562,7 @@
                       <a:solidFill>
                         <a:srgbClr val="1E2226"/>
                       </a:solidFill>
-                      <a:latin typeface="Inter"/>
+                      <a:latin typeface="Arial"/>
                     </a:defRPr>
                   </a:pPr>
                 </a:p>
@@ -668,7 +668,7 @@
                         <a:solidFill>
                           <a:srgbClr val="1E2226"/>
                         </a:solidFill>
-                        <a:latin typeface="Inter"/>
+                        <a:latin typeface="Arial"/>
                       </a:rPr>
                       <a:t>7%</a:t>
                     </a:r>
@@ -684,7 +684,7 @@
                       <a:solidFill>
                         <a:srgbClr val="1E2226"/>
                       </a:solidFill>
-                      <a:latin typeface="Inter"/>
+                      <a:latin typeface="Arial"/>
                     </a:defRPr>
                   </a:pPr>
                 </a:p>
@@ -709,7 +709,7 @@
                         <a:solidFill>
                           <a:srgbClr val="1E2226"/>
                         </a:solidFill>
-                        <a:latin typeface="Inter"/>
+                        <a:latin typeface="Arial"/>
                       </a:rPr>
                       <a:t>13%  Online</a:t>
                     </a:r>
@@ -725,7 +725,7 @@
                       <a:solidFill>
                         <a:srgbClr val="1E2226"/>
                       </a:solidFill>
-                      <a:latin typeface="Inter"/>
+                      <a:latin typeface="Arial"/>
                     </a:defRPr>
                   </a:pPr>
                 </a:p>
@@ -831,7 +831,7 @@
                         <a:solidFill>
                           <a:srgbClr val="1E2226"/>
                         </a:solidFill>
-                        <a:latin typeface="Inter"/>
+                        <a:latin typeface="Arial"/>
                       </a:rPr>
                       <a:t>11%</a:t>
                     </a:r>
@@ -847,7 +847,7 @@
                       <a:solidFill>
                         <a:srgbClr val="1E2226"/>
                       </a:solidFill>
-                      <a:latin typeface="Inter"/>
+                      <a:latin typeface="Arial"/>
                     </a:defRPr>
                   </a:pPr>
                 </a:p>
@@ -872,7 +872,7 @@
                         <a:solidFill>
                           <a:srgbClr val="1E2226"/>
                         </a:solidFill>
-                        <a:latin typeface="Inter"/>
+                        <a:latin typeface="Arial"/>
                       </a:rPr>
                       <a:t>5%  Specialist</a:t>
                     </a:r>
@@ -888,7 +888,7 @@
                       <a:solidFill>
                         <a:srgbClr val="1E2226"/>
                       </a:solidFill>
-                      <a:latin typeface="Inter"/>
+                      <a:latin typeface="Arial"/>
                     </a:defRPr>
                   </a:pPr>
                 </a:p>
@@ -975,7 +975,7 @@
                 <a:solidFill>
                   <a:srgbClr val="5C6670"/>
                 </a:solidFill>
-                <a:latin typeface="Inter"/>
+                <a:latin typeface="Arial"/>
               </a:defRPr>
             </a:pPr>
           </a:p>
@@ -1019,7 +1019,7 @@
           <a:solidFill>
             <a:srgbClr val="5C6670"/>
           </a:solidFill>
-          <a:latin typeface="Inter"/>
+          <a:latin typeface="Arial"/>
         </a:defRPr>
       </a:pPr>
       <a:endParaRPr lang="en-US"/>
@@ -1085,7 +1085,7 @@
                     <a:solidFill>
                       <a:srgbClr val="1E2226"/>
                     </a:solidFill>
-                    <a:latin typeface="Inter"/>
+                    <a:latin typeface="Arial"/>
                   </a:defRPr>
                 </a:pPr>
               </a:p>
@@ -1184,7 +1184,7 @@
                         <a:solidFill>
                           <a:srgbClr val="C24E26"/>
                         </a:solidFill>
-                        <a:latin typeface="Inter"/>
+                        <a:latin typeface="Arial"/>
                       </a:rPr>
                       <a:t>1.0  (-29%)</a:t>
                     </a:r>
@@ -1200,7 +1200,7 @@
                       <a:solidFill>
                         <a:srgbClr val="C24E26"/>
                       </a:solidFill>
-                      <a:latin typeface="Inter"/>
+                      <a:latin typeface="Arial"/>
                     </a:defRPr>
                   </a:pPr>
                 </a:p>
@@ -1225,7 +1225,7 @@
                         <a:solidFill>
                           <a:srgbClr val="1E2226"/>
                         </a:solidFill>
-                        <a:latin typeface="Inter"/>
+                        <a:latin typeface="Arial"/>
                       </a:rPr>
                       <a:t>2.6  (+24%)</a:t>
                     </a:r>
@@ -1241,7 +1241,7 @@
                       <a:solidFill>
                         <a:srgbClr val="1E2226"/>
                       </a:solidFill>
-                      <a:latin typeface="Inter"/>
+                      <a:latin typeface="Arial"/>
                     </a:defRPr>
                   </a:pPr>
                 </a:p>
@@ -1264,7 +1264,7 @@
                     <a:solidFill>
                       <a:srgbClr val="1E2226"/>
                     </a:solidFill>
-                    <a:latin typeface="Inter"/>
+                    <a:latin typeface="Arial"/>
                   </a:defRPr>
                 </a:pPr>
               </a:p>
@@ -1350,7 +1350,7 @@
                 <a:solidFill>
                   <a:srgbClr val="5C6670"/>
                 </a:solidFill>
-                <a:latin typeface="Inter"/>
+                <a:latin typeface="Arial"/>
               </a:defRPr>
             </a:pPr>
           </a:p>
@@ -1392,7 +1392,7 @@
           <a:solidFill>
             <a:srgbClr val="5C6670"/>
           </a:solidFill>
-          <a:latin typeface="Inter"/>
+          <a:latin typeface="Arial"/>
         </a:defRPr>
       </a:pPr>
       <a:endParaRPr lang="en-US"/>
@@ -1477,7 +1477,7 @@
                       <a:solidFill>
                         <a:srgbClr val="C24E26"/>
                       </a:solidFill>
-                      <a:latin typeface="Inter"/>
+                      <a:latin typeface="Arial"/>
                     </a:defRPr>
                   </a:pPr>
                 </a:p>
@@ -1500,7 +1500,7 @@
                     <a:solidFill>
                       <a:srgbClr val="1E2226"/>
                     </a:solidFill>
-                    <a:latin typeface="Inter"/>
+                    <a:latin typeface="Arial"/>
                   </a:defRPr>
                 </a:pPr>
               </a:p>
@@ -1590,7 +1590,7 @@
                 <a:solidFill>
                   <a:srgbClr val="5C6670"/>
                 </a:solidFill>
-                <a:latin typeface="Inter"/>
+                <a:latin typeface="Arial"/>
               </a:defRPr>
             </a:pPr>
           </a:p>
@@ -1632,7 +1632,7 @@
           <a:solidFill>
             <a:srgbClr val="5C6670"/>
           </a:solidFill>
-          <a:latin typeface="Inter"/>
+          <a:latin typeface="Arial"/>
         </a:defRPr>
       </a:pPr>
       <a:endParaRPr lang="en-US"/>
@@ -1709,7 +1709,7 @@
                         <a:solidFill>
                           <a:srgbClr val="1E2226"/>
                         </a:solidFill>
-                        <a:latin typeface="Inter"/>
+                        <a:latin typeface="Arial"/>
                       </a:rPr>
                       <a:t>Established families, £11.6bn</a:t>
                     </a:r>
@@ -1725,7 +1725,7 @@
                       <a:solidFill>
                         <a:srgbClr val="1E2226"/>
                       </a:solidFill>
-                      <a:latin typeface="Inter"/>
+                      <a:latin typeface="Arial"/>
                     </a:defRPr>
                   </a:pPr>
                 </a:p>
@@ -1750,7 +1750,7 @@
                         <a:solidFill>
                           <a:srgbClr val="1E2226"/>
                         </a:solidFill>
-                        <a:latin typeface="Inter"/>
+                        <a:latin typeface="Arial"/>
                       </a:rPr>
                       <a:t>Older traditional, £8.2bn</a:t>
                     </a:r>
@@ -1766,7 +1766,7 @@
                       <a:solidFill>
                         <a:srgbClr val="1E2226"/>
                       </a:solidFill>
-                      <a:latin typeface="Inter"/>
+                      <a:latin typeface="Arial"/>
                     </a:defRPr>
                   </a:pPr>
                 </a:p>
@@ -1789,7 +1789,7 @@
                     <a:solidFill>
                       <a:srgbClr val="1E2226"/>
                     </a:solidFill>
-                    <a:latin typeface="Inter"/>
+                    <a:latin typeface="Arial"/>
                   </a:defRPr>
                 </a:pPr>
               </a:p>
@@ -1881,7 +1881,7 @@
                         <a:solidFill>
                           <a:srgbClr val="1E2226"/>
                         </a:solidFill>
-                        <a:latin typeface="Inter"/>
+                        <a:latin typeface="Arial"/>
                       </a:rPr>
                       <a:t>Time-pressed professionals, £9.4bn</a:t>
                     </a:r>
@@ -1897,7 +1897,7 @@
                       <a:solidFill>
                         <a:srgbClr val="1E2226"/>
                       </a:solidFill>
-                      <a:latin typeface="Inter"/>
+                      <a:latin typeface="Arial"/>
                     </a:defRPr>
                   </a:pPr>
                 </a:p>
@@ -1922,7 +1922,7 @@
                         <a:solidFill>
                           <a:srgbClr val="1E2226"/>
                         </a:solidFill>
-                        <a:latin typeface="Inter"/>
+                        <a:latin typeface="Arial"/>
                       </a:rPr>
                       <a:t>Value seekers, £12.9bn</a:t>
                     </a:r>
@@ -1938,12 +1938,12 @@
                       <a:solidFill>
                         <a:srgbClr val="1E2226"/>
                       </a:solidFill>
-                      <a:latin typeface="Inter"/>
+                      <a:latin typeface="Arial"/>
                     </a:defRPr>
                   </a:pPr>
                 </a:p>
               </c:txPr>
-              <c:dLblPos val="l"/>
+              <c:dLblPos val="b"/>
               <c:showLegendKey val="0"/>
               <c:showVal val="1"/>
               <c:showCatName val="0"/>
@@ -1963,7 +1963,7 @@
                         <a:solidFill>
                           <a:srgbClr val="1E2226"/>
                         </a:solidFill>
-                        <a:latin typeface="Inter"/>
+                        <a:latin typeface="Arial"/>
                       </a:rPr>
                       <a:t>Young urban, £4.3bn</a:t>
                     </a:r>
@@ -1979,7 +1979,7 @@
                       <a:solidFill>
                         <a:srgbClr val="1E2226"/>
                       </a:solidFill>
-                      <a:latin typeface="Inter"/>
+                      <a:latin typeface="Arial"/>
                     </a:defRPr>
                   </a:pPr>
                 </a:p>
@@ -2002,7 +2002,7 @@
                     <a:solidFill>
                       <a:srgbClr val="1E2226"/>
                     </a:solidFill>
-                    <a:latin typeface="Inter"/>
+                    <a:latin typeface="Arial"/>
                   </a:defRPr>
                 </a:pPr>
               </a:p>
@@ -2076,7 +2076,7 @@
                     <a:solidFill>
                       <a:srgbClr val="5C6670"/>
                     </a:solidFill>
-                    <a:latin typeface="Inter"/>
+                    <a:latin typeface="Arial"/>
                   </a:rPr>
                   <a:t>Segment spend growth, 2022-25 (% a year)</a:t>
                 </a:r>
@@ -2106,7 +2106,7 @@
                 <a:solidFill>
                   <a:srgbClr val="5C6670"/>
                 </a:solidFill>
-                <a:latin typeface="Inter"/>
+                <a:latin typeface="Arial"/>
               </a:defRPr>
             </a:pPr>
           </a:p>
@@ -2135,7 +2135,7 @@
                     <a:solidFill>
                       <a:srgbClr val="5C6670"/>
                     </a:solidFill>
-                    <a:latin typeface="Inter"/>
+                    <a:latin typeface="Arial"/>
                   </a:rPr>
                   <a:t>Brindle share of wallet (%)</a:t>
                 </a:r>
@@ -2165,7 +2165,7 @@
                 <a:solidFill>
                   <a:srgbClr val="5C6670"/>
                 </a:solidFill>
-                <a:latin typeface="Inter"/>
+                <a:latin typeface="Arial"/>
               </a:defRPr>
             </a:pPr>
           </a:p>
@@ -2192,7 +2192,7 @@
           <a:solidFill>
             <a:srgbClr val="5C6670"/>
           </a:solidFill>
-          <a:latin typeface="Inter"/>
+          <a:latin typeface="Arial"/>
         </a:defRPr>
       </a:pPr>
       <a:endParaRPr lang="en-US"/>
@@ -3688,7 +3688,7 @@
                     <a:solidFill>
                       <a:srgbClr val="5C6670"/>
                     </a:solidFill>
-                    <a:latin typeface="Inter"/>
+                    <a:latin typeface="Arial"/>
                   </a:rPr>
                   <a:t>Catchment grocery spend growth, 2022-25 (% a year)</a:t>
                 </a:r>
@@ -3718,7 +3718,7 @@
                 <a:solidFill>
                   <a:srgbClr val="5C6670"/>
                 </a:solidFill>
-                <a:latin typeface="Inter"/>
+                <a:latin typeface="Arial"/>
               </a:defRPr>
             </a:pPr>
           </a:p>
@@ -3747,7 +3747,7 @@
                     <a:solidFill>
                       <a:srgbClr val="5C6670"/>
                     </a:solidFill>
-                    <a:latin typeface="Inter"/>
+                    <a:latin typeface="Arial"/>
                   </a:rPr>
                   <a:t>Store cash return on capital, 2025 (%)</a:t>
                 </a:r>
@@ -3777,7 +3777,7 @@
                 <a:solidFill>
                   <a:srgbClr val="5C6670"/>
                 </a:solidFill>
-                <a:latin typeface="Inter"/>
+                <a:latin typeface="Arial"/>
               </a:defRPr>
             </a:pPr>
           </a:p>
@@ -3804,7 +3804,7 @@
           <a:solidFill>
             <a:srgbClr val="5C6670"/>
           </a:solidFill>
-          <a:latin typeface="Inter"/>
+          <a:latin typeface="Arial"/>
         </a:defRPr>
       </a:pPr>
       <a:endParaRPr lang="en-US"/>
@@ -3951,7 +3951,7 @@
             <c:idx val="1"/>
             <c:spPr>
               <a:solidFill>
-                <a:srgbClr val="C24E26"/>
+                <a:srgbClr val="2E7550"/>
               </a:solidFill>
             </c:spPr>
           </c:dPt>
@@ -4088,7 +4088,7 @@
                         <a:solidFill>
                           <a:srgbClr val="1E2226"/>
                         </a:solidFill>
-                        <a:latin typeface="Inter"/>
+                        <a:latin typeface="Arial"/>
                       </a:rPr>
                       <a:t>£227.4m</a:t>
                     </a:r>
@@ -4104,7 +4104,7 @@
                       <a:solidFill>
                         <a:srgbClr val="1E2226"/>
                       </a:solidFill>
-                      <a:latin typeface="Inter"/>
+                      <a:latin typeface="Arial"/>
                     </a:defRPr>
                   </a:pPr>
                 </a:p>
@@ -4127,9 +4127,9 @@
                     <a:r>
                       <a:rPr sz="750" b="1" i="0">
                         <a:solidFill>
-                          <a:srgbClr val="C24E26"/>
-                        </a:solidFill>
-                        <a:latin typeface="Inter"/>
+                          <a:srgbClr val="1E2226"/>
+                        </a:solidFill>
+                        <a:latin typeface="Arial"/>
                       </a:rPr>
                       <a:t>+57.5</a:t>
                     </a:r>
@@ -4143,9 +4143,9 @@
                   <a:pPr>
                     <a:defRPr sz="750" b="1" i="0">
                       <a:solidFill>
-                        <a:srgbClr val="C24E26"/>
-                      </a:solidFill>
-                      <a:latin typeface="Inter"/>
+                        <a:srgbClr val="1E2226"/>
+                      </a:solidFill>
+                      <a:latin typeface="Arial"/>
                     </a:defRPr>
                   </a:pPr>
                 </a:p>
@@ -4170,7 +4170,7 @@
                         <a:solidFill>
                           <a:srgbClr val="1E2226"/>
                         </a:solidFill>
-                        <a:latin typeface="Inter"/>
+                        <a:latin typeface="Arial"/>
                       </a:rPr>
                       <a:t>+19.3</a:t>
                     </a:r>
@@ -4186,7 +4186,7 @@
                       <a:solidFill>
                         <a:srgbClr val="1E2226"/>
                       </a:solidFill>
-                      <a:latin typeface="Inter"/>
+                      <a:latin typeface="Arial"/>
                     </a:defRPr>
                   </a:pPr>
                 </a:p>
@@ -4211,7 +4211,7 @@
                         <a:solidFill>
                           <a:srgbClr val="1E2226"/>
                         </a:solidFill>
-                        <a:latin typeface="Inter"/>
+                        <a:latin typeface="Arial"/>
                       </a:rPr>
                       <a:t>+11.8</a:t>
                     </a:r>
@@ -4227,7 +4227,7 @@
                       <a:solidFill>
                         <a:srgbClr val="1E2226"/>
                       </a:solidFill>
-                      <a:latin typeface="Inter"/>
+                      <a:latin typeface="Arial"/>
                     </a:defRPr>
                   </a:pPr>
                 </a:p>
@@ -4252,7 +4252,7 @@
                         <a:solidFill>
                           <a:srgbClr val="1E2226"/>
                         </a:solidFill>
-                        <a:latin typeface="Inter"/>
+                        <a:latin typeface="Arial"/>
                       </a:rPr>
                       <a:t>+11.7</a:t>
                     </a:r>
@@ -4268,7 +4268,7 @@
                       <a:solidFill>
                         <a:srgbClr val="1E2226"/>
                       </a:solidFill>
-                      <a:latin typeface="Inter"/>
+                      <a:latin typeface="Arial"/>
                     </a:defRPr>
                   </a:pPr>
                 </a:p>
@@ -4293,7 +4293,7 @@
                         <a:solidFill>
                           <a:srgbClr val="1E2226"/>
                         </a:solidFill>
-                        <a:latin typeface="Inter"/>
+                        <a:latin typeface="Arial"/>
                       </a:rPr>
                       <a:t>(4.4)</a:t>
                     </a:r>
@@ -4309,7 +4309,7 @@
                       <a:solidFill>
                         <a:srgbClr val="1E2226"/>
                       </a:solidFill>
-                      <a:latin typeface="Inter"/>
+                      <a:latin typeface="Arial"/>
                     </a:defRPr>
                   </a:pPr>
                 </a:p>
@@ -4334,7 +4334,7 @@
                         <a:solidFill>
                           <a:srgbClr val="1E2226"/>
                         </a:solidFill>
-                        <a:latin typeface="Inter"/>
+                        <a:latin typeface="Arial"/>
                       </a:rPr>
                       <a:t>£323.3m</a:t>
                     </a:r>
@@ -4350,7 +4350,7 @@
                       <a:solidFill>
                         <a:srgbClr val="1E2226"/>
                       </a:solidFill>
-                      <a:latin typeface="Inter"/>
+                      <a:latin typeface="Arial"/>
                     </a:defRPr>
                   </a:pPr>
                 </a:p>
@@ -4373,7 +4373,7 @@
                     <a:solidFill>
                       <a:srgbClr val="1E2226"/>
                     </a:solidFill>
-                    <a:latin typeface="Inter"/>
+                    <a:latin typeface="Arial"/>
                   </a:defRPr>
                 </a:pPr>
               </a:p>
@@ -4476,7 +4476,7 @@
                 <a:solidFill>
                   <a:srgbClr val="5C6670"/>
                 </a:solidFill>
-                <a:latin typeface="Inter"/>
+                <a:latin typeface="Arial"/>
               </a:defRPr>
             </a:pPr>
           </a:p>
@@ -4518,7 +4518,7 @@
           <a:solidFill>
             <a:srgbClr val="5C6670"/>
           </a:solidFill>
-          <a:latin typeface="Inter"/>
+          <a:latin typeface="Arial"/>
         </a:defRPr>
       </a:pPr>
       <a:endParaRPr lang="en-US"/>
@@ -8259,7 +8259,7 @@
                 <a:solidFill>
                   <a:srgbClr val="5C6670"/>
                 </a:solidFill>
-                <a:latin typeface="Inter"/>
+                <a:latin typeface="Arial"/>
               </a:rPr>
               <a:t>Brindle Markets  |  Store format strategy  |  Steering committee pre-read  |  Illustrative figures</a:t>
             </a:r>
@@ -8294,7 +8294,7 @@
                 <a:solidFill>
                   <a:srgbClr val="5C6670"/>
                 </a:solidFill>
-                <a:latin typeface="Inter"/>
+                <a:latin typeface="Arial"/>
               </a:rPr>
               <a:t>1</a:t>
             </a:fld>
@@ -8340,7 +8340,7 @@
                 <a:solidFill>
                   <a:srgbClr val="1F3A5F"/>
                 </a:solidFill>
-                <a:latin typeface="Inter"/>
+                <a:latin typeface="Arial"/>
               </a:rPr>
               <a:t>01  MARKET SHIFT</a:t>
             </a:r>
@@ -8386,7 +8386,7 @@
                 <a:solidFill>
                   <a:srgbClr val="1E2226"/>
                 </a:solidFill>
-                <a:latin typeface="Gelasio"/>
+                <a:latin typeface="Georgia"/>
               </a:rPr>
               <a:t>Grocery spend grows £12.9bn by 2028, yet large stores’ share falls from 47% to 36% as</a:t>
             </a:r>
@@ -8396,7 +8396,7 @@
                 <a:solidFill>
                   <a:srgbClr val="1E2226"/>
                 </a:solidFill>
-                <a:latin typeface="Gelasio"/>
+                <a:latin typeface="Georgia"/>
               </a:rPr>
               <a:t>shoppers trade the weekly shop for top-ups</a:t>
             </a:r>
@@ -8442,7 +8442,7 @@
                 <a:solidFill>
                   <a:srgbClr val="1E2226"/>
                 </a:solidFill>
-                <a:latin typeface="Inter"/>
+                <a:latin typeface="Arial"/>
               </a:rPr>
               <a:t>Share of regional grocery spend by channel</a:t>
             </a:r>
@@ -8488,7 +8488,7 @@
                 <a:solidFill>
                   <a:srgbClr val="5C6670"/>
                 </a:solidFill>
-                <a:latin typeface="Inter"/>
+                <a:latin typeface="Arial"/>
               </a:rPr>
               <a:t>% of spend; market £38.0bn in 2019, £46.4bn in 2025, £50.9bn forecast for 2028</a:t>
             </a:r>
@@ -8552,7 +8552,7 @@
                 <a:solidFill>
                   <a:srgbClr val="1E2226"/>
                 </a:solidFill>
-                <a:latin typeface="Inter"/>
+                <a:latin typeface="Arial"/>
               </a:rPr>
               <a:t>Shopping trips by mission</a:t>
             </a:r>
@@ -8598,9 +8598,9 @@
                 <a:solidFill>
                   <a:srgbClr val="5C6670"/>
                 </a:solidFill>
-                <a:latin typeface="Inter"/>
+                <a:latin typeface="Arial"/>
               </a:rPr>
-              <a:t>Trips per household per week, all missions 4.5 in 2019 and 5.0 in 2025; upper</a:t>
+              <a:t>Trips per household per week, all missions 4.5 in 2019 and 5.0 in 2025; upper bar</a:t>
             </a:r>
             <a:br/>
             <a:r>
@@ -8608,9 +8608,9 @@
                 <a:solidFill>
                   <a:srgbClr val="5C6670"/>
                 </a:solidFill>
-                <a:latin typeface="Inter"/>
+                <a:latin typeface="Arial"/>
               </a:rPr>
-              <a:t>bar 2019 (grey-blue), lower bar 2025</a:t>
+              <a:t>2019 (grey-blue), lower bar 2025</a:t>
             </a:r>
           </a:p>
         </p:txBody>
@@ -8701,7 +8701,7 @@
                 <a:solidFill>
                   <a:srgbClr val="1E2226"/>
                 </a:solidFill>
-                <a:latin typeface="Inter"/>
+                <a:latin typeface="Arial"/>
               </a:rPr>
               <a:t>What it means for Brindle</a:t>
             </a:r>
@@ -8747,7 +8747,7 @@
                 <a:solidFill>
                   <a:srgbClr val="1F3A5F"/>
                 </a:solidFill>
-                <a:latin typeface="Gelasio"/>
+                <a:latin typeface="Georgia"/>
               </a:rPr>
               <a:t>56%</a:t>
             </a:r>
@@ -8793,7 +8793,7 @@
                 <a:solidFill>
                   <a:srgbClr val="1E2226"/>
                 </a:solidFill>
-                <a:latin typeface="Inter"/>
+                <a:latin typeface="Arial"/>
               </a:rPr>
               <a:t>of Brindle's store sales come from its 58</a:t>
             </a:r>
@@ -8803,9 +8803,9 @@
                 <a:solidFill>
                   <a:srgbClr val="1E2226"/>
                 </a:solidFill>
-                <a:latin typeface="Inter"/>
+                <a:latin typeface="Arial"/>
               </a:rPr>
-              <a:t>superstores, against a 40% large-store share</a:t>
+              <a:t>superstores, against a 40% large-store share of</a:t>
             </a:r>
             <a:br/>
             <a:r>
@@ -8813,9 +8813,9 @@
                 <a:solidFill>
                   <a:srgbClr val="1E2226"/>
                 </a:solidFill>
-                <a:latin typeface="Inter"/>
+                <a:latin typeface="Arial"/>
               </a:rPr>
-              <a:t>of the market</a:t>
+              <a:t>the market</a:t>
             </a:r>
           </a:p>
         </p:txBody>
@@ -8859,7 +8859,7 @@
                 <a:solidFill>
                   <a:srgbClr val="1F3A5F"/>
                 </a:solidFill>
-                <a:latin typeface="Gelasio"/>
+                <a:latin typeface="Georgia"/>
               </a:rPr>
               <a:t>£82</a:t>
             </a:r>
@@ -8905,9 +8905,9 @@
                 <a:solidFill>
                   <a:srgbClr val="1E2226"/>
                 </a:solidFill>
-                <a:latin typeface="Inter"/>
+                <a:latin typeface="Arial"/>
               </a:rPr>
-              <a:t>average main-shop basket in 2025, up from</a:t>
+              <a:t>average main-shop basket in 2025, up from £71 in</a:t>
             </a:r>
             <a:br/>
             <a:r>
@@ -8915,9 +8915,9 @@
                 <a:solidFill>
                   <a:srgbClr val="1E2226"/>
                 </a:solidFill>
-                <a:latin typeface="Inter"/>
+                <a:latin typeface="Arial"/>
               </a:rPr>
-              <a:t>£71 in 2019: fewer big shops, each larger, and</a:t>
+              <a:t>2019: fewer big shops, each larger, and more</a:t>
             </a:r>
             <a:br/>
             <a:r>
@@ -8925,9 +8925,9 @@
                 <a:solidFill>
                   <a:srgbClr val="1E2226"/>
                 </a:solidFill>
-                <a:latin typeface="Inter"/>
+                <a:latin typeface="Arial"/>
               </a:rPr>
-              <a:t>more small ones between them</a:t>
+              <a:t>small ones between them</a:t>
             </a:r>
           </a:p>
         </p:txBody>
@@ -8971,7 +8971,7 @@
                 <a:solidFill>
                   <a:srgbClr val="1F3A5F"/>
                 </a:solidFill>
-                <a:latin typeface="Gelasio"/>
+                <a:latin typeface="Georgia"/>
               </a:rPr>
               <a:t>59%</a:t>
             </a:r>
@@ -8987,7 +8987,7 @@
         <p:spPr>
           <a:xfrm>
             <a:off x="9081259" y="3629406"/>
-            <a:ext cx="2589533" cy="563880"/>
+            <a:ext cx="2589533" cy="432435"/>
           </a:xfrm>
           <a:prstGeom prst="rect">
             <a:avLst/>
@@ -9017,9 +9017,9 @@
                 <a:solidFill>
                   <a:srgbClr val="1E2226"/>
                 </a:solidFill>
-                <a:latin typeface="Inter"/>
+                <a:latin typeface="Arial"/>
               </a:rPr>
-              <a:t>of 2028 spend goes to discounters,</a:t>
+              <a:t>of 2028 spend goes to discounters, convenience</a:t>
             </a:r>
             <a:br/>
             <a:r>
@@ -9027,9 +9027,9 @@
                 <a:solidFill>
                   <a:srgbClr val="1E2226"/>
                 </a:solidFill>
-                <a:latin typeface="Inter"/>
+                <a:latin typeface="Arial"/>
               </a:rPr>
-              <a:t>convenience and online; Brindle's</a:t>
+              <a:t>and online; Brindle's neighbourhood and express</a:t>
             </a:r>
             <a:br/>
             <a:r>
@@ -9037,19 +9037,9 @@
                 <a:solidFill>
                   <a:srgbClr val="1E2226"/>
                 </a:solidFill>
-                <a:latin typeface="Inter"/>
+                <a:latin typeface="Arial"/>
               </a:rPr>
-              <a:t>neighbourhood and express stores carry 8% of</a:t>
-            </a:r>
-            <a:br/>
-            <a:r>
-              <a:rPr sz="900" b="0" i="0">
-                <a:solidFill>
-                  <a:srgbClr val="1E2226"/>
-                </a:solidFill>
-                <a:latin typeface="Inter"/>
-              </a:rPr>
-              <a:t>its sales</a:t>
+              <a:t>stores carry 8% of its sales</a:t>
             </a:r>
           </a:p>
         </p:txBody>
@@ -9062,7 +9052,7 @@
         </p:nvSpPr>
         <p:spPr>
           <a:xfrm>
-            <a:off x="9081259" y="4303014"/>
+            <a:off x="9081259" y="4171569"/>
             <a:ext cx="2589533" cy="279400"/>
           </a:xfrm>
           <a:prstGeom prst="rect">
@@ -9093,7 +9083,7 @@
                 <a:solidFill>
                   <a:srgbClr val="1F3A5F"/>
                 </a:solidFill>
-                <a:latin typeface="Gelasio"/>
+                <a:latin typeface="Georgia"/>
               </a:rPr>
               <a:t>£0.4bn</a:t>
             </a:r>
@@ -9108,7 +9098,7 @@
         </p:nvSpPr>
         <p:spPr>
           <a:xfrm>
-            <a:off x="9081259" y="4609846"/>
+            <a:off x="9081259" y="4478401"/>
             <a:ext cx="2589533" cy="432435"/>
           </a:xfrm>
           <a:prstGeom prst="rect">
@@ -9139,9 +9129,9 @@
                 <a:solidFill>
                   <a:srgbClr val="1E2226"/>
                 </a:solidFill>
-                <a:latin typeface="Inter"/>
+                <a:latin typeface="Arial"/>
               </a:rPr>
-              <a:t>of the £12.9bn the market adds from 2019 to</a:t>
+              <a:t>of the £12.9bn the market adds from 2019 to 2028</a:t>
             </a:r>
             <a:br/>
             <a:r>
@@ -9149,9 +9139,9 @@
                 <a:solidFill>
                   <a:srgbClr val="1E2226"/>
                 </a:solidFill>
-                <a:latin typeface="Inter"/>
+                <a:latin typeface="Arial"/>
               </a:rPr>
-              <a:t>2028 reaches large stores, whose spend</a:t>
+              <a:t>reaches large stores, whose spend moves from</a:t>
             </a:r>
             <a:br/>
             <a:r>
@@ -9159,9 +9149,9 @@
                 <a:solidFill>
                   <a:srgbClr val="1E2226"/>
                 </a:solidFill>
-                <a:latin typeface="Inter"/>
+                <a:latin typeface="Arial"/>
               </a:rPr>
-              <a:t>moves from £17.9bn to £18.3bn</a:t>
+              <a:t>£17.9bn to £18.3bn</a:t>
             </a:r>
           </a:p>
         </p:txBody>
@@ -9205,7 +9195,7 @@
                 <a:solidFill>
                   <a:srgbClr val="5C6670"/>
                 </a:solidFill>
-                <a:latin typeface="Inter"/>
+                <a:latin typeface="Arial"/>
               </a:rPr>
               <a:t>Source: Brindle store P&amp;L, capital register and loyalty-card data, 2025; regional grocery market model; team analysis. All figures illustrative.</a:t>
             </a:r>
@@ -9281,7 +9271,7 @@
                 <a:solidFill>
                   <a:srgbClr val="5C6670"/>
                 </a:solidFill>
-                <a:latin typeface="Inter"/>
+                <a:latin typeface="Arial"/>
               </a:rPr>
               <a:t>Brindle Markets  |  Store format strategy  |  Steering committee pre-read  |  Illustrative figures</a:t>
             </a:r>
@@ -9316,7 +9306,7 @@
                 <a:solidFill>
                   <a:srgbClr val="5C6670"/>
                 </a:solidFill>
-                <a:latin typeface="Inter"/>
+                <a:latin typeface="Arial"/>
               </a:rPr>
               <a:t>1</a:t>
             </a:fld>
@@ -9362,7 +9352,7 @@
                 <a:solidFill>
                   <a:srgbClr val="1F3A5F"/>
                 </a:solidFill>
-                <a:latin typeface="Inter"/>
+                <a:latin typeface="Arial"/>
               </a:rPr>
               <a:t>02  FORMAT ECONOMICS</a:t>
             </a:r>
@@ -9408,7 +9398,7 @@
                 <a:solidFill>
                   <a:srgbClr val="1E2226"/>
                 </a:solidFill>
-                <a:latin typeface="Gelasio"/>
+                <a:latin typeface="Georgia"/>
               </a:rPr>
               <a:t>Superstores take 58% of Brindle’s capital but return 4.9%, under half the 12% hurdle;</a:t>
             </a:r>
@@ -9418,7 +9408,7 @@
                 <a:solidFill>
                   <a:srgbClr val="1E2226"/>
                 </a:solidFill>
-                <a:latin typeface="Gelasio"/>
+                <a:latin typeface="Georgia"/>
               </a:rPr>
               <a:t>neighbourhood stores return 19.5%</a:t>
             </a:r>
@@ -9464,7 +9454,7 @@
                 <a:solidFill>
                   <a:srgbClr val="1E2226"/>
                 </a:solidFill>
-                <a:latin typeface="Inter"/>
+                <a:latin typeface="Arial"/>
               </a:rPr>
               <a:t>Store P&amp;L by format, 2025</a:t>
             </a:r>
@@ -9510,7 +9500,7 @@
                 <a:solidFill>
                   <a:srgbClr val="5C6670"/>
                 </a:solidFill>
-                <a:latin typeface="Inter"/>
+                <a:latin typeface="Arial"/>
               </a:rPr>
               <a:t>£m unless stated; store EBITDA before central costs; cash return is store EBITDA over invested capital</a:t>
             </a:r>
@@ -9534,12 +9524,12 @@
             <a:tbl>
               <a:tblPr firstRow="0" bandRow="0" lastRow="0" firstCol="0" lastCol="0" bandCol="0"/>
               <a:tblGrid>
-                <a:gridCol w="2543959"/>
-                <a:gridCol w="881890"/>
-                <a:gridCol w="1015729"/>
-                <a:gridCol w="1201661"/>
-                <a:gridCol w="666728"/>
-                <a:gridCol w="545688"/>
+                <a:gridCol w="2454782"/>
+                <a:gridCol w="900140"/>
+                <a:gridCol w="1024946"/>
+                <a:gridCol w="1223732"/>
+                <a:gridCol w="692592"/>
+                <a:gridCol w="559463"/>
               </a:tblGrid>
               <a:tr h="177038">
                 <a:tc>
@@ -9552,7 +9542,7 @@
                         <a:solidFill>
                           <a:srgbClr val="1E2226"/>
                         </a:solidFill>
-                        <a:latin typeface="Inter"/>
+                        <a:latin typeface="Arial"/>
                       </a:endParaRPr>
                     </a:p>
                   </a:txBody>
@@ -9585,7 +9575,7 @@
                           <a:solidFill>
                             <a:srgbClr val="1E2226"/>
                           </a:solidFill>
-                          <a:latin typeface="Inter"/>
+                          <a:latin typeface="Arial"/>
                         </a:rPr>
                         <a:t>Superstore</a:t>
                       </a:r>
@@ -9593,7 +9583,7 @@
                         <a:solidFill>
                           <a:srgbClr val="1E2226"/>
                         </a:solidFill>
-                        <a:latin typeface="Inter"/>
+                        <a:latin typeface="Arial"/>
                       </a:endParaRPr>
                     </a:p>
                   </a:txBody>
@@ -9626,7 +9616,7 @@
                           <a:solidFill>
                             <a:srgbClr val="1E2226"/>
                           </a:solidFill>
-                          <a:latin typeface="Inter"/>
+                          <a:latin typeface="Arial"/>
                         </a:rPr>
                         <a:t>Supermarket</a:t>
                       </a:r>
@@ -9634,7 +9624,7 @@
                         <a:solidFill>
                           <a:srgbClr val="1E2226"/>
                         </a:solidFill>
-                        <a:latin typeface="Inter"/>
+                        <a:latin typeface="Arial"/>
                       </a:endParaRPr>
                     </a:p>
                   </a:txBody>
@@ -9667,7 +9657,7 @@
                           <a:solidFill>
                             <a:srgbClr val="1E2226"/>
                           </a:solidFill>
-                          <a:latin typeface="Inter"/>
+                          <a:latin typeface="Arial"/>
                         </a:rPr>
                         <a:t>Neighbourhood</a:t>
                       </a:r>
@@ -9675,7 +9665,7 @@
                         <a:solidFill>
                           <a:srgbClr val="1E2226"/>
                         </a:solidFill>
-                        <a:latin typeface="Inter"/>
+                        <a:latin typeface="Arial"/>
                       </a:endParaRPr>
                     </a:p>
                   </a:txBody>
@@ -9708,7 +9698,7 @@
                           <a:solidFill>
                             <a:srgbClr val="1E2226"/>
                           </a:solidFill>
-                          <a:latin typeface="Inter"/>
+                          <a:latin typeface="Arial"/>
                         </a:rPr>
                         <a:t>Express</a:t>
                       </a:r>
@@ -9716,7 +9706,7 @@
                         <a:solidFill>
                           <a:srgbClr val="1E2226"/>
                         </a:solidFill>
-                        <a:latin typeface="Inter"/>
+                        <a:latin typeface="Arial"/>
                       </a:endParaRPr>
                     </a:p>
                   </a:txBody>
@@ -9749,7 +9739,7 @@
                           <a:solidFill>
                             <a:srgbClr val="1E2226"/>
                           </a:solidFill>
-                          <a:latin typeface="Inter"/>
+                          <a:latin typeface="Arial"/>
                         </a:rPr>
                         <a:t>Estate</a:t>
                       </a:r>
@@ -9757,7 +9747,7 @@
                         <a:solidFill>
                           <a:srgbClr val="1E2226"/>
                         </a:solidFill>
-                        <a:latin typeface="Inter"/>
+                        <a:latin typeface="Arial"/>
                       </a:endParaRPr>
                     </a:p>
                   </a:txBody>
@@ -9792,7 +9782,7 @@
                           <a:solidFill>
                             <a:srgbClr val="1E2226"/>
                           </a:solidFill>
-                          <a:latin typeface="Inter"/>
+                          <a:latin typeface="Arial"/>
                         </a:rPr>
                         <a:t>Scale</a:t>
                       </a:r>
@@ -9800,7 +9790,7 @@
                         <a:solidFill>
                           <a:srgbClr val="1E2226"/>
                         </a:solidFill>
-                        <a:latin typeface="Inter"/>
+                        <a:latin typeface="Arial"/>
                       </a:endParaRPr>
                     </a:p>
                   </a:txBody>
@@ -9836,7 +9826,7 @@
                         <a:solidFill>
                           <a:srgbClr val="1E2226"/>
                         </a:solidFill>
-                        <a:latin typeface="Inter"/>
+                        <a:latin typeface="Arial"/>
                       </a:endParaRPr>
                     </a:p>
                   </a:txBody>
@@ -9872,7 +9862,7 @@
                         <a:solidFill>
                           <a:srgbClr val="1E2226"/>
                         </a:solidFill>
-                        <a:latin typeface="Inter"/>
+                        <a:latin typeface="Arial"/>
                       </a:endParaRPr>
                     </a:p>
                   </a:txBody>
@@ -9908,7 +9898,7 @@
                         <a:solidFill>
                           <a:srgbClr val="1E2226"/>
                         </a:solidFill>
-                        <a:latin typeface="Inter"/>
+                        <a:latin typeface="Arial"/>
                       </a:endParaRPr>
                     </a:p>
                   </a:txBody>
@@ -9944,7 +9934,7 @@
                         <a:solidFill>
                           <a:srgbClr val="1E2226"/>
                         </a:solidFill>
-                        <a:latin typeface="Inter"/>
+                        <a:latin typeface="Arial"/>
                       </a:endParaRPr>
                     </a:p>
                   </a:txBody>
@@ -9980,7 +9970,7 @@
                         <a:solidFill>
                           <a:srgbClr val="1E2226"/>
                         </a:solidFill>
-                        <a:latin typeface="Inter"/>
+                        <a:latin typeface="Arial"/>
                       </a:endParaRPr>
                     </a:p>
                   </a:txBody>
@@ -10017,7 +10007,7 @@
                           <a:solidFill>
                             <a:srgbClr val="1E2226"/>
                           </a:solidFill>
-                          <a:latin typeface="Inter"/>
+                          <a:latin typeface="Arial"/>
                         </a:rPr>
                         <a:t>Stores</a:t>
                       </a:r>
@@ -10025,7 +10015,7 @@
                         <a:solidFill>
                           <a:srgbClr val="1E2226"/>
                         </a:solidFill>
-                        <a:latin typeface="Inter"/>
+                        <a:latin typeface="Arial"/>
                       </a:endParaRPr>
                     </a:p>
                   </a:txBody>
@@ -10060,7 +10050,7 @@
                           <a:solidFill>
                             <a:srgbClr val="1E2226"/>
                           </a:solidFill>
-                          <a:latin typeface="Inter"/>
+                          <a:latin typeface="Arial"/>
                         </a:rPr>
                         <a:t>58</a:t>
                       </a:r>
@@ -10068,7 +10058,7 @@
                         <a:solidFill>
                           <a:srgbClr val="1E2226"/>
                         </a:solidFill>
-                        <a:latin typeface="Inter"/>
+                        <a:latin typeface="Arial"/>
                       </a:endParaRPr>
                     </a:p>
                   </a:txBody>
@@ -10103,7 +10093,7 @@
                           <a:solidFill>
                             <a:srgbClr val="1E2226"/>
                           </a:solidFill>
-                          <a:latin typeface="Inter"/>
+                          <a:latin typeface="Arial"/>
                         </a:rPr>
                         <a:t>96</a:t>
                       </a:r>
@@ -10111,7 +10101,7 @@
                         <a:solidFill>
                           <a:srgbClr val="1E2226"/>
                         </a:solidFill>
-                        <a:latin typeface="Inter"/>
+                        <a:latin typeface="Arial"/>
                       </a:endParaRPr>
                     </a:p>
                   </a:txBody>
@@ -10146,7 +10136,7 @@
                           <a:solidFill>
                             <a:srgbClr val="1E2226"/>
                           </a:solidFill>
-                          <a:latin typeface="Inter"/>
+                          <a:latin typeface="Arial"/>
                         </a:rPr>
                         <a:t>42</a:t>
                       </a:r>
@@ -10154,7 +10144,7 @@
                         <a:solidFill>
                           <a:srgbClr val="1E2226"/>
                         </a:solidFill>
-                        <a:latin typeface="Inter"/>
+                        <a:latin typeface="Arial"/>
                       </a:endParaRPr>
                     </a:p>
                   </a:txBody>
@@ -10189,7 +10179,7 @@
                           <a:solidFill>
                             <a:srgbClr val="1E2226"/>
                           </a:solidFill>
-                          <a:latin typeface="Inter"/>
+                          <a:latin typeface="Arial"/>
                         </a:rPr>
                         <a:t>18</a:t>
                       </a:r>
@@ -10197,7 +10187,7 @@
                         <a:solidFill>
                           <a:srgbClr val="1E2226"/>
                         </a:solidFill>
-                        <a:latin typeface="Inter"/>
+                        <a:latin typeface="Arial"/>
                       </a:endParaRPr>
                     </a:p>
                   </a:txBody>
@@ -10232,7 +10222,7 @@
                           <a:solidFill>
                             <a:srgbClr val="1E2226"/>
                           </a:solidFill>
-                          <a:latin typeface="Inter"/>
+                          <a:latin typeface="Arial"/>
                         </a:rPr>
                         <a:t>214</a:t>
                       </a:r>
@@ -10240,7 +10230,7 @@
                         <a:solidFill>
                           <a:srgbClr val="1E2226"/>
                         </a:solidFill>
-                        <a:latin typeface="Inter"/>
+                        <a:latin typeface="Arial"/>
                       </a:endParaRPr>
                     </a:p>
                   </a:txBody>
@@ -10277,7 +10267,7 @@
                           <a:solidFill>
                             <a:srgbClr val="1E2226"/>
                           </a:solidFill>
-                          <a:latin typeface="Inter"/>
+                          <a:latin typeface="Arial"/>
                         </a:rPr>
                         <a:t>Average sales area (k sq ft)</a:t>
                       </a:r>
@@ -10285,7 +10275,7 @@
                         <a:solidFill>
                           <a:srgbClr val="1E2226"/>
                         </a:solidFill>
-                        <a:latin typeface="Inter"/>
+                        <a:latin typeface="Arial"/>
                       </a:endParaRPr>
                     </a:p>
                   </a:txBody>
@@ -10320,7 +10310,7 @@
                           <a:solidFill>
                             <a:srgbClr val="1E2226"/>
                           </a:solidFill>
-                          <a:latin typeface="Inter"/>
+                          <a:latin typeface="Arial"/>
                         </a:rPr>
                         <a:t>55</a:t>
                       </a:r>
@@ -10328,7 +10318,7 @@
                         <a:solidFill>
                           <a:srgbClr val="1E2226"/>
                         </a:solidFill>
-                        <a:latin typeface="Inter"/>
+                        <a:latin typeface="Arial"/>
                       </a:endParaRPr>
                     </a:p>
                   </a:txBody>
@@ -10363,7 +10353,7 @@
                           <a:solidFill>
                             <a:srgbClr val="1E2226"/>
                           </a:solidFill>
-                          <a:latin typeface="Inter"/>
+                          <a:latin typeface="Arial"/>
                         </a:rPr>
                         <a:t>24</a:t>
                       </a:r>
@@ -10371,7 +10361,7 @@
                         <a:solidFill>
                           <a:srgbClr val="1E2226"/>
                         </a:solidFill>
-                        <a:latin typeface="Inter"/>
+                        <a:latin typeface="Arial"/>
                       </a:endParaRPr>
                     </a:p>
                   </a:txBody>
@@ -10406,7 +10396,7 @@
                           <a:solidFill>
                             <a:srgbClr val="1E2226"/>
                           </a:solidFill>
-                          <a:latin typeface="Inter"/>
+                          <a:latin typeface="Arial"/>
                         </a:rPr>
                         <a:t>8</a:t>
                       </a:r>
@@ -10414,7 +10404,7 @@
                         <a:solidFill>
                           <a:srgbClr val="1E2226"/>
                         </a:solidFill>
-                        <a:latin typeface="Inter"/>
+                        <a:latin typeface="Arial"/>
                       </a:endParaRPr>
                     </a:p>
                   </a:txBody>
@@ -10449,7 +10439,7 @@
                           <a:solidFill>
                             <a:srgbClr val="1E2226"/>
                           </a:solidFill>
-                          <a:latin typeface="Inter"/>
+                          <a:latin typeface="Arial"/>
                         </a:rPr>
                         <a:t>2.8</a:t>
                       </a:r>
@@ -10457,7 +10447,7 @@
                         <a:solidFill>
                           <a:srgbClr val="1E2226"/>
                         </a:solidFill>
-                        <a:latin typeface="Inter"/>
+                        <a:latin typeface="Arial"/>
                       </a:endParaRPr>
                     </a:p>
                   </a:txBody>
@@ -10492,7 +10482,7 @@
                           <a:solidFill>
                             <a:srgbClr val="1E2226"/>
                           </a:solidFill>
-                          <a:latin typeface="Inter"/>
+                          <a:latin typeface="Arial"/>
                         </a:rPr>
                         <a:t>27.5</a:t>
                       </a:r>
@@ -10500,7 +10490,7 @@
                         <a:solidFill>
                           <a:srgbClr val="1E2226"/>
                         </a:solidFill>
-                        <a:latin typeface="Inter"/>
+                        <a:latin typeface="Arial"/>
                       </a:endParaRPr>
                     </a:p>
                   </a:txBody>
@@ -10537,7 +10527,7 @@
                           <a:solidFill>
                             <a:srgbClr val="1E2226"/>
                           </a:solidFill>
-                          <a:latin typeface="Inter"/>
+                          <a:latin typeface="Arial"/>
                         </a:rPr>
                         <a:t>Sales (£m)</a:t>
                       </a:r>
@@ -10545,7 +10535,7 @@
                         <a:solidFill>
                           <a:srgbClr val="1E2226"/>
                         </a:solidFill>
-                        <a:latin typeface="Inter"/>
+                        <a:latin typeface="Arial"/>
                       </a:endParaRPr>
                     </a:p>
                   </a:txBody>
@@ -10580,7 +10570,7 @@
                           <a:solidFill>
                             <a:srgbClr val="1E2226"/>
                           </a:solidFill>
-                          <a:latin typeface="Inter"/>
+                          <a:latin typeface="Arial"/>
                         </a:rPr>
                         <a:t>2,172</a:t>
                       </a:r>
@@ -10588,7 +10578,7 @@
                         <a:solidFill>
                           <a:srgbClr val="1E2226"/>
                         </a:solidFill>
-                        <a:latin typeface="Inter"/>
+                        <a:latin typeface="Arial"/>
                       </a:endParaRPr>
                     </a:p>
                   </a:txBody>
@@ -10623,7 +10613,7 @@
                           <a:solidFill>
                             <a:srgbClr val="1E2226"/>
                           </a:solidFill>
-                          <a:latin typeface="Inter"/>
+                          <a:latin typeface="Arial"/>
                         </a:rPr>
                         <a:t>1,404</a:t>
                       </a:r>
@@ -10631,7 +10621,7 @@
                         <a:solidFill>
                           <a:srgbClr val="1E2226"/>
                         </a:solidFill>
-                        <a:latin typeface="Inter"/>
+                        <a:latin typeface="Arial"/>
                       </a:endParaRPr>
                     </a:p>
                   </a:txBody>
@@ -10666,7 +10656,7 @@
                           <a:solidFill>
                             <a:srgbClr val="1E2226"/>
                           </a:solidFill>
-                          <a:latin typeface="Inter"/>
+                          <a:latin typeface="Arial"/>
                         </a:rPr>
                         <a:t>263</a:t>
                       </a:r>
@@ -10674,7 +10664,7 @@
                         <a:solidFill>
                           <a:srgbClr val="1E2226"/>
                         </a:solidFill>
-                        <a:latin typeface="Inter"/>
+                        <a:latin typeface="Arial"/>
                       </a:endParaRPr>
                     </a:p>
                   </a:txBody>
@@ -10709,7 +10699,7 @@
                           <a:solidFill>
                             <a:srgbClr val="1E2226"/>
                           </a:solidFill>
-                          <a:latin typeface="Inter"/>
+                          <a:latin typeface="Arial"/>
                         </a:rPr>
                         <a:t>51</a:t>
                       </a:r>
@@ -10717,7 +10707,7 @@
                         <a:solidFill>
                           <a:srgbClr val="1E2226"/>
                         </a:solidFill>
-                        <a:latin typeface="Inter"/>
+                        <a:latin typeface="Arial"/>
                       </a:endParaRPr>
                     </a:p>
                   </a:txBody>
@@ -10752,7 +10742,7 @@
                           <a:solidFill>
                             <a:srgbClr val="1E2226"/>
                           </a:solidFill>
-                          <a:latin typeface="Inter"/>
+                          <a:latin typeface="Arial"/>
                         </a:rPr>
                         <a:t>3,890</a:t>
                       </a:r>
@@ -10760,7 +10750,7 @@
                         <a:solidFill>
                           <a:srgbClr val="1E2226"/>
                         </a:solidFill>
-                        <a:latin typeface="Inter"/>
+                        <a:latin typeface="Arial"/>
                       </a:endParaRPr>
                     </a:p>
                   </a:txBody>
@@ -10797,7 +10787,7 @@
                           <a:solidFill>
                             <a:srgbClr val="1E2226"/>
                           </a:solidFill>
-                          <a:latin typeface="Inter"/>
+                          <a:latin typeface="Arial"/>
                         </a:rPr>
                         <a:t>Sales per store (£m)</a:t>
                       </a:r>
@@ -10805,7 +10795,7 @@
                         <a:solidFill>
                           <a:srgbClr val="1E2226"/>
                         </a:solidFill>
-                        <a:latin typeface="Inter"/>
+                        <a:latin typeface="Arial"/>
                       </a:endParaRPr>
                     </a:p>
                   </a:txBody>
@@ -10840,7 +10830,7 @@
                           <a:solidFill>
                             <a:srgbClr val="1E2226"/>
                           </a:solidFill>
-                          <a:latin typeface="Inter"/>
+                          <a:latin typeface="Arial"/>
                         </a:rPr>
                         <a:t>37.4</a:t>
                       </a:r>
@@ -10848,7 +10838,7 @@
                         <a:solidFill>
                           <a:srgbClr val="1E2226"/>
                         </a:solidFill>
-                        <a:latin typeface="Inter"/>
+                        <a:latin typeface="Arial"/>
                       </a:endParaRPr>
                     </a:p>
                   </a:txBody>
@@ -10883,7 +10873,7 @@
                           <a:solidFill>
                             <a:srgbClr val="1E2226"/>
                           </a:solidFill>
-                          <a:latin typeface="Inter"/>
+                          <a:latin typeface="Arial"/>
                         </a:rPr>
                         <a:t>14.6</a:t>
                       </a:r>
@@ -10891,7 +10881,7 @@
                         <a:solidFill>
                           <a:srgbClr val="1E2226"/>
                         </a:solidFill>
-                        <a:latin typeface="Inter"/>
+                        <a:latin typeface="Arial"/>
                       </a:endParaRPr>
                     </a:p>
                   </a:txBody>
@@ -10926,7 +10916,7 @@
                           <a:solidFill>
                             <a:srgbClr val="1E2226"/>
                           </a:solidFill>
-                          <a:latin typeface="Inter"/>
+                          <a:latin typeface="Arial"/>
                         </a:rPr>
                         <a:t>6.3</a:t>
                       </a:r>
@@ -10934,7 +10924,7 @@
                         <a:solidFill>
                           <a:srgbClr val="1E2226"/>
                         </a:solidFill>
-                        <a:latin typeface="Inter"/>
+                        <a:latin typeface="Arial"/>
                       </a:endParaRPr>
                     </a:p>
                   </a:txBody>
@@ -10969,7 +10959,7 @@
                           <a:solidFill>
                             <a:srgbClr val="1E2226"/>
                           </a:solidFill>
-                          <a:latin typeface="Inter"/>
+                          <a:latin typeface="Arial"/>
                         </a:rPr>
                         <a:t>2.8</a:t>
                       </a:r>
@@ -10977,7 +10967,7 @@
                         <a:solidFill>
                           <a:srgbClr val="1E2226"/>
                         </a:solidFill>
-                        <a:latin typeface="Inter"/>
+                        <a:latin typeface="Arial"/>
                       </a:endParaRPr>
                     </a:p>
                   </a:txBody>
@@ -11012,7 +11002,7 @@
                           <a:solidFill>
                             <a:srgbClr val="1E2226"/>
                           </a:solidFill>
-                          <a:latin typeface="Inter"/>
+                          <a:latin typeface="Arial"/>
                         </a:rPr>
                         <a:t>18.2</a:t>
                       </a:r>
@@ -11020,7 +11010,7 @@
                         <a:solidFill>
                           <a:srgbClr val="1E2226"/>
                         </a:solidFill>
-                        <a:latin typeface="Inter"/>
+                        <a:latin typeface="Arial"/>
                       </a:endParaRPr>
                     </a:p>
                   </a:txBody>
@@ -11057,7 +11047,7 @@
                           <a:solidFill>
                             <a:srgbClr val="1E2226"/>
                           </a:solidFill>
-                          <a:latin typeface="Inter"/>
+                          <a:latin typeface="Arial"/>
                         </a:rPr>
                         <a:t>Sales density (£ per sq ft per week)</a:t>
                       </a:r>
@@ -11065,7 +11055,7 @@
                         <a:solidFill>
                           <a:srgbClr val="1E2226"/>
                         </a:solidFill>
-                        <a:latin typeface="Inter"/>
+                        <a:latin typeface="Arial"/>
                       </a:endParaRPr>
                     </a:p>
                   </a:txBody>
@@ -11100,7 +11090,7 @@
                           <a:solidFill>
                             <a:srgbClr val="1E2226"/>
                           </a:solidFill>
-                          <a:latin typeface="Inter"/>
+                          <a:latin typeface="Arial"/>
                         </a:rPr>
                         <a:t>13.09</a:t>
                       </a:r>
@@ -11108,7 +11098,7 @@
                         <a:solidFill>
                           <a:srgbClr val="1E2226"/>
                         </a:solidFill>
-                        <a:latin typeface="Inter"/>
+                        <a:latin typeface="Arial"/>
                       </a:endParaRPr>
                     </a:p>
                   </a:txBody>
@@ -11143,7 +11133,7 @@
                           <a:solidFill>
                             <a:srgbClr val="1E2226"/>
                           </a:solidFill>
-                          <a:latin typeface="Inter"/>
+                          <a:latin typeface="Arial"/>
                         </a:rPr>
                         <a:t>11.72</a:t>
                       </a:r>
@@ -11151,7 +11141,7 @@
                         <a:solidFill>
                           <a:srgbClr val="1E2226"/>
                         </a:solidFill>
-                        <a:latin typeface="Inter"/>
+                        <a:latin typeface="Arial"/>
                       </a:endParaRPr>
                     </a:p>
                   </a:txBody>
@@ -11186,7 +11176,7 @@
                           <a:solidFill>
                             <a:srgbClr val="1E2226"/>
                           </a:solidFill>
-                          <a:latin typeface="Inter"/>
+                          <a:latin typeface="Arial"/>
                         </a:rPr>
                         <a:t>15.05</a:t>
                       </a:r>
@@ -11194,7 +11184,7 @@
                         <a:solidFill>
                           <a:srgbClr val="1E2226"/>
                         </a:solidFill>
-                        <a:latin typeface="Inter"/>
+                        <a:latin typeface="Arial"/>
                       </a:endParaRPr>
                     </a:p>
                   </a:txBody>
@@ -11229,7 +11219,7 @@
                           <a:solidFill>
                             <a:srgbClr val="1E2226"/>
                           </a:solidFill>
-                          <a:latin typeface="Inter"/>
+                          <a:latin typeface="Arial"/>
                         </a:rPr>
                         <a:t>19.42</a:t>
                       </a:r>
@@ -11237,7 +11227,7 @@
                         <a:solidFill>
                           <a:srgbClr val="1E2226"/>
                         </a:solidFill>
-                        <a:latin typeface="Inter"/>
+                        <a:latin typeface="Arial"/>
                       </a:endParaRPr>
                     </a:p>
                   </a:txBody>
@@ -11272,7 +11262,7 @@
                           <a:solidFill>
                             <a:srgbClr val="1E2226"/>
                           </a:solidFill>
-                          <a:latin typeface="Inter"/>
+                          <a:latin typeface="Arial"/>
                         </a:rPr>
                         <a:t>12.72</a:t>
                       </a:r>
@@ -11280,7 +11270,7 @@
                         <a:solidFill>
                           <a:srgbClr val="1E2226"/>
                         </a:solidFill>
-                        <a:latin typeface="Inter"/>
+                        <a:latin typeface="Arial"/>
                       </a:endParaRPr>
                     </a:p>
                   </a:txBody>
@@ -11317,7 +11307,7 @@
                           <a:solidFill>
                             <a:srgbClr val="1E2226"/>
                           </a:solidFill>
-                          <a:latin typeface="Inter"/>
+                          <a:latin typeface="Arial"/>
                         </a:rPr>
                         <a:t>Share of store sales (%)</a:t>
                       </a:r>
@@ -11325,7 +11315,7 @@
                         <a:solidFill>
                           <a:srgbClr val="1E2226"/>
                         </a:solidFill>
-                        <a:latin typeface="Inter"/>
+                        <a:latin typeface="Arial"/>
                       </a:endParaRPr>
                     </a:p>
                   </a:txBody>
@@ -11360,7 +11350,7 @@
                           <a:solidFill>
                             <a:srgbClr val="1E2226"/>
                           </a:solidFill>
-                          <a:latin typeface="Inter"/>
+                          <a:latin typeface="Arial"/>
                         </a:rPr>
                         <a:t>56</a:t>
                       </a:r>
@@ -11368,7 +11358,7 @@
                         <a:solidFill>
                           <a:srgbClr val="1E2226"/>
                         </a:solidFill>
-                        <a:latin typeface="Inter"/>
+                        <a:latin typeface="Arial"/>
                       </a:endParaRPr>
                     </a:p>
                   </a:txBody>
@@ -11403,7 +11393,7 @@
                           <a:solidFill>
                             <a:srgbClr val="1E2226"/>
                           </a:solidFill>
-                          <a:latin typeface="Inter"/>
+                          <a:latin typeface="Arial"/>
                         </a:rPr>
                         <a:t>36</a:t>
                       </a:r>
@@ -11411,7 +11401,7 @@
                         <a:solidFill>
                           <a:srgbClr val="1E2226"/>
                         </a:solidFill>
-                        <a:latin typeface="Inter"/>
+                        <a:latin typeface="Arial"/>
                       </a:endParaRPr>
                     </a:p>
                   </a:txBody>
@@ -11446,7 +11436,7 @@
                           <a:solidFill>
                             <a:srgbClr val="1E2226"/>
                           </a:solidFill>
-                          <a:latin typeface="Inter"/>
+                          <a:latin typeface="Arial"/>
                         </a:rPr>
                         <a:t>7</a:t>
                       </a:r>
@@ -11454,7 +11444,7 @@
                         <a:solidFill>
                           <a:srgbClr val="1E2226"/>
                         </a:solidFill>
-                        <a:latin typeface="Inter"/>
+                        <a:latin typeface="Arial"/>
                       </a:endParaRPr>
                     </a:p>
                   </a:txBody>
@@ -11489,7 +11479,7 @@
                           <a:solidFill>
                             <a:srgbClr val="1E2226"/>
                           </a:solidFill>
-                          <a:latin typeface="Inter"/>
+                          <a:latin typeface="Arial"/>
                         </a:rPr>
                         <a:t>1</a:t>
                       </a:r>
@@ -11497,7 +11487,7 @@
                         <a:solidFill>
                           <a:srgbClr val="1E2226"/>
                         </a:solidFill>
-                        <a:latin typeface="Inter"/>
+                        <a:latin typeface="Arial"/>
                       </a:endParaRPr>
                     </a:p>
                   </a:txBody>
@@ -11532,7 +11522,7 @@
                           <a:solidFill>
                             <a:srgbClr val="1E2226"/>
                           </a:solidFill>
-                          <a:latin typeface="Inter"/>
+                          <a:latin typeface="Arial"/>
                         </a:rPr>
                         <a:t>100</a:t>
                       </a:r>
@@ -11540,7 +11530,7 @@
                         <a:solidFill>
                           <a:srgbClr val="1E2226"/>
                         </a:solidFill>
-                        <a:latin typeface="Inter"/>
+                        <a:latin typeface="Arial"/>
                       </a:endParaRPr>
                     </a:p>
                   </a:txBody>
@@ -11577,7 +11567,7 @@
                           <a:solidFill>
                             <a:srgbClr val="1E2226"/>
                           </a:solidFill>
-                          <a:latin typeface="Inter"/>
+                          <a:latin typeface="Arial"/>
                         </a:rPr>
                         <a:t>Average years since last refit</a:t>
                       </a:r>
@@ -11585,7 +11575,7 @@
                         <a:solidFill>
                           <a:srgbClr val="1E2226"/>
                         </a:solidFill>
-                        <a:latin typeface="Inter"/>
+                        <a:latin typeface="Arial"/>
                       </a:endParaRPr>
                     </a:p>
                   </a:txBody>
@@ -11620,7 +11610,7 @@
                           <a:solidFill>
                             <a:srgbClr val="1E2226"/>
                           </a:solidFill>
-                          <a:latin typeface="Inter"/>
+                          <a:latin typeface="Arial"/>
                         </a:rPr>
                         <a:t>9.6</a:t>
                       </a:r>
@@ -11628,7 +11618,7 @@
                         <a:solidFill>
                           <a:srgbClr val="1E2226"/>
                         </a:solidFill>
-                        <a:latin typeface="Inter"/>
+                        <a:latin typeface="Arial"/>
                       </a:endParaRPr>
                     </a:p>
                   </a:txBody>
@@ -11663,7 +11653,7 @@
                           <a:solidFill>
                             <a:srgbClr val="1E2226"/>
                           </a:solidFill>
-                          <a:latin typeface="Inter"/>
+                          <a:latin typeface="Arial"/>
                         </a:rPr>
                         <a:t>7.2</a:t>
                       </a:r>
@@ -11671,7 +11661,7 @@
                         <a:solidFill>
                           <a:srgbClr val="1E2226"/>
                         </a:solidFill>
-                        <a:latin typeface="Inter"/>
+                        <a:latin typeface="Arial"/>
                       </a:endParaRPr>
                     </a:p>
                   </a:txBody>
@@ -11706,7 +11696,7 @@
                           <a:solidFill>
                             <a:srgbClr val="1E2226"/>
                           </a:solidFill>
-                          <a:latin typeface="Inter"/>
+                          <a:latin typeface="Arial"/>
                         </a:rPr>
                         <a:t>3.1</a:t>
                       </a:r>
@@ -11714,7 +11704,7 @@
                         <a:solidFill>
                           <a:srgbClr val="1E2226"/>
                         </a:solidFill>
-                        <a:latin typeface="Inter"/>
+                        <a:latin typeface="Arial"/>
                       </a:endParaRPr>
                     </a:p>
                   </a:txBody>
@@ -11749,7 +11739,7 @@
                           <a:solidFill>
                             <a:srgbClr val="1E2226"/>
                           </a:solidFill>
-                          <a:latin typeface="Inter"/>
+                          <a:latin typeface="Arial"/>
                         </a:rPr>
                         <a:t>2.4</a:t>
                       </a:r>
@@ -11757,7 +11747,7 @@
                         <a:solidFill>
                           <a:srgbClr val="1E2226"/>
                         </a:solidFill>
-                        <a:latin typeface="Inter"/>
+                        <a:latin typeface="Arial"/>
                       </a:endParaRPr>
                     </a:p>
                   </a:txBody>
@@ -11792,7 +11782,7 @@
                           <a:solidFill>
                             <a:srgbClr val="1E2226"/>
                           </a:solidFill>
-                          <a:latin typeface="Inter"/>
+                          <a:latin typeface="Arial"/>
                         </a:rPr>
                         <a:t>6.6</a:t>
                       </a:r>
@@ -11800,7 +11790,7 @@
                         <a:solidFill>
                           <a:srgbClr val="1E2226"/>
                         </a:solidFill>
-                        <a:latin typeface="Inter"/>
+                        <a:latin typeface="Arial"/>
                       </a:endParaRPr>
                     </a:p>
                   </a:txBody>
@@ -11837,7 +11827,7 @@
                           <a:solidFill>
                             <a:srgbClr val="1E2226"/>
                           </a:solidFill>
-                          <a:latin typeface="Inter"/>
+                          <a:latin typeface="Arial"/>
                         </a:rPr>
                         <a:t>Trading and profit</a:t>
                       </a:r>
@@ -11845,7 +11835,7 @@
                         <a:solidFill>
                           <a:srgbClr val="1E2226"/>
                         </a:solidFill>
-                        <a:latin typeface="Inter"/>
+                        <a:latin typeface="Arial"/>
                       </a:endParaRPr>
                     </a:p>
                   </a:txBody>
@@ -11881,7 +11871,7 @@
                         <a:solidFill>
                           <a:srgbClr val="1E2226"/>
                         </a:solidFill>
-                        <a:latin typeface="Inter"/>
+                        <a:latin typeface="Arial"/>
                       </a:endParaRPr>
                     </a:p>
                   </a:txBody>
@@ -11917,7 +11907,7 @@
                         <a:solidFill>
                           <a:srgbClr val="1E2226"/>
                         </a:solidFill>
-                        <a:latin typeface="Inter"/>
+                        <a:latin typeface="Arial"/>
                       </a:endParaRPr>
                     </a:p>
                   </a:txBody>
@@ -11953,7 +11943,7 @@
                         <a:solidFill>
                           <a:srgbClr val="1E2226"/>
                         </a:solidFill>
-                        <a:latin typeface="Inter"/>
+                        <a:latin typeface="Arial"/>
                       </a:endParaRPr>
                     </a:p>
                   </a:txBody>
@@ -11989,7 +11979,7 @@
                         <a:solidFill>
                           <a:srgbClr val="1E2226"/>
                         </a:solidFill>
-                        <a:latin typeface="Inter"/>
+                        <a:latin typeface="Arial"/>
                       </a:endParaRPr>
                     </a:p>
                   </a:txBody>
@@ -12025,7 +12015,7 @@
                         <a:solidFill>
                           <a:srgbClr val="1E2226"/>
                         </a:solidFill>
-                        <a:latin typeface="Inter"/>
+                        <a:latin typeface="Arial"/>
                       </a:endParaRPr>
                     </a:p>
                   </a:txBody>
@@ -12062,7 +12052,7 @@
                           <a:solidFill>
                             <a:srgbClr val="1E2226"/>
                           </a:solidFill>
-                          <a:latin typeface="Inter"/>
+                          <a:latin typeface="Arial"/>
                         </a:rPr>
                         <a:t>Like-for-like sales growth, 2025 (%)</a:t>
                       </a:r>
@@ -12070,7 +12060,7 @@
                         <a:solidFill>
                           <a:srgbClr val="1E2226"/>
                         </a:solidFill>
-                        <a:latin typeface="Inter"/>
+                        <a:latin typeface="Arial"/>
                       </a:endParaRPr>
                     </a:p>
                   </a:txBody>
@@ -12105,7 +12095,7 @@
                           <a:solidFill>
                             <a:srgbClr val="1E2226"/>
                           </a:solidFill>
-                          <a:latin typeface="Inter"/>
+                          <a:latin typeface="Arial"/>
                         </a:rPr>
                         <a:t>(1.9)</a:t>
                       </a:r>
@@ -12113,7 +12103,7 @@
                         <a:solidFill>
                           <a:srgbClr val="1E2226"/>
                         </a:solidFill>
-                        <a:latin typeface="Inter"/>
+                        <a:latin typeface="Arial"/>
                       </a:endParaRPr>
                     </a:p>
                   </a:txBody>
@@ -12148,7 +12138,7 @@
                           <a:solidFill>
                             <a:srgbClr val="1E2226"/>
                           </a:solidFill>
-                          <a:latin typeface="Inter"/>
+                          <a:latin typeface="Arial"/>
                         </a:rPr>
                         <a:t>0.8</a:t>
                       </a:r>
@@ -12156,7 +12146,7 @@
                         <a:solidFill>
                           <a:srgbClr val="1E2226"/>
                         </a:solidFill>
-                        <a:latin typeface="Inter"/>
+                        <a:latin typeface="Arial"/>
                       </a:endParaRPr>
                     </a:p>
                   </a:txBody>
@@ -12191,7 +12181,7 @@
                           <a:solidFill>
                             <a:srgbClr val="1E2226"/>
                           </a:solidFill>
-                          <a:latin typeface="Inter"/>
+                          <a:latin typeface="Arial"/>
                         </a:rPr>
                         <a:t>5.4</a:t>
                       </a:r>
@@ -12199,7 +12189,7 @@
                         <a:solidFill>
                           <a:srgbClr val="1E2226"/>
                         </a:solidFill>
-                        <a:latin typeface="Inter"/>
+                        <a:latin typeface="Arial"/>
                       </a:endParaRPr>
                     </a:p>
                   </a:txBody>
@@ -12234,7 +12224,7 @@
                           <a:solidFill>
                             <a:srgbClr val="1E2226"/>
                           </a:solidFill>
-                          <a:latin typeface="Inter"/>
+                          <a:latin typeface="Arial"/>
                         </a:rPr>
                         <a:t>4.2</a:t>
                       </a:r>
@@ -12242,7 +12232,7 @@
                         <a:solidFill>
                           <a:srgbClr val="1E2226"/>
                         </a:solidFill>
-                        <a:latin typeface="Inter"/>
+                        <a:latin typeface="Arial"/>
                       </a:endParaRPr>
                     </a:p>
                   </a:txBody>
@@ -12277,7 +12267,7 @@
                           <a:solidFill>
                             <a:srgbClr val="1E2226"/>
                           </a:solidFill>
-                          <a:latin typeface="Inter"/>
+                          <a:latin typeface="Arial"/>
                         </a:rPr>
                         <a:t>(0.4)</a:t>
                       </a:r>
@@ -12285,7 +12275,7 @@
                         <a:solidFill>
                           <a:srgbClr val="1E2226"/>
                         </a:solidFill>
-                        <a:latin typeface="Inter"/>
+                        <a:latin typeface="Arial"/>
                       </a:endParaRPr>
                     </a:p>
                   </a:txBody>
@@ -12322,7 +12312,7 @@
                           <a:solidFill>
                             <a:srgbClr val="1E2226"/>
                           </a:solidFill>
-                          <a:latin typeface="Inter"/>
+                          <a:latin typeface="Arial"/>
                         </a:rPr>
                         <a:t>Gross margin (%)</a:t>
                       </a:r>
@@ -12330,7 +12320,7 @@
                         <a:solidFill>
                           <a:srgbClr val="1E2226"/>
                         </a:solidFill>
-                        <a:latin typeface="Inter"/>
+                        <a:latin typeface="Arial"/>
                       </a:endParaRPr>
                     </a:p>
                   </a:txBody>
@@ -12365,7 +12355,7 @@
                           <a:solidFill>
                             <a:srgbClr val="1E2226"/>
                           </a:solidFill>
-                          <a:latin typeface="Inter"/>
+                          <a:latin typeface="Arial"/>
                         </a:rPr>
                         <a:t>26.1</a:t>
                       </a:r>
@@ -12373,7 +12363,7 @@
                         <a:solidFill>
                           <a:srgbClr val="1E2226"/>
                         </a:solidFill>
-                        <a:latin typeface="Inter"/>
+                        <a:latin typeface="Arial"/>
                       </a:endParaRPr>
                     </a:p>
                   </a:txBody>
@@ -12408,7 +12398,7 @@
                           <a:solidFill>
                             <a:srgbClr val="1E2226"/>
                           </a:solidFill>
-                          <a:latin typeface="Inter"/>
+                          <a:latin typeface="Arial"/>
                         </a:rPr>
                         <a:t>27.4</a:t>
                       </a:r>
@@ -12416,7 +12406,7 @@
                         <a:solidFill>
                           <a:srgbClr val="1E2226"/>
                         </a:solidFill>
-                        <a:latin typeface="Inter"/>
+                        <a:latin typeface="Arial"/>
                       </a:endParaRPr>
                     </a:p>
                   </a:txBody>
@@ -12451,7 +12441,7 @@
                           <a:solidFill>
                             <a:srgbClr val="1E2226"/>
                           </a:solidFill>
-                          <a:latin typeface="Inter"/>
+                          <a:latin typeface="Arial"/>
                         </a:rPr>
                         <a:t>30.2</a:t>
                       </a:r>
@@ -12459,7 +12449,7 @@
                         <a:solidFill>
                           <a:srgbClr val="1E2226"/>
                         </a:solidFill>
-                        <a:latin typeface="Inter"/>
+                        <a:latin typeface="Arial"/>
                       </a:endParaRPr>
                     </a:p>
                   </a:txBody>
@@ -12494,7 +12484,7 @@
                           <a:solidFill>
                             <a:srgbClr val="1E2226"/>
                           </a:solidFill>
-                          <a:latin typeface="Inter"/>
+                          <a:latin typeface="Arial"/>
                         </a:rPr>
                         <a:t>31.5</a:t>
                       </a:r>
@@ -12502,7 +12492,7 @@
                         <a:solidFill>
                           <a:srgbClr val="1E2226"/>
                         </a:solidFill>
-                        <a:latin typeface="Inter"/>
+                        <a:latin typeface="Arial"/>
                       </a:endParaRPr>
                     </a:p>
                   </a:txBody>
@@ -12537,7 +12527,7 @@
                           <a:solidFill>
                             <a:srgbClr val="1E2226"/>
                           </a:solidFill>
-                          <a:latin typeface="Inter"/>
+                          <a:latin typeface="Arial"/>
                         </a:rPr>
                         <a:t>26.9</a:t>
                       </a:r>
@@ -12545,7 +12535,7 @@
                         <a:solidFill>
                           <a:srgbClr val="1E2226"/>
                         </a:solidFill>
-                        <a:latin typeface="Inter"/>
+                        <a:latin typeface="Arial"/>
                       </a:endParaRPr>
                     </a:p>
                   </a:txBody>
@@ -12582,7 +12572,7 @@
                           <a:solidFill>
                             <a:srgbClr val="1E2226"/>
                           </a:solidFill>
-                          <a:latin typeface="Inter"/>
+                          <a:latin typeface="Arial"/>
                         </a:rPr>
                         <a:t>Store EBITDA (£m)</a:t>
                       </a:r>
@@ -12590,7 +12580,7 @@
                         <a:solidFill>
                           <a:srgbClr val="1E2226"/>
                         </a:solidFill>
-                        <a:latin typeface="Inter"/>
+                        <a:latin typeface="Arial"/>
                       </a:endParaRPr>
                     </a:p>
                   </a:txBody>
@@ -12625,7 +12615,7 @@
                           <a:solidFill>
                             <a:srgbClr val="1E2226"/>
                           </a:solidFill>
-                          <a:latin typeface="Inter"/>
+                          <a:latin typeface="Arial"/>
                         </a:rPr>
                         <a:t>85.5</a:t>
                       </a:r>
@@ -12633,7 +12623,7 @@
                         <a:solidFill>
                           <a:srgbClr val="1E2226"/>
                         </a:solidFill>
-                        <a:latin typeface="Inter"/>
+                        <a:latin typeface="Arial"/>
                       </a:endParaRPr>
                     </a:p>
                   </a:txBody>
@@ -12668,7 +12658,7 @@
                           <a:solidFill>
                             <a:srgbClr val="1E2226"/>
                           </a:solidFill>
-                          <a:latin typeface="Inter"/>
+                          <a:latin typeface="Arial"/>
                         </a:rPr>
                         <a:t>114.3</a:t>
                       </a:r>
@@ -12676,7 +12666,7 @@
                         <a:solidFill>
                           <a:srgbClr val="1E2226"/>
                         </a:solidFill>
-                        <a:latin typeface="Inter"/>
+                        <a:latin typeface="Arial"/>
                       </a:endParaRPr>
                     </a:p>
                   </a:txBody>
@@ -12711,7 +12701,7 @@
                           <a:solidFill>
                             <a:srgbClr val="1E2226"/>
                           </a:solidFill>
-                          <a:latin typeface="Inter"/>
+                          <a:latin typeface="Arial"/>
                         </a:rPr>
                         <a:t>23.5</a:t>
                       </a:r>
@@ -12719,7 +12709,7 @@
                         <a:solidFill>
                           <a:srgbClr val="1E2226"/>
                         </a:solidFill>
-                        <a:latin typeface="Inter"/>
+                        <a:latin typeface="Arial"/>
                       </a:endParaRPr>
                     </a:p>
                   </a:txBody>
@@ -12754,7 +12744,7 @@
                           <a:solidFill>
                             <a:srgbClr val="1E2226"/>
                           </a:solidFill>
-                          <a:latin typeface="Inter"/>
+                          <a:latin typeface="Arial"/>
                         </a:rPr>
                         <a:t>4.1</a:t>
                       </a:r>
@@ -12762,7 +12752,7 @@
                         <a:solidFill>
                           <a:srgbClr val="1E2226"/>
                         </a:solidFill>
-                        <a:latin typeface="Inter"/>
+                        <a:latin typeface="Arial"/>
                       </a:endParaRPr>
                     </a:p>
                   </a:txBody>
@@ -12797,7 +12787,7 @@
                           <a:solidFill>
                             <a:srgbClr val="1E2226"/>
                           </a:solidFill>
-                          <a:latin typeface="Inter"/>
+                          <a:latin typeface="Arial"/>
                         </a:rPr>
                         <a:t>227.4</a:t>
                       </a:r>
@@ -12805,7 +12795,7 @@
                         <a:solidFill>
                           <a:srgbClr val="1E2226"/>
                         </a:solidFill>
-                        <a:latin typeface="Inter"/>
+                        <a:latin typeface="Arial"/>
                       </a:endParaRPr>
                     </a:p>
                   </a:txBody>
@@ -12842,7 +12832,7 @@
                           <a:solidFill>
                             <a:srgbClr val="1E2226"/>
                           </a:solidFill>
-                          <a:latin typeface="Inter"/>
+                          <a:latin typeface="Arial"/>
                         </a:rPr>
                         <a:t>Store EBITDA margin (%)</a:t>
                       </a:r>
@@ -12850,7 +12840,7 @@
                         <a:solidFill>
                           <a:srgbClr val="1E2226"/>
                         </a:solidFill>
-                        <a:latin typeface="Inter"/>
+                        <a:latin typeface="Arial"/>
                       </a:endParaRPr>
                     </a:p>
                   </a:txBody>
@@ -12885,7 +12875,7 @@
                           <a:solidFill>
                             <a:srgbClr val="1E2226"/>
                           </a:solidFill>
-                          <a:latin typeface="Inter"/>
+                          <a:latin typeface="Arial"/>
                         </a:rPr>
                         <a:t>3.9</a:t>
                       </a:r>
@@ -12893,7 +12883,7 @@
                         <a:solidFill>
                           <a:srgbClr val="1E2226"/>
                         </a:solidFill>
-                        <a:latin typeface="Inter"/>
+                        <a:latin typeface="Arial"/>
                       </a:endParaRPr>
                     </a:p>
                   </a:txBody>
@@ -12928,7 +12918,7 @@
                           <a:solidFill>
                             <a:srgbClr val="1E2226"/>
                           </a:solidFill>
-                          <a:latin typeface="Inter"/>
+                          <a:latin typeface="Arial"/>
                         </a:rPr>
                         <a:t>8.1</a:t>
                       </a:r>
@@ -12936,7 +12926,7 @@
                         <a:solidFill>
                           <a:srgbClr val="1E2226"/>
                         </a:solidFill>
-                        <a:latin typeface="Inter"/>
+                        <a:latin typeface="Arial"/>
                       </a:endParaRPr>
                     </a:p>
                   </a:txBody>
@@ -12971,7 +12961,7 @@
                           <a:solidFill>
                             <a:srgbClr val="1E2226"/>
                           </a:solidFill>
-                          <a:latin typeface="Inter"/>
+                          <a:latin typeface="Arial"/>
                         </a:rPr>
                         <a:t>8.9</a:t>
                       </a:r>
@@ -12979,7 +12969,7 @@
                         <a:solidFill>
                           <a:srgbClr val="1E2226"/>
                         </a:solidFill>
-                        <a:latin typeface="Inter"/>
+                        <a:latin typeface="Arial"/>
                       </a:endParaRPr>
                     </a:p>
                   </a:txBody>
@@ -13014,7 +13004,7 @@
                           <a:solidFill>
                             <a:srgbClr val="1E2226"/>
                           </a:solidFill>
-                          <a:latin typeface="Inter"/>
+                          <a:latin typeface="Arial"/>
                         </a:rPr>
                         <a:t>8.1</a:t>
                       </a:r>
@@ -13022,7 +13012,7 @@
                         <a:solidFill>
                           <a:srgbClr val="1E2226"/>
                         </a:solidFill>
-                        <a:latin typeface="Inter"/>
+                        <a:latin typeface="Arial"/>
                       </a:endParaRPr>
                     </a:p>
                   </a:txBody>
@@ -13057,7 +13047,7 @@
                           <a:solidFill>
                             <a:srgbClr val="1E2226"/>
                           </a:solidFill>
-                          <a:latin typeface="Inter"/>
+                          <a:latin typeface="Arial"/>
                         </a:rPr>
                         <a:t>5.8</a:t>
                       </a:r>
@@ -13065,7 +13055,7 @@
                         <a:solidFill>
                           <a:srgbClr val="1E2226"/>
                         </a:solidFill>
-                        <a:latin typeface="Inter"/>
+                        <a:latin typeface="Arial"/>
                       </a:endParaRPr>
                     </a:p>
                   </a:txBody>
@@ -13102,7 +13092,7 @@
                           <a:solidFill>
                             <a:srgbClr val="1E2226"/>
                           </a:solidFill>
-                          <a:latin typeface="Inter"/>
+                          <a:latin typeface="Arial"/>
                         </a:rPr>
                         <a:t>Share of store EBITDA (%)</a:t>
                       </a:r>
@@ -13110,7 +13100,7 @@
                         <a:solidFill>
                           <a:srgbClr val="1E2226"/>
                         </a:solidFill>
-                        <a:latin typeface="Inter"/>
+                        <a:latin typeface="Arial"/>
                       </a:endParaRPr>
                     </a:p>
                   </a:txBody>
@@ -13145,7 +13135,7 @@
                           <a:solidFill>
                             <a:srgbClr val="1E2226"/>
                           </a:solidFill>
-                          <a:latin typeface="Inter"/>
+                          <a:latin typeface="Arial"/>
                         </a:rPr>
                         <a:t>38</a:t>
                       </a:r>
@@ -13153,7 +13143,7 @@
                         <a:solidFill>
                           <a:srgbClr val="1E2226"/>
                         </a:solidFill>
-                        <a:latin typeface="Inter"/>
+                        <a:latin typeface="Arial"/>
                       </a:endParaRPr>
                     </a:p>
                   </a:txBody>
@@ -13188,7 +13178,7 @@
                           <a:solidFill>
                             <a:srgbClr val="1E2226"/>
                           </a:solidFill>
-                          <a:latin typeface="Inter"/>
+                          <a:latin typeface="Arial"/>
                         </a:rPr>
                         <a:t>50</a:t>
                       </a:r>
@@ -13196,7 +13186,7 @@
                         <a:solidFill>
                           <a:srgbClr val="1E2226"/>
                         </a:solidFill>
-                        <a:latin typeface="Inter"/>
+                        <a:latin typeface="Arial"/>
                       </a:endParaRPr>
                     </a:p>
                   </a:txBody>
@@ -13231,7 +13221,7 @@
                           <a:solidFill>
                             <a:srgbClr val="1E2226"/>
                           </a:solidFill>
-                          <a:latin typeface="Inter"/>
+                          <a:latin typeface="Arial"/>
                         </a:rPr>
                         <a:t>10</a:t>
                       </a:r>
@@ -13239,7 +13229,7 @@
                         <a:solidFill>
                           <a:srgbClr val="1E2226"/>
                         </a:solidFill>
-                        <a:latin typeface="Inter"/>
+                        <a:latin typeface="Arial"/>
                       </a:endParaRPr>
                     </a:p>
                   </a:txBody>
@@ -13274,7 +13264,7 @@
                           <a:solidFill>
                             <a:srgbClr val="1E2226"/>
                           </a:solidFill>
-                          <a:latin typeface="Inter"/>
+                          <a:latin typeface="Arial"/>
                         </a:rPr>
                         <a:t>2</a:t>
                       </a:r>
@@ -13282,7 +13272,7 @@
                         <a:solidFill>
                           <a:srgbClr val="1E2226"/>
                         </a:solidFill>
-                        <a:latin typeface="Inter"/>
+                        <a:latin typeface="Arial"/>
                       </a:endParaRPr>
                     </a:p>
                   </a:txBody>
@@ -13317,7 +13307,7 @@
                           <a:solidFill>
                             <a:srgbClr val="1E2226"/>
                           </a:solidFill>
-                          <a:latin typeface="Inter"/>
+                          <a:latin typeface="Arial"/>
                         </a:rPr>
                         <a:t>100</a:t>
                       </a:r>
@@ -13325,7 +13315,7 @@
                         <a:solidFill>
                           <a:srgbClr val="1E2226"/>
                         </a:solidFill>
-                        <a:latin typeface="Inter"/>
+                        <a:latin typeface="Arial"/>
                       </a:endParaRPr>
                     </a:p>
                   </a:txBody>
@@ -13362,7 +13352,7 @@
                           <a:solidFill>
                             <a:srgbClr val="1E2226"/>
                           </a:solidFill>
-                          <a:latin typeface="Inter"/>
+                          <a:latin typeface="Arial"/>
                         </a:rPr>
                         <a:t>Capital</a:t>
                       </a:r>
@@ -13370,7 +13360,7 @@
                         <a:solidFill>
                           <a:srgbClr val="1E2226"/>
                         </a:solidFill>
-                        <a:latin typeface="Inter"/>
+                        <a:latin typeface="Arial"/>
                       </a:endParaRPr>
                     </a:p>
                   </a:txBody>
@@ -13406,7 +13396,7 @@
                         <a:solidFill>
                           <a:srgbClr val="1E2226"/>
                         </a:solidFill>
-                        <a:latin typeface="Inter"/>
+                        <a:latin typeface="Arial"/>
                       </a:endParaRPr>
                     </a:p>
                   </a:txBody>
@@ -13442,7 +13432,7 @@
                         <a:solidFill>
                           <a:srgbClr val="1E2226"/>
                         </a:solidFill>
-                        <a:latin typeface="Inter"/>
+                        <a:latin typeface="Arial"/>
                       </a:endParaRPr>
                     </a:p>
                   </a:txBody>
@@ -13478,7 +13468,7 @@
                         <a:solidFill>
                           <a:srgbClr val="1E2226"/>
                         </a:solidFill>
-                        <a:latin typeface="Inter"/>
+                        <a:latin typeface="Arial"/>
                       </a:endParaRPr>
                     </a:p>
                   </a:txBody>
@@ -13514,7 +13504,7 @@
                         <a:solidFill>
                           <a:srgbClr val="1E2226"/>
                         </a:solidFill>
-                        <a:latin typeface="Inter"/>
+                        <a:latin typeface="Arial"/>
                       </a:endParaRPr>
                     </a:p>
                   </a:txBody>
@@ -13550,7 +13540,7 @@
                         <a:solidFill>
                           <a:srgbClr val="1E2226"/>
                         </a:solidFill>
-                        <a:latin typeface="Inter"/>
+                        <a:latin typeface="Arial"/>
                       </a:endParaRPr>
                     </a:p>
                   </a:txBody>
@@ -13587,7 +13577,7 @@
                           <a:solidFill>
                             <a:srgbClr val="1E2226"/>
                           </a:solidFill>
-                          <a:latin typeface="Inter"/>
+                          <a:latin typeface="Arial"/>
                         </a:rPr>
                         <a:t>Invested capital (£m)</a:t>
                       </a:r>
@@ -13595,7 +13585,7 @@
                         <a:solidFill>
                           <a:srgbClr val="1E2226"/>
                         </a:solidFill>
-                        <a:latin typeface="Inter"/>
+                        <a:latin typeface="Arial"/>
                       </a:endParaRPr>
                     </a:p>
                   </a:txBody>
@@ -13630,7 +13620,7 @@
                           <a:solidFill>
                             <a:srgbClr val="1E2226"/>
                           </a:solidFill>
-                          <a:latin typeface="Inter"/>
+                          <a:latin typeface="Arial"/>
                         </a:rPr>
                         <a:t>1,750</a:t>
                       </a:r>
@@ -13638,7 +13628,7 @@
                         <a:solidFill>
                           <a:srgbClr val="1E2226"/>
                         </a:solidFill>
-                        <a:latin typeface="Inter"/>
+                        <a:latin typeface="Arial"/>
                       </a:endParaRPr>
                     </a:p>
                   </a:txBody>
@@ -13673,7 +13663,7 @@
                           <a:solidFill>
                             <a:srgbClr val="1E2226"/>
                           </a:solidFill>
-                          <a:latin typeface="Inter"/>
+                          <a:latin typeface="Arial"/>
                         </a:rPr>
                         <a:t>1,117</a:t>
                       </a:r>
@@ -13681,7 +13671,7 @@
                         <a:solidFill>
                           <a:srgbClr val="1E2226"/>
                         </a:solidFill>
-                        <a:latin typeface="Inter"/>
+                        <a:latin typeface="Arial"/>
                       </a:endParaRPr>
                     </a:p>
                   </a:txBody>
@@ -13716,7 +13706,7 @@
                           <a:solidFill>
                             <a:srgbClr val="1E2226"/>
                           </a:solidFill>
-                          <a:latin typeface="Inter"/>
+                          <a:latin typeface="Arial"/>
                         </a:rPr>
                         <a:t>120</a:t>
                       </a:r>
@@ -13724,7 +13714,7 @@
                         <a:solidFill>
                           <a:srgbClr val="1E2226"/>
                         </a:solidFill>
-                        <a:latin typeface="Inter"/>
+                        <a:latin typeface="Arial"/>
                       </a:endParaRPr>
                     </a:p>
                   </a:txBody>
@@ -13759,7 +13749,7 @@
                           <a:solidFill>
                             <a:srgbClr val="1E2226"/>
                           </a:solidFill>
-                          <a:latin typeface="Inter"/>
+                          <a:latin typeface="Arial"/>
                         </a:rPr>
                         <a:t>22</a:t>
                       </a:r>
@@ -13767,7 +13757,7 @@
                         <a:solidFill>
                           <a:srgbClr val="1E2226"/>
                         </a:solidFill>
-                        <a:latin typeface="Inter"/>
+                        <a:latin typeface="Arial"/>
                       </a:endParaRPr>
                     </a:p>
                   </a:txBody>
@@ -13802,7 +13792,7 @@
                           <a:solidFill>
                             <a:srgbClr val="1E2226"/>
                           </a:solidFill>
-                          <a:latin typeface="Inter"/>
+                          <a:latin typeface="Arial"/>
                         </a:rPr>
                         <a:t>3,009</a:t>
                       </a:r>
@@ -13810,7 +13800,7 @@
                         <a:solidFill>
                           <a:srgbClr val="1E2226"/>
                         </a:solidFill>
-                        <a:latin typeface="Inter"/>
+                        <a:latin typeface="Arial"/>
                       </a:endParaRPr>
                     </a:p>
                   </a:txBody>
@@ -13847,7 +13837,7 @@
                           <a:solidFill>
                             <a:srgbClr val="1E2226"/>
                           </a:solidFill>
-                          <a:latin typeface="Inter"/>
+                          <a:latin typeface="Arial"/>
                         </a:rPr>
                         <a:t>Share of invested capital (%)</a:t>
                       </a:r>
@@ -13855,7 +13845,7 @@
                         <a:solidFill>
                           <a:srgbClr val="1E2226"/>
                         </a:solidFill>
-                        <a:latin typeface="Inter"/>
+                        <a:latin typeface="Arial"/>
                       </a:endParaRPr>
                     </a:p>
                   </a:txBody>
@@ -13890,7 +13880,7 @@
                           <a:solidFill>
                             <a:srgbClr val="C24E26"/>
                           </a:solidFill>
-                          <a:latin typeface="Inter"/>
+                          <a:latin typeface="Arial"/>
                         </a:rPr>
                         <a:t>58</a:t>
                       </a:r>
@@ -13898,7 +13888,7 @@
                         <a:solidFill>
                           <a:srgbClr val="C24E26"/>
                         </a:solidFill>
-                        <a:latin typeface="Inter"/>
+                        <a:latin typeface="Arial"/>
                       </a:endParaRPr>
                     </a:p>
                   </a:txBody>
@@ -13933,7 +13923,7 @@
                           <a:solidFill>
                             <a:srgbClr val="1E2226"/>
                           </a:solidFill>
-                          <a:latin typeface="Inter"/>
+                          <a:latin typeface="Arial"/>
                         </a:rPr>
                         <a:t>37</a:t>
                       </a:r>
@@ -13941,7 +13931,7 @@
                         <a:solidFill>
                           <a:srgbClr val="1E2226"/>
                         </a:solidFill>
-                        <a:latin typeface="Inter"/>
+                        <a:latin typeface="Arial"/>
                       </a:endParaRPr>
                     </a:p>
                   </a:txBody>
@@ -13976,7 +13966,7 @@
                           <a:solidFill>
                             <a:srgbClr val="1E2226"/>
                           </a:solidFill>
-                          <a:latin typeface="Inter"/>
+                          <a:latin typeface="Arial"/>
                         </a:rPr>
                         <a:t>4</a:t>
                       </a:r>
@@ -13984,7 +13974,7 @@
                         <a:solidFill>
                           <a:srgbClr val="1E2226"/>
                         </a:solidFill>
-                        <a:latin typeface="Inter"/>
+                        <a:latin typeface="Arial"/>
                       </a:endParaRPr>
                     </a:p>
                   </a:txBody>
@@ -14019,7 +14009,7 @@
                           <a:solidFill>
                             <a:srgbClr val="1E2226"/>
                           </a:solidFill>
-                          <a:latin typeface="Inter"/>
+                          <a:latin typeface="Arial"/>
                         </a:rPr>
                         <a:t>1</a:t>
                       </a:r>
@@ -14027,7 +14017,7 @@
                         <a:solidFill>
                           <a:srgbClr val="1E2226"/>
                         </a:solidFill>
-                        <a:latin typeface="Inter"/>
+                        <a:latin typeface="Arial"/>
                       </a:endParaRPr>
                     </a:p>
                   </a:txBody>
@@ -14062,7 +14052,7 @@
                           <a:solidFill>
                             <a:srgbClr val="1E2226"/>
                           </a:solidFill>
-                          <a:latin typeface="Inter"/>
+                          <a:latin typeface="Arial"/>
                         </a:rPr>
                         <a:t>100</a:t>
                       </a:r>
@@ -14070,7 +14060,7 @@
                         <a:solidFill>
                           <a:srgbClr val="1E2226"/>
                         </a:solidFill>
-                        <a:latin typeface="Inter"/>
+                        <a:latin typeface="Arial"/>
                       </a:endParaRPr>
                     </a:p>
                   </a:txBody>
@@ -14107,7 +14097,7 @@
                           <a:solidFill>
                             <a:srgbClr val="1E2226"/>
                           </a:solidFill>
-                          <a:latin typeface="Inter"/>
+                          <a:latin typeface="Arial"/>
                         </a:rPr>
                         <a:t>Cash return on capital (%)</a:t>
                       </a:r>
@@ -14115,7 +14105,7 @@
                         <a:solidFill>
                           <a:srgbClr val="1E2226"/>
                         </a:solidFill>
-                        <a:latin typeface="Inter"/>
+                        <a:latin typeface="Arial"/>
                       </a:endParaRPr>
                     </a:p>
                   </a:txBody>
@@ -14150,7 +14140,7 @@
                           <a:solidFill>
                             <a:srgbClr val="C24E26"/>
                           </a:solidFill>
-                          <a:latin typeface="Inter"/>
+                          <a:latin typeface="Arial"/>
                         </a:rPr>
                         <a:t>4.9</a:t>
                       </a:r>
@@ -14158,7 +14148,7 @@
                         <a:solidFill>
                           <a:srgbClr val="C24E26"/>
                         </a:solidFill>
-                        <a:latin typeface="Inter"/>
+                        <a:latin typeface="Arial"/>
                       </a:endParaRPr>
                     </a:p>
                   </a:txBody>
@@ -14193,7 +14183,7 @@
                           <a:solidFill>
                             <a:srgbClr val="1E2226"/>
                           </a:solidFill>
-                          <a:latin typeface="Inter"/>
+                          <a:latin typeface="Arial"/>
                         </a:rPr>
                         <a:t>10.2</a:t>
                       </a:r>
@@ -14201,7 +14191,7 @@
                         <a:solidFill>
                           <a:srgbClr val="1E2226"/>
                         </a:solidFill>
-                        <a:latin typeface="Inter"/>
+                        <a:latin typeface="Arial"/>
                       </a:endParaRPr>
                     </a:p>
                   </a:txBody>
@@ -14236,7 +14226,7 @@
                           <a:solidFill>
                             <a:srgbClr val="1E2226"/>
                           </a:solidFill>
-                          <a:latin typeface="Inter"/>
+                          <a:latin typeface="Arial"/>
                         </a:rPr>
                         <a:t>19.5</a:t>
                       </a:r>
@@ -14244,7 +14234,7 @@
                         <a:solidFill>
                           <a:srgbClr val="1E2226"/>
                         </a:solidFill>
-                        <a:latin typeface="Inter"/>
+                        <a:latin typeface="Arial"/>
                       </a:endParaRPr>
                     </a:p>
                   </a:txBody>
@@ -14279,7 +14269,7 @@
                           <a:solidFill>
                             <a:srgbClr val="1E2226"/>
                           </a:solidFill>
-                          <a:latin typeface="Inter"/>
+                          <a:latin typeface="Arial"/>
                         </a:rPr>
                         <a:t>18.4</a:t>
                       </a:r>
@@ -14287,7 +14277,7 @@
                         <a:solidFill>
                           <a:srgbClr val="1E2226"/>
                         </a:solidFill>
-                        <a:latin typeface="Inter"/>
+                        <a:latin typeface="Arial"/>
                       </a:endParaRPr>
                     </a:p>
                   </a:txBody>
@@ -14322,7 +14312,7 @@
                           <a:solidFill>
                             <a:srgbClr val="1E2226"/>
                           </a:solidFill>
-                          <a:latin typeface="Inter"/>
+                          <a:latin typeface="Arial"/>
                         </a:rPr>
                         <a:t>7.6</a:t>
                       </a:r>
@@ -14330,7 +14320,7 @@
                         <a:solidFill>
                           <a:srgbClr val="1E2226"/>
                         </a:solidFill>
-                        <a:latin typeface="Inter"/>
+                        <a:latin typeface="Arial"/>
                       </a:endParaRPr>
                     </a:p>
                   </a:txBody>
@@ -14367,7 +14357,7 @@
                           <a:solidFill>
                             <a:srgbClr val="1E2226"/>
                           </a:solidFill>
-                          <a:latin typeface="Inter"/>
+                          <a:latin typeface="Arial"/>
                         </a:rPr>
                         <a:t>Stores under the 12% hurdle</a:t>
                       </a:r>
@@ -14375,7 +14365,7 @@
                         <a:solidFill>
                           <a:srgbClr val="1E2226"/>
                         </a:solidFill>
-                        <a:latin typeface="Inter"/>
+                        <a:latin typeface="Arial"/>
                       </a:endParaRPr>
                     </a:p>
                   </a:txBody>
@@ -14410,7 +14400,7 @@
                           <a:solidFill>
                             <a:srgbClr val="1E2226"/>
                           </a:solidFill>
-                          <a:latin typeface="Inter"/>
+                          <a:latin typeface="Arial"/>
                         </a:rPr>
                         <a:t>56</a:t>
                       </a:r>
@@ -14418,7 +14408,7 @@
                         <a:solidFill>
                           <a:srgbClr val="1E2226"/>
                         </a:solidFill>
-                        <a:latin typeface="Inter"/>
+                        <a:latin typeface="Arial"/>
                       </a:endParaRPr>
                     </a:p>
                   </a:txBody>
@@ -14453,7 +14443,7 @@
                           <a:solidFill>
                             <a:srgbClr val="1E2226"/>
                           </a:solidFill>
-                          <a:latin typeface="Inter"/>
+                          <a:latin typeface="Arial"/>
                         </a:rPr>
                         <a:t>68</a:t>
                       </a:r>
@@ -14461,7 +14451,7 @@
                         <a:solidFill>
                           <a:srgbClr val="1E2226"/>
                         </a:solidFill>
-                        <a:latin typeface="Inter"/>
+                        <a:latin typeface="Arial"/>
                       </a:endParaRPr>
                     </a:p>
                   </a:txBody>
@@ -14496,7 +14486,7 @@
                           <a:solidFill>
                             <a:srgbClr val="1E2226"/>
                           </a:solidFill>
-                          <a:latin typeface="Inter"/>
+                          <a:latin typeface="Arial"/>
                         </a:rPr>
                         <a:t>3</a:t>
                       </a:r>
@@ -14504,7 +14494,7 @@
                         <a:solidFill>
                           <a:srgbClr val="1E2226"/>
                         </a:solidFill>
-                        <a:latin typeface="Inter"/>
+                        <a:latin typeface="Arial"/>
                       </a:endParaRPr>
                     </a:p>
                   </a:txBody>
@@ -14539,7 +14529,7 @@
                           <a:solidFill>
                             <a:srgbClr val="1E2226"/>
                           </a:solidFill>
-                          <a:latin typeface="Inter"/>
+                          <a:latin typeface="Arial"/>
                         </a:rPr>
                         <a:t>1</a:t>
                       </a:r>
@@ -14547,7 +14537,7 @@
                         <a:solidFill>
                           <a:srgbClr val="1E2226"/>
                         </a:solidFill>
-                        <a:latin typeface="Inter"/>
+                        <a:latin typeface="Arial"/>
                       </a:endParaRPr>
                     </a:p>
                   </a:txBody>
@@ -14582,7 +14572,7 @@
                           <a:solidFill>
                             <a:srgbClr val="1E2226"/>
                           </a:solidFill>
-                          <a:latin typeface="Inter"/>
+                          <a:latin typeface="Arial"/>
                         </a:rPr>
                         <a:t>128</a:t>
                       </a:r>
@@ -14590,7 +14580,7 @@
                         <a:solidFill>
                           <a:srgbClr val="1E2226"/>
                         </a:solidFill>
-                        <a:latin typeface="Inter"/>
+                        <a:latin typeface="Arial"/>
                       </a:endParaRPr>
                     </a:p>
                   </a:txBody>
@@ -14658,7 +14648,7 @@
                 <a:solidFill>
                   <a:srgbClr val="1E2226"/>
                 </a:solidFill>
-                <a:latin typeface="Inter"/>
+                <a:latin typeface="Arial"/>
               </a:rPr>
               <a:t>Cash return on invested capital</a:t>
             </a:r>
@@ -14704,7 +14694,7 @@
                 <a:solidFill>
                   <a:srgbClr val="5C6670"/>
                 </a:solidFill>
-                <a:latin typeface="Inter"/>
+                <a:latin typeface="Arial"/>
               </a:rPr>
               <a:t>%, 2025; hurdle is Brindle's 12% pre-tax cost of store capital</a:t>
             </a:r>
@@ -14797,7 +14787,7 @@
                 <a:solidFill>
                   <a:srgbClr val="1E2226"/>
                 </a:solidFill>
-                <a:latin typeface="Inter"/>
+                <a:latin typeface="Arial"/>
               </a:rPr>
               <a:t>What it means for Brindle</a:t>
             </a:r>
@@ -14843,7 +14833,7 @@
                 <a:solidFill>
                   <a:srgbClr val="1F3A5F"/>
                 </a:solidFill>
-                <a:latin typeface="Gelasio"/>
+                <a:latin typeface="Georgia"/>
               </a:rPr>
               <a:t>58%</a:t>
             </a:r>
@@ -14889,9 +14879,9 @@
                 <a:solidFill>
                   <a:srgbClr val="1E2226"/>
                 </a:solidFill>
-                <a:latin typeface="Inter"/>
+                <a:latin typeface="Arial"/>
               </a:rPr>
-              <a:t>of invested capital sits in superstores, which earn 38%</a:t>
+              <a:t>of invested capital sits in superstores, which earn 38% of</a:t>
             </a:r>
             <a:br/>
             <a:r>
@@ -14899,9 +14889,9 @@
                 <a:solidFill>
                   <a:srgbClr val="1E2226"/>
                 </a:solidFill>
-                <a:latin typeface="Inter"/>
+                <a:latin typeface="Arial"/>
               </a:rPr>
-              <a:t>of store EBITDA at a 3.9% margin</a:t>
+              <a:t>store EBITDA at a 3.9% margin</a:t>
             </a:r>
           </a:p>
         </p:txBody>
@@ -14945,7 +14935,7 @@
                 <a:solidFill>
                   <a:srgbClr val="1F3A5F"/>
                 </a:solidFill>
-                <a:latin typeface="Gelasio"/>
+                <a:latin typeface="Georgia"/>
               </a:rPr>
               <a:t>124 of 154</a:t>
             </a:r>
@@ -14991,7 +14981,7 @@
                 <a:solidFill>
                   <a:srgbClr val="1E2226"/>
                 </a:solidFill>
-                <a:latin typeface="Inter"/>
+                <a:latin typeface="Arial"/>
               </a:rPr>
               <a:t>superstores and supermarkets return under 12%; 56 of</a:t>
             </a:r>
@@ -15001,7 +14991,7 @@
                 <a:solidFill>
                   <a:srgbClr val="1E2226"/>
                 </a:solidFill>
-                <a:latin typeface="Inter"/>
+                <a:latin typeface="Arial"/>
               </a:rPr>
               <a:t>the 58 superstores do</a:t>
             </a:r>
@@ -15047,7 +15037,7 @@
                 <a:solidFill>
                   <a:srgbClr val="1F3A5F"/>
                 </a:solidFill>
-                <a:latin typeface="Gelasio"/>
+                <a:latin typeface="Georgia"/>
               </a:rPr>
               <a:t>19.5%</a:t>
             </a:r>
@@ -15093,9 +15083,9 @@
                 <a:solidFill>
                   <a:srgbClr val="1E2226"/>
                 </a:solidFill>
-                <a:latin typeface="Inter"/>
+                <a:latin typeface="Arial"/>
               </a:rPr>
-              <a:t>return in the 42 neighbourhood stores, which carry</a:t>
+              <a:t>return in the 42 neighbourhood stores, which carry only</a:t>
             </a:r>
             <a:br/>
             <a:r>
@@ -15103,9 +15093,9 @@
                 <a:solidFill>
                   <a:srgbClr val="1E2226"/>
                 </a:solidFill>
-                <a:latin typeface="Inter"/>
+                <a:latin typeface="Arial"/>
               </a:rPr>
-              <a:t>only 7% of sales and £120m of capital</a:t>
+              <a:t>7% of sales and £120m of capital</a:t>
             </a:r>
           </a:p>
         </p:txBody>
@@ -15149,7 +15139,7 @@
                 <a:solidFill>
                   <a:srgbClr val="5C6670"/>
                 </a:solidFill>
-                <a:latin typeface="Inter"/>
+                <a:latin typeface="Arial"/>
               </a:rPr>
               <a:t>Source: Brindle store P&amp;L, capital register and loyalty-card data, 2025; regional grocery market model; team analysis. All figures illustrative.</a:t>
             </a:r>
@@ -15187,7 +15177,7 @@
         <p:spPr>
           <a:xfrm>
             <a:off x="7538583" y="3245023"/>
-            <a:ext cx="570343" cy="114300"/>
+            <a:ext cx="559227" cy="114300"/>
           </a:xfrm>
           <a:prstGeom prst="rect">
             <a:avLst/>
@@ -15217,7 +15207,7 @@
                 <a:solidFill>
                   <a:srgbClr val="1E2226"/>
                 </a:solidFill>
-                <a:latin typeface="Inter"/>
+                <a:latin typeface="Arial"/>
               </a:rPr>
               <a:t>Hurdle 12%</a:t>
             </a:r>
@@ -15293,7 +15283,7 @@
                 <a:solidFill>
                   <a:srgbClr val="5C6670"/>
                 </a:solidFill>
-                <a:latin typeface="Inter"/>
+                <a:latin typeface="Arial"/>
               </a:rPr>
               <a:t>Brindle Markets  |  Store format strategy  |  Steering committee pre-read  |  Illustrative figures</a:t>
             </a:r>
@@ -15328,7 +15318,7 @@
                 <a:solidFill>
                   <a:srgbClr val="5C6670"/>
                 </a:solidFill>
-                <a:latin typeface="Inter"/>
+                <a:latin typeface="Arial"/>
               </a:rPr>
               <a:t>1</a:t>
             </a:fld>
@@ -15374,7 +15364,7 @@
                 <a:solidFill>
                   <a:srgbClr val="1F3A5F"/>
                 </a:solidFill>
-                <a:latin typeface="Inter"/>
+                <a:latin typeface="Arial"/>
               </a:rPr>
               <a:t>03  CUSTOMER SEGMENTS</a:t>
             </a:r>
@@ -15420,7 +15410,7 @@
                 <a:solidFill>
                   <a:srgbClr val="1E2226"/>
                 </a:solidFill>
-                <a:latin typeface="Gelasio"/>
+                <a:latin typeface="Georgia"/>
               </a:rPr>
               <a:t>Brindle’s share of wallet is 12.9% where spend is flat and 5.0% where it grows: the</a:t>
             </a:r>
@@ -15430,7 +15420,7 @@
                 <a:solidFill>
                   <a:srgbClr val="1E2226"/>
                 </a:solidFill>
-                <a:latin typeface="Gelasio"/>
+                <a:latin typeface="Georgia"/>
               </a:rPr>
               <a:t>three growth segments hold 57% of spend</a:t>
             </a:r>
@@ -15476,7 +15466,7 @@
                 <a:solidFill>
                   <a:srgbClr val="1E2226"/>
                 </a:solidFill>
-                <a:latin typeface="Inter"/>
+                <a:latin typeface="Arial"/>
               </a:rPr>
               <a:t>Customer segments in Brindle's catchments, 2025</a:t>
             </a:r>
@@ -15522,7 +15512,7 @@
                 <a:solidFill>
                   <a:srgbClr val="5C6670"/>
                 </a:solidFill>
-                <a:latin typeface="Inter"/>
+                <a:latin typeface="Arial"/>
               </a:rPr>
               <a:t>Share of wallet is Brindle's sales over the segment's market spend; growth is nominal</a:t>
             </a:r>
@@ -15546,14 +15536,14 @@
             <a:tbl>
               <a:tblPr firstRow="0" bandRow="0" lastRow="0" firstCol="0" lastCol="0" bandCol="0"/>
               <a:tblGrid>
-                <a:gridCol w="1573715"/>
-                <a:gridCol w="921076"/>
-                <a:gridCol w="1167929"/>
-                <a:gridCol w="1988204"/>
-                <a:gridCol w="1535263"/>
-                <a:gridCol w="1077694"/>
+                <a:gridCol w="1535549"/>
+                <a:gridCol w="941546"/>
+                <a:gridCol w="1171595"/>
+                <a:gridCol w="1967005"/>
+                <a:gridCol w="1565923"/>
+                <a:gridCol w="1106114"/>
                 <a:gridCol w="1705356"/>
-                <a:gridCol w="1399803"/>
+                <a:gridCol w="1375952"/>
               </a:tblGrid>
               <a:tr h="177038">
                 <a:tc>
@@ -15567,7 +15557,7 @@
                           <a:solidFill>
                             <a:srgbClr val="1E2226"/>
                           </a:solidFill>
-                          <a:latin typeface="Inter"/>
+                          <a:latin typeface="Arial"/>
                         </a:rPr>
                         <a:t>Segment</a:t>
                       </a:r>
@@ -15575,7 +15565,7 @@
                         <a:solidFill>
                           <a:srgbClr val="1E2226"/>
                         </a:solidFill>
-                        <a:latin typeface="Inter"/>
+                        <a:latin typeface="Arial"/>
                       </a:endParaRPr>
                     </a:p>
                   </a:txBody>
@@ -15608,7 +15598,7 @@
                           <a:solidFill>
                             <a:srgbClr val="1E2226"/>
                           </a:solidFill>
-                          <a:latin typeface="Inter"/>
+                          <a:latin typeface="Arial"/>
                         </a:rPr>
                         <a:t>Households (k)</a:t>
                       </a:r>
@@ -15616,7 +15606,7 @@
                         <a:solidFill>
                           <a:srgbClr val="1E2226"/>
                         </a:solidFill>
-                        <a:latin typeface="Inter"/>
+                        <a:latin typeface="Arial"/>
                       </a:endParaRPr>
                     </a:p>
                   </a:txBody>
@@ -15649,7 +15639,7 @@
                           <a:solidFill>
                             <a:srgbClr val="1E2226"/>
                           </a:solidFill>
-                          <a:latin typeface="Inter"/>
+                          <a:latin typeface="Arial"/>
                         </a:rPr>
                         <a:t>Market spend (£bn)</a:t>
                       </a:r>
@@ -15657,7 +15647,7 @@
                         <a:solidFill>
                           <a:srgbClr val="1E2226"/>
                         </a:solidFill>
-                        <a:latin typeface="Inter"/>
+                        <a:latin typeface="Arial"/>
                       </a:endParaRPr>
                     </a:p>
                   </a:txBody>
@@ -15690,7 +15680,7 @@
                           <a:solidFill>
                             <a:srgbClr val="1E2226"/>
                           </a:solidFill>
-                          <a:latin typeface="Inter"/>
+                          <a:latin typeface="Arial"/>
                         </a:rPr>
                         <a:t>Spend growth, 2022-25 (% a year)</a:t>
                       </a:r>
@@ -15698,7 +15688,7 @@
                         <a:solidFill>
                           <a:srgbClr val="1E2226"/>
                         </a:solidFill>
-                        <a:latin typeface="Inter"/>
+                        <a:latin typeface="Arial"/>
                       </a:endParaRPr>
                     </a:p>
                   </a:txBody>
@@ -15731,7 +15721,7 @@
                           <a:solidFill>
                             <a:srgbClr val="1E2226"/>
                           </a:solidFill>
-                          <a:latin typeface="Inter"/>
+                          <a:latin typeface="Arial"/>
                         </a:rPr>
                         <a:t>Brindle share of wallet (%)</a:t>
                       </a:r>
@@ -15739,7 +15729,7 @@
                         <a:solidFill>
                           <a:srgbClr val="1E2226"/>
                         </a:solidFill>
-                        <a:latin typeface="Inter"/>
+                        <a:latin typeface="Arial"/>
                       </a:endParaRPr>
                     </a:p>
                   </a:txBody>
@@ -15772,7 +15762,7 @@
                           <a:solidFill>
                             <a:srgbClr val="1E2226"/>
                           </a:solidFill>
-                          <a:latin typeface="Inter"/>
+                          <a:latin typeface="Arial"/>
                         </a:rPr>
                         <a:t>Brindle sales (£m)</a:t>
                       </a:r>
@@ -15780,7 +15770,7 @@
                         <a:solidFill>
                           <a:srgbClr val="1E2226"/>
                         </a:solidFill>
-                        <a:latin typeface="Inter"/>
+                        <a:latin typeface="Arial"/>
                       </a:endParaRPr>
                     </a:p>
                   </a:txBody>
@@ -15807,62 +15797,62 @@
                     <a:bodyPr wrap="square"/>
                     <a:lstStyle/>
                     <a:p>
+                      <a:pPr algn="l" marL="109728"/>
+                      <a:r>
+                        <a:rPr sz="800" b="1" i="0">
+                          <a:solidFill>
+                            <a:srgbClr val="1E2226"/>
+                          </a:solidFill>
+                          <a:latin typeface="Arial"/>
+                        </a:rPr>
+                        <a:t>Main mission</a:t>
+                      </a:r>
+                      <a:endParaRPr sz="800" b="1" i="0">
+                        <a:solidFill>
+                          <a:srgbClr val="1E2226"/>
+                        </a:solidFill>
+                        <a:latin typeface="Arial"/>
+                      </a:endParaRPr>
+                    </a:p>
+                  </a:txBody>
+                  <a:tcPr marL="27432" marR="27432" marT="27432" marB="27432" anchor="ctr">
+                    <a:lnL w="0">
+                      <a:noFill/>
+                    </a:lnL>
+                    <a:lnR w="0">
+                      <a:noFill/>
+                    </a:lnR>
+                    <a:lnT w="0">
+                      <a:noFill/>
+                    </a:lnT>
+                    <a:lnB w="12700">
+                      <a:solidFill>
+                        <a:srgbClr val="1E2226"/>
+                      </a:solidFill>
+                    </a:lnB>
+                    <a:noFill/>
+                  </a:tcPr>
+                </a:tc>
+                <a:tc>
+                  <a:txBody>
+                    <a:bodyPr wrap="square"/>
+                    <a:lstStyle/>
+                    <a:p>
                       <a:pPr algn="l"/>
                       <a:r>
                         <a:rPr sz="800" b="1" i="0">
                           <a:solidFill>
                             <a:srgbClr val="1E2226"/>
                           </a:solidFill>
-                          <a:latin typeface="Inter"/>
-                        </a:rPr>
-                        <a:t>Main mission</a:t>
+                          <a:latin typeface="Arial"/>
+                        </a:rPr>
+                        <a:t>Format they choose</a:t>
                       </a:r>
                       <a:endParaRPr sz="800" b="1" i="0">
                         <a:solidFill>
                           <a:srgbClr val="1E2226"/>
                         </a:solidFill>
-                        <a:latin typeface="Inter"/>
-                      </a:endParaRPr>
-                    </a:p>
-                  </a:txBody>
-                  <a:tcPr marL="27432" marR="27432" marT="27432" marB="27432" anchor="ctr">
-                    <a:lnL w="0">
-                      <a:noFill/>
-                    </a:lnL>
-                    <a:lnR w="0">
-                      <a:noFill/>
-                    </a:lnR>
-                    <a:lnT w="0">
-                      <a:noFill/>
-                    </a:lnT>
-                    <a:lnB w="12700">
-                      <a:solidFill>
-                        <a:srgbClr val="1E2226"/>
-                      </a:solidFill>
-                    </a:lnB>
-                    <a:noFill/>
-                  </a:tcPr>
-                </a:tc>
-                <a:tc>
-                  <a:txBody>
-                    <a:bodyPr wrap="square"/>
-                    <a:lstStyle/>
-                    <a:p>
-                      <a:pPr algn="l"/>
-                      <a:r>
-                        <a:rPr sz="800" b="1" i="0">
-                          <a:solidFill>
-                            <a:srgbClr val="1E2226"/>
-                          </a:solidFill>
-                          <a:latin typeface="Inter"/>
-                        </a:rPr>
-                        <a:t>Format they choose</a:t>
-                      </a:r>
-                      <a:endParaRPr sz="800" b="1" i="0">
-                        <a:solidFill>
-                          <a:srgbClr val="1E2226"/>
-                        </a:solidFill>
-                        <a:latin typeface="Inter"/>
+                        <a:latin typeface="Arial"/>
                       </a:endParaRPr>
                     </a:p>
                   </a:txBody>
@@ -15897,7 +15887,7 @@
                           <a:solidFill>
                             <a:srgbClr val="1E2226"/>
                           </a:solidFill>
-                          <a:latin typeface="Inter"/>
+                          <a:latin typeface="Arial"/>
                         </a:rPr>
                         <a:t>Established families</a:t>
                       </a:r>
@@ -15905,7 +15895,7 @@
                         <a:solidFill>
                           <a:srgbClr val="1E2226"/>
                         </a:solidFill>
-                        <a:latin typeface="Inter"/>
+                        <a:latin typeface="Arial"/>
                       </a:endParaRPr>
                     </a:p>
                   </a:txBody>
@@ -15940,7 +15930,7 @@
                           <a:solidFill>
                             <a:srgbClr val="1E2226"/>
                           </a:solidFill>
-                          <a:latin typeface="Inter"/>
+                          <a:latin typeface="Arial"/>
                         </a:rPr>
                         <a:t>1,150</a:t>
                       </a:r>
@@ -15948,7 +15938,7 @@
                         <a:solidFill>
                           <a:srgbClr val="1E2226"/>
                         </a:solidFill>
-                        <a:latin typeface="Inter"/>
+                        <a:latin typeface="Arial"/>
                       </a:endParaRPr>
                     </a:p>
                   </a:txBody>
@@ -15983,7 +15973,7 @@
                           <a:solidFill>
                             <a:srgbClr val="1E2226"/>
                           </a:solidFill>
-                          <a:latin typeface="Inter"/>
+                          <a:latin typeface="Arial"/>
                         </a:rPr>
                         <a:t>11.6</a:t>
                       </a:r>
@@ -15991,7 +15981,7 @@
                         <a:solidFill>
                           <a:srgbClr val="1E2226"/>
                         </a:solidFill>
-                        <a:latin typeface="Inter"/>
+                        <a:latin typeface="Arial"/>
                       </a:endParaRPr>
                     </a:p>
                   </a:txBody>
@@ -16026,7 +16016,7 @@
                           <a:solidFill>
                             <a:srgbClr val="1E2226"/>
                           </a:solidFill>
-                          <a:latin typeface="Inter"/>
+                          <a:latin typeface="Arial"/>
                         </a:rPr>
                         <a:t>1.4</a:t>
                       </a:r>
@@ -16034,7 +16024,7 @@
                         <a:solidFill>
                           <a:srgbClr val="1E2226"/>
                         </a:solidFill>
-                        <a:latin typeface="Inter"/>
+                        <a:latin typeface="Arial"/>
                       </a:endParaRPr>
                     </a:p>
                   </a:txBody>
@@ -16069,7 +16059,7 @@
                           <a:solidFill>
                             <a:srgbClr val="1E2226"/>
                           </a:solidFill>
-                          <a:latin typeface="Inter"/>
+                          <a:latin typeface="Arial"/>
                         </a:rPr>
                         <a:t>12.6</a:t>
                       </a:r>
@@ -16077,7 +16067,7 @@
                         <a:solidFill>
                           <a:srgbClr val="1E2226"/>
                         </a:solidFill>
-                        <a:latin typeface="Inter"/>
+                        <a:latin typeface="Arial"/>
                       </a:endParaRPr>
                     </a:p>
                   </a:txBody>
@@ -16112,7 +16102,7 @@
                           <a:solidFill>
                             <a:srgbClr val="1E2226"/>
                           </a:solidFill>
-                          <a:latin typeface="Inter"/>
+                          <a:latin typeface="Arial"/>
                         </a:rPr>
                         <a:t>1,459</a:t>
                       </a:r>
@@ -16120,7 +16110,7 @@
                         <a:solidFill>
                           <a:srgbClr val="1E2226"/>
                         </a:solidFill>
-                        <a:latin typeface="Inter"/>
+                        <a:latin typeface="Arial"/>
                       </a:endParaRPr>
                     </a:p>
                   </a:txBody>
@@ -16149,64 +16139,64 @@
                     <a:bodyPr wrap="square"/>
                     <a:lstStyle/>
                     <a:p>
+                      <a:pPr algn="l" marL="109728"/>
+                      <a:r>
+                        <a:rPr sz="800" b="0" i="0">
+                          <a:solidFill>
+                            <a:srgbClr val="1E2226"/>
+                          </a:solidFill>
+                          <a:latin typeface="Arial"/>
+                        </a:rPr>
+                        <a:t>Main weekly shop</a:t>
+                      </a:r>
+                      <a:endParaRPr sz="800" b="0" i="0">
+                        <a:solidFill>
+                          <a:srgbClr val="1E2226"/>
+                        </a:solidFill>
+                        <a:latin typeface="Arial"/>
+                      </a:endParaRPr>
+                    </a:p>
+                  </a:txBody>
+                  <a:tcPr marL="27432" marR="27432" marT="27432" marB="27432" anchor="ctr">
+                    <a:lnL w="0">
+                      <a:noFill/>
+                    </a:lnL>
+                    <a:lnR w="0">
+                      <a:noFill/>
+                    </a:lnR>
+                    <a:lnT w="12700">
+                      <a:solidFill>
+                        <a:srgbClr val="1E2226"/>
+                      </a:solidFill>
+                    </a:lnT>
+                    <a:lnB w="6350">
+                      <a:solidFill>
+                        <a:srgbClr val="C9CFD6"/>
+                      </a:solidFill>
+                    </a:lnB>
+                    <a:noFill/>
+                  </a:tcPr>
+                </a:tc>
+                <a:tc>
+                  <a:txBody>
+                    <a:bodyPr wrap="square"/>
+                    <a:lstStyle/>
+                    <a:p>
                       <a:pPr algn="l"/>
                       <a:r>
                         <a:rPr sz="800" b="0" i="0">
                           <a:solidFill>
                             <a:srgbClr val="1E2226"/>
                           </a:solidFill>
-                          <a:latin typeface="Inter"/>
-                        </a:rPr>
-                        <a:t>Main weekly shop</a:t>
+                          <a:latin typeface="Arial"/>
+                        </a:rPr>
+                        <a:t>Superstore</a:t>
                       </a:r>
                       <a:endParaRPr sz="800" b="0" i="0">
                         <a:solidFill>
                           <a:srgbClr val="1E2226"/>
                         </a:solidFill>
-                        <a:latin typeface="Inter"/>
-                      </a:endParaRPr>
-                    </a:p>
-                  </a:txBody>
-                  <a:tcPr marL="27432" marR="27432" marT="27432" marB="27432" anchor="ctr">
-                    <a:lnL w="0">
-                      <a:noFill/>
-                    </a:lnL>
-                    <a:lnR w="0">
-                      <a:noFill/>
-                    </a:lnR>
-                    <a:lnT w="12700">
-                      <a:solidFill>
-                        <a:srgbClr val="1E2226"/>
-                      </a:solidFill>
-                    </a:lnT>
-                    <a:lnB w="6350">
-                      <a:solidFill>
-                        <a:srgbClr val="C9CFD6"/>
-                      </a:solidFill>
-                    </a:lnB>
-                    <a:noFill/>
-                  </a:tcPr>
-                </a:tc>
-                <a:tc>
-                  <a:txBody>
-                    <a:bodyPr wrap="square"/>
-                    <a:lstStyle/>
-                    <a:p>
-                      <a:pPr algn="l"/>
-                      <a:r>
-                        <a:rPr sz="800" b="0" i="0">
-                          <a:solidFill>
-                            <a:srgbClr val="1E2226"/>
-                          </a:solidFill>
-                          <a:latin typeface="Inter"/>
-                        </a:rPr>
-                        <a:t>Superstore</a:t>
-                      </a:r>
-                      <a:endParaRPr sz="800" b="0" i="0">
-                        <a:solidFill>
-                          <a:srgbClr val="1E2226"/>
-                        </a:solidFill>
-                        <a:latin typeface="Inter"/>
+                        <a:latin typeface="Arial"/>
                       </a:endParaRPr>
                     </a:p>
                   </a:txBody>
@@ -16243,7 +16233,7 @@
                           <a:solidFill>
                             <a:srgbClr val="1E2226"/>
                           </a:solidFill>
-                          <a:latin typeface="Inter"/>
+                          <a:latin typeface="Arial"/>
                         </a:rPr>
                         <a:t>Time-pressed professionals</a:t>
                       </a:r>
@@ -16251,7 +16241,7 @@
                         <a:solidFill>
                           <a:srgbClr val="1E2226"/>
                         </a:solidFill>
-                        <a:latin typeface="Inter"/>
+                        <a:latin typeface="Arial"/>
                       </a:endParaRPr>
                     </a:p>
                   </a:txBody>
@@ -16286,7 +16276,7 @@
                           <a:solidFill>
                             <a:srgbClr val="1E2226"/>
                           </a:solidFill>
-                          <a:latin typeface="Inter"/>
+                          <a:latin typeface="Arial"/>
                         </a:rPr>
                         <a:t>820</a:t>
                       </a:r>
@@ -16294,7 +16284,7 @@
                         <a:solidFill>
                           <a:srgbClr val="1E2226"/>
                         </a:solidFill>
-                        <a:latin typeface="Inter"/>
+                        <a:latin typeface="Arial"/>
                       </a:endParaRPr>
                     </a:p>
                   </a:txBody>
@@ -16329,7 +16319,7 @@
                           <a:solidFill>
                             <a:srgbClr val="1E2226"/>
                           </a:solidFill>
-                          <a:latin typeface="Inter"/>
+                          <a:latin typeface="Arial"/>
                         </a:rPr>
                         <a:t>9.4</a:t>
                       </a:r>
@@ -16337,7 +16327,7 @@
                         <a:solidFill>
                           <a:srgbClr val="1E2226"/>
                         </a:solidFill>
-                        <a:latin typeface="Inter"/>
+                        <a:latin typeface="Arial"/>
                       </a:endParaRPr>
                     </a:p>
                   </a:txBody>
@@ -16372,7 +16362,7 @@
                           <a:solidFill>
                             <a:srgbClr val="C24E26"/>
                           </a:solidFill>
-                          <a:latin typeface="Inter"/>
+                          <a:latin typeface="Arial"/>
                         </a:rPr>
                         <a:t>6.2</a:t>
                       </a:r>
@@ -16380,7 +16370,7 @@
                         <a:solidFill>
                           <a:srgbClr val="C24E26"/>
                         </a:solidFill>
-                        <a:latin typeface="Inter"/>
+                        <a:latin typeface="Arial"/>
                       </a:endParaRPr>
                     </a:p>
                   </a:txBody>
@@ -16415,7 +16405,7 @@
                           <a:solidFill>
                             <a:srgbClr val="C24E26"/>
                           </a:solidFill>
-                          <a:latin typeface="Inter"/>
+                          <a:latin typeface="Arial"/>
                         </a:rPr>
                         <a:t>5.8</a:t>
                       </a:r>
@@ -16423,7 +16413,7 @@
                         <a:solidFill>
                           <a:srgbClr val="C24E26"/>
                         </a:solidFill>
-                        <a:latin typeface="Inter"/>
+                        <a:latin typeface="Arial"/>
                       </a:endParaRPr>
                     </a:p>
                   </a:txBody>
@@ -16458,7 +16448,7 @@
                           <a:solidFill>
                             <a:srgbClr val="1E2226"/>
                           </a:solidFill>
-                          <a:latin typeface="Inter"/>
+                          <a:latin typeface="Arial"/>
                         </a:rPr>
                         <a:t>548</a:t>
                       </a:r>
@@ -16466,7 +16456,7 @@
                         <a:solidFill>
                           <a:srgbClr val="1E2226"/>
                         </a:solidFill>
-                        <a:latin typeface="Inter"/>
+                        <a:latin typeface="Arial"/>
                       </a:endParaRPr>
                     </a:p>
                   </a:txBody>
@@ -16495,64 +16485,64 @@
                     <a:bodyPr wrap="square"/>
                     <a:lstStyle/>
                     <a:p>
+                      <a:pPr algn="l" marL="109728"/>
+                      <a:r>
+                        <a:rPr sz="800" b="0" i="0">
+                          <a:solidFill>
+                            <a:srgbClr val="1E2226"/>
+                          </a:solidFill>
+                          <a:latin typeface="Arial"/>
+                        </a:rPr>
+                        <a:t>Top-up and food for now</a:t>
+                      </a:r>
+                      <a:endParaRPr sz="800" b="0" i="0">
+                        <a:solidFill>
+                          <a:srgbClr val="1E2226"/>
+                        </a:solidFill>
+                        <a:latin typeface="Arial"/>
+                      </a:endParaRPr>
+                    </a:p>
+                  </a:txBody>
+                  <a:tcPr marL="27432" marR="27432" marT="27432" marB="27432" anchor="ctr">
+                    <a:lnL w="0">
+                      <a:noFill/>
+                    </a:lnL>
+                    <a:lnR w="0">
+                      <a:noFill/>
+                    </a:lnR>
+                    <a:lnT w="6350">
+                      <a:solidFill>
+                        <a:srgbClr val="C9CFD6"/>
+                      </a:solidFill>
+                    </a:lnT>
+                    <a:lnB w="6350">
+                      <a:solidFill>
+                        <a:srgbClr val="C9CFD6"/>
+                      </a:solidFill>
+                    </a:lnB>
+                    <a:noFill/>
+                  </a:tcPr>
+                </a:tc>
+                <a:tc>
+                  <a:txBody>
+                    <a:bodyPr wrap="square"/>
+                    <a:lstStyle/>
+                    <a:p>
                       <a:pPr algn="l"/>
                       <a:r>
                         <a:rPr sz="800" b="0" i="0">
                           <a:solidFill>
                             <a:srgbClr val="1E2226"/>
                           </a:solidFill>
-                          <a:latin typeface="Inter"/>
-                        </a:rPr>
-                        <a:t>Top-up and food for now</a:t>
+                          <a:latin typeface="Arial"/>
+                        </a:rPr>
+                        <a:t>Neighbourhood, express</a:t>
                       </a:r>
                       <a:endParaRPr sz="800" b="0" i="0">
                         <a:solidFill>
                           <a:srgbClr val="1E2226"/>
                         </a:solidFill>
-                        <a:latin typeface="Inter"/>
-                      </a:endParaRPr>
-                    </a:p>
-                  </a:txBody>
-                  <a:tcPr marL="27432" marR="27432" marT="27432" marB="27432" anchor="ctr">
-                    <a:lnL w="0">
-                      <a:noFill/>
-                    </a:lnL>
-                    <a:lnR w="0">
-                      <a:noFill/>
-                    </a:lnR>
-                    <a:lnT w="6350">
-                      <a:solidFill>
-                        <a:srgbClr val="C9CFD6"/>
-                      </a:solidFill>
-                    </a:lnT>
-                    <a:lnB w="6350">
-                      <a:solidFill>
-                        <a:srgbClr val="C9CFD6"/>
-                      </a:solidFill>
-                    </a:lnB>
-                    <a:noFill/>
-                  </a:tcPr>
-                </a:tc>
-                <a:tc>
-                  <a:txBody>
-                    <a:bodyPr wrap="square"/>
-                    <a:lstStyle/>
-                    <a:p>
-                      <a:pPr algn="l"/>
-                      <a:r>
-                        <a:rPr sz="800" b="0" i="0">
-                          <a:solidFill>
-                            <a:srgbClr val="1E2226"/>
-                          </a:solidFill>
-                          <a:latin typeface="Inter"/>
-                        </a:rPr>
-                        <a:t>Neighbourhood, express</a:t>
-                      </a:r>
-                      <a:endParaRPr sz="800" b="0" i="0">
-                        <a:solidFill>
-                          <a:srgbClr val="1E2226"/>
-                        </a:solidFill>
-                        <a:latin typeface="Inter"/>
+                        <a:latin typeface="Arial"/>
                       </a:endParaRPr>
                     </a:p>
                   </a:txBody>
@@ -16589,7 +16579,7 @@
                           <a:solidFill>
                             <a:srgbClr val="1E2226"/>
                           </a:solidFill>
-                          <a:latin typeface="Inter"/>
+                          <a:latin typeface="Arial"/>
                         </a:rPr>
                         <a:t>Value seekers</a:t>
                       </a:r>
@@ -16597,7 +16587,7 @@
                         <a:solidFill>
                           <a:srgbClr val="1E2226"/>
                         </a:solidFill>
-                        <a:latin typeface="Inter"/>
+                        <a:latin typeface="Arial"/>
                       </a:endParaRPr>
                     </a:p>
                   </a:txBody>
@@ -16632,7 +16622,7 @@
                           <a:solidFill>
                             <a:srgbClr val="1E2226"/>
                           </a:solidFill>
-                          <a:latin typeface="Inter"/>
+                          <a:latin typeface="Arial"/>
                         </a:rPr>
                         <a:t>1,240</a:t>
                       </a:r>
@@ -16640,7 +16630,7 @@
                         <a:solidFill>
                           <a:srgbClr val="1E2226"/>
                         </a:solidFill>
-                        <a:latin typeface="Inter"/>
+                        <a:latin typeface="Arial"/>
                       </a:endParaRPr>
                     </a:p>
                   </a:txBody>
@@ -16675,7 +16665,7 @@
                           <a:solidFill>
                             <a:srgbClr val="1E2226"/>
                           </a:solidFill>
-                          <a:latin typeface="Inter"/>
+                          <a:latin typeface="Arial"/>
                         </a:rPr>
                         <a:t>12.9</a:t>
                       </a:r>
@@ -16683,7 +16673,7 @@
                         <a:solidFill>
                           <a:srgbClr val="1E2226"/>
                         </a:solidFill>
-                        <a:latin typeface="Inter"/>
+                        <a:latin typeface="Arial"/>
                       </a:endParaRPr>
                     </a:p>
                   </a:txBody>
@@ -16718,7 +16708,7 @@
                           <a:solidFill>
                             <a:srgbClr val="C24E26"/>
                           </a:solidFill>
-                          <a:latin typeface="Inter"/>
+                          <a:latin typeface="Arial"/>
                         </a:rPr>
                         <a:t>5.1</a:t>
                       </a:r>
@@ -16726,7 +16716,7 @@
                         <a:solidFill>
                           <a:srgbClr val="C24E26"/>
                         </a:solidFill>
-                        <a:latin typeface="Inter"/>
+                        <a:latin typeface="Arial"/>
                       </a:endParaRPr>
                     </a:p>
                   </a:txBody>
@@ -16761,7 +16751,7 @@
                           <a:solidFill>
                             <a:srgbClr val="C24E26"/>
                           </a:solidFill>
-                          <a:latin typeface="Inter"/>
+                          <a:latin typeface="Arial"/>
                         </a:rPr>
                         <a:t>5.0</a:t>
                       </a:r>
@@ -16769,7 +16759,7 @@
                         <a:solidFill>
                           <a:srgbClr val="C24E26"/>
                         </a:solidFill>
-                        <a:latin typeface="Inter"/>
+                        <a:latin typeface="Arial"/>
                       </a:endParaRPr>
                     </a:p>
                   </a:txBody>
@@ -16804,7 +16794,7 @@
                           <a:solidFill>
                             <a:srgbClr val="1E2226"/>
                           </a:solidFill>
-                          <a:latin typeface="Inter"/>
+                          <a:latin typeface="Arial"/>
                         </a:rPr>
                         <a:t>650</a:t>
                       </a:r>
@@ -16812,7 +16802,7 @@
                         <a:solidFill>
                           <a:srgbClr val="1E2226"/>
                         </a:solidFill>
-                        <a:latin typeface="Inter"/>
+                        <a:latin typeface="Arial"/>
                       </a:endParaRPr>
                     </a:p>
                   </a:txBody>
@@ -16841,64 +16831,64 @@
                     <a:bodyPr wrap="square"/>
                     <a:lstStyle/>
                     <a:p>
+                      <a:pPr algn="l" marL="109728"/>
+                      <a:r>
+                        <a:rPr sz="800" b="0" i="0">
+                          <a:solidFill>
+                            <a:srgbClr val="1E2226"/>
+                          </a:solidFill>
+                          <a:latin typeface="Arial"/>
+                        </a:rPr>
+                        <a:t>Main shop at a discounter</a:t>
+                      </a:r>
+                      <a:endParaRPr sz="800" b="0" i="0">
+                        <a:solidFill>
+                          <a:srgbClr val="1E2226"/>
+                        </a:solidFill>
+                        <a:latin typeface="Arial"/>
+                      </a:endParaRPr>
+                    </a:p>
+                  </a:txBody>
+                  <a:tcPr marL="27432" marR="27432" marT="27432" marB="27432" anchor="ctr">
+                    <a:lnL w="0">
+                      <a:noFill/>
+                    </a:lnL>
+                    <a:lnR w="0">
+                      <a:noFill/>
+                    </a:lnR>
+                    <a:lnT w="6350">
+                      <a:solidFill>
+                        <a:srgbClr val="C9CFD6"/>
+                      </a:solidFill>
+                    </a:lnT>
+                    <a:lnB w="6350">
+                      <a:solidFill>
+                        <a:srgbClr val="C9CFD6"/>
+                      </a:solidFill>
+                    </a:lnB>
+                    <a:noFill/>
+                  </a:tcPr>
+                </a:tc>
+                <a:tc>
+                  <a:txBody>
+                    <a:bodyPr wrap="square"/>
+                    <a:lstStyle/>
+                    <a:p>
                       <a:pPr algn="l"/>
                       <a:r>
                         <a:rPr sz="800" b="0" i="0">
                           <a:solidFill>
                             <a:srgbClr val="1E2226"/>
                           </a:solidFill>
-                          <a:latin typeface="Inter"/>
-                        </a:rPr>
-                        <a:t>Main shop at a discounter</a:t>
+                          <a:latin typeface="Arial"/>
+                        </a:rPr>
+                        <a:t>Discounter</a:t>
                       </a:r>
                       <a:endParaRPr sz="800" b="0" i="0">
                         <a:solidFill>
                           <a:srgbClr val="1E2226"/>
                         </a:solidFill>
-                        <a:latin typeface="Inter"/>
-                      </a:endParaRPr>
-                    </a:p>
-                  </a:txBody>
-                  <a:tcPr marL="27432" marR="27432" marT="27432" marB="27432" anchor="ctr">
-                    <a:lnL w="0">
-                      <a:noFill/>
-                    </a:lnL>
-                    <a:lnR w="0">
-                      <a:noFill/>
-                    </a:lnR>
-                    <a:lnT w="6350">
-                      <a:solidFill>
-                        <a:srgbClr val="C9CFD6"/>
-                      </a:solidFill>
-                    </a:lnT>
-                    <a:lnB w="6350">
-                      <a:solidFill>
-                        <a:srgbClr val="C9CFD6"/>
-                      </a:solidFill>
-                    </a:lnB>
-                    <a:noFill/>
-                  </a:tcPr>
-                </a:tc>
-                <a:tc>
-                  <a:txBody>
-                    <a:bodyPr wrap="square"/>
-                    <a:lstStyle/>
-                    <a:p>
-                      <a:pPr algn="l"/>
-                      <a:r>
-                        <a:rPr sz="800" b="0" i="0">
-                          <a:solidFill>
-                            <a:srgbClr val="1E2226"/>
-                          </a:solidFill>
-                          <a:latin typeface="Inter"/>
-                        </a:rPr>
-                        <a:t>Discounter</a:t>
-                      </a:r>
-                      <a:endParaRPr sz="800" b="0" i="0">
-                        <a:solidFill>
-                          <a:srgbClr val="1E2226"/>
-                        </a:solidFill>
-                        <a:latin typeface="Inter"/>
+                        <a:latin typeface="Arial"/>
                       </a:endParaRPr>
                     </a:p>
                   </a:txBody>
@@ -16935,7 +16925,7 @@
                           <a:solidFill>
                             <a:srgbClr val="1E2226"/>
                           </a:solidFill>
-                          <a:latin typeface="Inter"/>
+                          <a:latin typeface="Arial"/>
                         </a:rPr>
                         <a:t>Older traditional</a:t>
                       </a:r>
@@ -16943,7 +16933,7 @@
                         <a:solidFill>
                           <a:srgbClr val="1E2226"/>
                         </a:solidFill>
-                        <a:latin typeface="Inter"/>
+                        <a:latin typeface="Arial"/>
                       </a:endParaRPr>
                     </a:p>
                   </a:txBody>
@@ -16978,7 +16968,7 @@
                           <a:solidFill>
                             <a:srgbClr val="1E2226"/>
                           </a:solidFill>
-                          <a:latin typeface="Inter"/>
+                          <a:latin typeface="Arial"/>
                         </a:rPr>
                         <a:t>960</a:t>
                       </a:r>
@@ -16986,7 +16976,7 @@
                         <a:solidFill>
                           <a:srgbClr val="1E2226"/>
                         </a:solidFill>
-                        <a:latin typeface="Inter"/>
+                        <a:latin typeface="Arial"/>
                       </a:endParaRPr>
                     </a:p>
                   </a:txBody>
@@ -17021,7 +17011,7 @@
                           <a:solidFill>
                             <a:srgbClr val="1E2226"/>
                           </a:solidFill>
-                          <a:latin typeface="Inter"/>
+                          <a:latin typeface="Arial"/>
                         </a:rPr>
                         <a:t>8.2</a:t>
                       </a:r>
@@ -17029,7 +17019,7 @@
                         <a:solidFill>
                           <a:srgbClr val="1E2226"/>
                         </a:solidFill>
-                        <a:latin typeface="Inter"/>
+                        <a:latin typeface="Arial"/>
                       </a:endParaRPr>
                     </a:p>
                   </a:txBody>
@@ -17064,7 +17054,7 @@
                           <a:solidFill>
                             <a:srgbClr val="1E2226"/>
                           </a:solidFill>
-                          <a:latin typeface="Inter"/>
+                          <a:latin typeface="Arial"/>
                         </a:rPr>
                         <a:t>(0.6)</a:t>
                       </a:r>
@@ -17072,7 +17062,7 @@
                         <a:solidFill>
                           <a:srgbClr val="1E2226"/>
                         </a:solidFill>
-                        <a:latin typeface="Inter"/>
+                        <a:latin typeface="Arial"/>
                       </a:endParaRPr>
                     </a:p>
                   </a:txBody>
@@ -17107,7 +17097,7 @@
                           <a:solidFill>
                             <a:srgbClr val="1E2226"/>
                           </a:solidFill>
-                          <a:latin typeface="Inter"/>
+                          <a:latin typeface="Arial"/>
                         </a:rPr>
                         <a:t>13.3</a:t>
                       </a:r>
@@ -17115,7 +17105,7 @@
                         <a:solidFill>
                           <a:srgbClr val="1E2226"/>
                         </a:solidFill>
-                        <a:latin typeface="Inter"/>
+                        <a:latin typeface="Arial"/>
                       </a:endParaRPr>
                     </a:p>
                   </a:txBody>
@@ -17150,7 +17140,7 @@
                           <a:solidFill>
                             <a:srgbClr val="1E2226"/>
                           </a:solidFill>
-                          <a:latin typeface="Inter"/>
+                          <a:latin typeface="Arial"/>
                         </a:rPr>
                         <a:t>1,093</a:t>
                       </a:r>
@@ -17158,7 +17148,7 @@
                         <a:solidFill>
                           <a:srgbClr val="1E2226"/>
                         </a:solidFill>
-                        <a:latin typeface="Inter"/>
+                        <a:latin typeface="Arial"/>
                       </a:endParaRPr>
                     </a:p>
                   </a:txBody>
@@ -17187,64 +17177,64 @@
                     <a:bodyPr wrap="square"/>
                     <a:lstStyle/>
                     <a:p>
+                      <a:pPr algn="l" marL="109728"/>
+                      <a:r>
+                        <a:rPr sz="800" b="0" i="0">
+                          <a:solidFill>
+                            <a:srgbClr val="1E2226"/>
+                          </a:solidFill>
+                          <a:latin typeface="Arial"/>
+                        </a:rPr>
+                        <a:t>Main weekly shop</a:t>
+                      </a:r>
+                      <a:endParaRPr sz="800" b="0" i="0">
+                        <a:solidFill>
+                          <a:srgbClr val="1E2226"/>
+                        </a:solidFill>
+                        <a:latin typeface="Arial"/>
+                      </a:endParaRPr>
+                    </a:p>
+                  </a:txBody>
+                  <a:tcPr marL="27432" marR="27432" marT="27432" marB="27432" anchor="ctr">
+                    <a:lnL w="0">
+                      <a:noFill/>
+                    </a:lnL>
+                    <a:lnR w="0">
+                      <a:noFill/>
+                    </a:lnR>
+                    <a:lnT w="6350">
+                      <a:solidFill>
+                        <a:srgbClr val="C9CFD6"/>
+                      </a:solidFill>
+                    </a:lnT>
+                    <a:lnB w="6350">
+                      <a:solidFill>
+                        <a:srgbClr val="C9CFD6"/>
+                      </a:solidFill>
+                    </a:lnB>
+                    <a:noFill/>
+                  </a:tcPr>
+                </a:tc>
+                <a:tc>
+                  <a:txBody>
+                    <a:bodyPr wrap="square"/>
+                    <a:lstStyle/>
+                    <a:p>
                       <a:pPr algn="l"/>
                       <a:r>
                         <a:rPr sz="800" b="0" i="0">
                           <a:solidFill>
                             <a:srgbClr val="1E2226"/>
                           </a:solidFill>
-                          <a:latin typeface="Inter"/>
-                        </a:rPr>
-                        <a:t>Main weekly shop</a:t>
+                          <a:latin typeface="Arial"/>
+                        </a:rPr>
+                        <a:t>Supermarket</a:t>
                       </a:r>
                       <a:endParaRPr sz="800" b="0" i="0">
                         <a:solidFill>
                           <a:srgbClr val="1E2226"/>
                         </a:solidFill>
-                        <a:latin typeface="Inter"/>
-                      </a:endParaRPr>
-                    </a:p>
-                  </a:txBody>
-                  <a:tcPr marL="27432" marR="27432" marT="27432" marB="27432" anchor="ctr">
-                    <a:lnL w="0">
-                      <a:noFill/>
-                    </a:lnL>
-                    <a:lnR w="0">
-                      <a:noFill/>
-                    </a:lnR>
-                    <a:lnT w="6350">
-                      <a:solidFill>
-                        <a:srgbClr val="C9CFD6"/>
-                      </a:solidFill>
-                    </a:lnT>
-                    <a:lnB w="6350">
-                      <a:solidFill>
-                        <a:srgbClr val="C9CFD6"/>
-                      </a:solidFill>
-                    </a:lnB>
-                    <a:noFill/>
-                  </a:tcPr>
-                </a:tc>
-                <a:tc>
-                  <a:txBody>
-                    <a:bodyPr wrap="square"/>
-                    <a:lstStyle/>
-                    <a:p>
-                      <a:pPr algn="l"/>
-                      <a:r>
-                        <a:rPr sz="800" b="0" i="0">
-                          <a:solidFill>
-                            <a:srgbClr val="1E2226"/>
-                          </a:solidFill>
-                          <a:latin typeface="Inter"/>
-                        </a:rPr>
-                        <a:t>Supermarket</a:t>
-                      </a:r>
-                      <a:endParaRPr sz="800" b="0" i="0">
-                        <a:solidFill>
-                          <a:srgbClr val="1E2226"/>
-                        </a:solidFill>
-                        <a:latin typeface="Inter"/>
+                        <a:latin typeface="Arial"/>
                       </a:endParaRPr>
                     </a:p>
                   </a:txBody>
@@ -17281,7 +17271,7 @@
                           <a:solidFill>
                             <a:srgbClr val="1E2226"/>
                           </a:solidFill>
-                          <a:latin typeface="Inter"/>
+                          <a:latin typeface="Arial"/>
                         </a:rPr>
                         <a:t>Young urban</a:t>
                       </a:r>
@@ -17289,7 +17279,7 @@
                         <a:solidFill>
                           <a:srgbClr val="1E2226"/>
                         </a:solidFill>
-                        <a:latin typeface="Inter"/>
+                        <a:latin typeface="Arial"/>
                       </a:endParaRPr>
                     </a:p>
                   </a:txBody>
@@ -17324,7 +17314,7 @@
                           <a:solidFill>
                             <a:srgbClr val="1E2226"/>
                           </a:solidFill>
-                          <a:latin typeface="Inter"/>
+                          <a:latin typeface="Arial"/>
                         </a:rPr>
                         <a:t>610</a:t>
                       </a:r>
@@ -17332,7 +17322,7 @@
                         <a:solidFill>
                           <a:srgbClr val="1E2226"/>
                         </a:solidFill>
-                        <a:latin typeface="Inter"/>
+                        <a:latin typeface="Arial"/>
                       </a:endParaRPr>
                     </a:p>
                   </a:txBody>
@@ -17367,7 +17357,7 @@
                           <a:solidFill>
                             <a:srgbClr val="1E2226"/>
                           </a:solidFill>
-                          <a:latin typeface="Inter"/>
+                          <a:latin typeface="Arial"/>
                         </a:rPr>
                         <a:t>4.3</a:t>
                       </a:r>
@@ -17375,7 +17365,7 @@
                         <a:solidFill>
                           <a:srgbClr val="1E2226"/>
                         </a:solidFill>
-                        <a:latin typeface="Inter"/>
+                        <a:latin typeface="Arial"/>
                       </a:endParaRPr>
                     </a:p>
                   </a:txBody>
@@ -17410,7 +17400,7 @@
                           <a:solidFill>
                             <a:srgbClr val="C24E26"/>
                           </a:solidFill>
-                          <a:latin typeface="Inter"/>
+                          <a:latin typeface="Arial"/>
                         </a:rPr>
                         <a:t>7.9</a:t>
                       </a:r>
@@ -17418,7 +17408,7 @@
                         <a:solidFill>
                           <a:srgbClr val="C24E26"/>
                         </a:solidFill>
-                        <a:latin typeface="Inter"/>
+                        <a:latin typeface="Arial"/>
                       </a:endParaRPr>
                     </a:p>
                   </a:txBody>
@@ -17453,7 +17443,7 @@
                           <a:solidFill>
                             <a:srgbClr val="C24E26"/>
                           </a:solidFill>
-                          <a:latin typeface="Inter"/>
+                          <a:latin typeface="Arial"/>
                         </a:rPr>
                         <a:t>3.3</a:t>
                       </a:r>
@@ -17461,7 +17451,7 @@
                         <a:solidFill>
                           <a:srgbClr val="C24E26"/>
                         </a:solidFill>
-                        <a:latin typeface="Inter"/>
+                        <a:latin typeface="Arial"/>
                       </a:endParaRPr>
                     </a:p>
                   </a:txBody>
@@ -17496,7 +17486,7 @@
                           <a:solidFill>
                             <a:srgbClr val="1E2226"/>
                           </a:solidFill>
-                          <a:latin typeface="Inter"/>
+                          <a:latin typeface="Arial"/>
                         </a:rPr>
                         <a:t>140</a:t>
                       </a:r>
@@ -17504,7 +17494,7 @@
                         <a:solidFill>
                           <a:srgbClr val="1E2226"/>
                         </a:solidFill>
-                        <a:latin typeface="Inter"/>
+                        <a:latin typeface="Arial"/>
                       </a:endParaRPr>
                     </a:p>
                   </a:txBody>
@@ -17533,64 +17523,64 @@
                     <a:bodyPr wrap="square"/>
                     <a:lstStyle/>
                     <a:p>
+                      <a:pPr algn="l" marL="109728"/>
+                      <a:r>
+                        <a:rPr sz="800" b="0" i="0">
+                          <a:solidFill>
+                            <a:srgbClr val="1E2226"/>
+                          </a:solidFill>
+                          <a:latin typeface="Arial"/>
+                        </a:rPr>
+                        <a:t>Food for now and online</a:t>
+                      </a:r>
+                      <a:endParaRPr sz="800" b="0" i="0">
+                        <a:solidFill>
+                          <a:srgbClr val="1E2226"/>
+                        </a:solidFill>
+                        <a:latin typeface="Arial"/>
+                      </a:endParaRPr>
+                    </a:p>
+                  </a:txBody>
+                  <a:tcPr marL="27432" marR="27432" marT="27432" marB="27432" anchor="ctr">
+                    <a:lnL w="0">
+                      <a:noFill/>
+                    </a:lnL>
+                    <a:lnR w="0">
+                      <a:noFill/>
+                    </a:lnR>
+                    <a:lnT w="6350">
+                      <a:solidFill>
+                        <a:srgbClr val="C9CFD6"/>
+                      </a:solidFill>
+                    </a:lnT>
+                    <a:lnB w="12700">
+                      <a:solidFill>
+                        <a:srgbClr val="1E2226"/>
+                      </a:solidFill>
+                    </a:lnB>
+                    <a:noFill/>
+                  </a:tcPr>
+                </a:tc>
+                <a:tc>
+                  <a:txBody>
+                    <a:bodyPr wrap="square"/>
+                    <a:lstStyle/>
+                    <a:p>
                       <a:pPr algn="l"/>
                       <a:r>
                         <a:rPr sz="800" b="0" i="0">
                           <a:solidFill>
                             <a:srgbClr val="1E2226"/>
                           </a:solidFill>
-                          <a:latin typeface="Inter"/>
-                        </a:rPr>
-                        <a:t>Food for now and online</a:t>
+                          <a:latin typeface="Arial"/>
+                        </a:rPr>
+                        <a:t>Express, online</a:t>
                       </a:r>
                       <a:endParaRPr sz="800" b="0" i="0">
                         <a:solidFill>
                           <a:srgbClr val="1E2226"/>
                         </a:solidFill>
-                        <a:latin typeface="Inter"/>
-                      </a:endParaRPr>
-                    </a:p>
-                  </a:txBody>
-                  <a:tcPr marL="27432" marR="27432" marT="27432" marB="27432" anchor="ctr">
-                    <a:lnL w="0">
-                      <a:noFill/>
-                    </a:lnL>
-                    <a:lnR w="0">
-                      <a:noFill/>
-                    </a:lnR>
-                    <a:lnT w="6350">
-                      <a:solidFill>
-                        <a:srgbClr val="C9CFD6"/>
-                      </a:solidFill>
-                    </a:lnT>
-                    <a:lnB w="12700">
-                      <a:solidFill>
-                        <a:srgbClr val="1E2226"/>
-                      </a:solidFill>
-                    </a:lnB>
-                    <a:noFill/>
-                  </a:tcPr>
-                </a:tc>
-                <a:tc>
-                  <a:txBody>
-                    <a:bodyPr wrap="square"/>
-                    <a:lstStyle/>
-                    <a:p>
-                      <a:pPr algn="l"/>
-                      <a:r>
-                        <a:rPr sz="800" b="0" i="0">
-                          <a:solidFill>
-                            <a:srgbClr val="1E2226"/>
-                          </a:solidFill>
-                          <a:latin typeface="Inter"/>
-                        </a:rPr>
-                        <a:t>Express, online</a:t>
-                      </a:r>
-                      <a:endParaRPr sz="800" b="0" i="0">
-                        <a:solidFill>
-                          <a:srgbClr val="1E2226"/>
-                        </a:solidFill>
-                        <a:latin typeface="Inter"/>
+                        <a:latin typeface="Arial"/>
                       </a:endParaRPr>
                     </a:p>
                   </a:txBody>
@@ -17627,7 +17617,7 @@
                           <a:solidFill>
                             <a:srgbClr val="1E2226"/>
                           </a:solidFill>
-                          <a:latin typeface="Inter"/>
+                          <a:latin typeface="Arial"/>
                         </a:rPr>
                         <a:t>Market</a:t>
                       </a:r>
@@ -17635,7 +17625,7 @@
                         <a:solidFill>
                           <a:srgbClr val="1E2226"/>
                         </a:solidFill>
-                        <a:latin typeface="Inter"/>
+                        <a:latin typeface="Arial"/>
                       </a:endParaRPr>
                     </a:p>
                   </a:txBody>
@@ -17670,7 +17660,7 @@
                           <a:solidFill>
                             <a:srgbClr val="1E2226"/>
                           </a:solidFill>
-                          <a:latin typeface="Inter"/>
+                          <a:latin typeface="Arial"/>
                         </a:rPr>
                         <a:t>4,780</a:t>
                       </a:r>
@@ -17678,7 +17668,7 @@
                         <a:solidFill>
                           <a:srgbClr val="1E2226"/>
                         </a:solidFill>
-                        <a:latin typeface="Inter"/>
+                        <a:latin typeface="Arial"/>
                       </a:endParaRPr>
                     </a:p>
                   </a:txBody>
@@ -17713,7 +17703,7 @@
                           <a:solidFill>
                             <a:srgbClr val="1E2226"/>
                           </a:solidFill>
-                          <a:latin typeface="Inter"/>
+                          <a:latin typeface="Arial"/>
                         </a:rPr>
                         <a:t>46.4</a:t>
                       </a:r>
@@ -17721,7 +17711,7 @@
                         <a:solidFill>
                           <a:srgbClr val="1E2226"/>
                         </a:solidFill>
-                        <a:latin typeface="Inter"/>
+                        <a:latin typeface="Arial"/>
                       </a:endParaRPr>
                     </a:p>
                   </a:txBody>
@@ -17756,7 +17746,7 @@
                           <a:solidFill>
                             <a:srgbClr val="1E2226"/>
                           </a:solidFill>
-                          <a:latin typeface="Inter"/>
+                          <a:latin typeface="Arial"/>
                         </a:rPr>
                         <a:t>3.5</a:t>
                       </a:r>
@@ -17764,7 +17754,7 @@
                         <a:solidFill>
                           <a:srgbClr val="1E2226"/>
                         </a:solidFill>
-                        <a:latin typeface="Inter"/>
+                        <a:latin typeface="Arial"/>
                       </a:endParaRPr>
                     </a:p>
                   </a:txBody>
@@ -17799,7 +17789,7 @@
                           <a:solidFill>
                             <a:srgbClr val="1E2226"/>
                           </a:solidFill>
-                          <a:latin typeface="Inter"/>
+                          <a:latin typeface="Arial"/>
                         </a:rPr>
                         <a:t>8.4</a:t>
                       </a:r>
@@ -17807,7 +17797,7 @@
                         <a:solidFill>
                           <a:srgbClr val="1E2226"/>
                         </a:solidFill>
-                        <a:latin typeface="Inter"/>
+                        <a:latin typeface="Arial"/>
                       </a:endParaRPr>
                     </a:p>
                   </a:txBody>
@@ -17842,7 +17832,7 @@
                           <a:solidFill>
                             <a:srgbClr val="1E2226"/>
                           </a:solidFill>
-                          <a:latin typeface="Inter"/>
+                          <a:latin typeface="Arial"/>
                         </a:rPr>
                         <a:t>3,890</a:t>
                       </a:r>
@@ -17850,7 +17840,41 @@
                         <a:solidFill>
                           <a:srgbClr val="1E2226"/>
                         </a:solidFill>
-                        <a:latin typeface="Inter"/>
+                        <a:latin typeface="Arial"/>
+                      </a:endParaRPr>
+                    </a:p>
+                  </a:txBody>
+                  <a:tcPr marL="27432" marR="27432" marT="27432" marB="27432" anchor="ctr">
+                    <a:lnL w="0">
+                      <a:noFill/>
+                    </a:lnL>
+                    <a:lnR w="0">
+                      <a:noFill/>
+                    </a:lnR>
+                    <a:lnT w="12700">
+                      <a:solidFill>
+                        <a:srgbClr val="1E2226"/>
+                      </a:solidFill>
+                    </a:lnT>
+                    <a:lnB w="12700">
+                      <a:solidFill>
+                        <a:srgbClr val="1E2226"/>
+                      </a:solidFill>
+                    </a:lnB>
+                    <a:noFill/>
+                  </a:tcPr>
+                </a:tc>
+                <a:tc>
+                  <a:txBody>
+                    <a:bodyPr wrap="square"/>
+                    <a:lstStyle/>
+                    <a:p>
+                      <a:pPr algn="l" marL="109728"/>
+                      <a:endParaRPr sz="800" b="1" i="0">
+                        <a:solidFill>
+                          <a:srgbClr val="1E2226"/>
+                        </a:solidFill>
+                        <a:latin typeface="Arial"/>
                       </a:endParaRPr>
                     </a:p>
                   </a:txBody>
@@ -17884,41 +17908,7 @@
                         <a:solidFill>
                           <a:srgbClr val="1E2226"/>
                         </a:solidFill>
-                        <a:latin typeface="Inter"/>
-                      </a:endParaRPr>
-                    </a:p>
-                  </a:txBody>
-                  <a:tcPr marL="27432" marR="27432" marT="27432" marB="27432" anchor="ctr">
-                    <a:lnL w="0">
-                      <a:noFill/>
-                    </a:lnL>
-                    <a:lnR w="0">
-                      <a:noFill/>
-                    </a:lnR>
-                    <a:lnT w="12700">
-                      <a:solidFill>
-                        <a:srgbClr val="1E2226"/>
-                      </a:solidFill>
-                    </a:lnT>
-                    <a:lnB w="12700">
-                      <a:solidFill>
-                        <a:srgbClr val="1E2226"/>
-                      </a:solidFill>
-                    </a:lnB>
-                    <a:noFill/>
-                  </a:tcPr>
-                </a:tc>
-                <a:tc>
-                  <a:txBody>
-                    <a:bodyPr wrap="square"/>
-                    <a:lstStyle/>
-                    <a:p>
-                      <a:pPr algn="l"/>
-                      <a:endParaRPr sz="800" b="1" i="0">
-                        <a:solidFill>
-                          <a:srgbClr val="1E2226"/>
-                        </a:solidFill>
-                        <a:latin typeface="Inter"/>
+                        <a:latin typeface="Arial"/>
                       </a:endParaRPr>
                     </a:p>
                   </a:txBody>
@@ -17986,7 +17976,7 @@
                 <a:solidFill>
                   <a:srgbClr val="1E2226"/>
                 </a:solidFill>
-                <a:latin typeface="Inter"/>
+                <a:latin typeface="Arial"/>
               </a:rPr>
               <a:t>Where spend grows against where Brindle is strong</a:t>
             </a:r>
@@ -18079,7 +18069,7 @@
                 <a:solidFill>
                   <a:srgbClr val="1E2226"/>
                 </a:solidFill>
-                <a:latin typeface="Inter"/>
+                <a:latin typeface="Arial"/>
               </a:rPr>
               <a:t>What it means for Brindle</a:t>
             </a:r>
@@ -18095,7 +18085,7 @@
         <p:spPr>
           <a:xfrm>
             <a:off x="7860727" y="3240278"/>
-            <a:ext cx="3810065" cy="2639695"/>
+            <a:ext cx="3810065" cy="2508250"/>
           </a:xfrm>
           <a:prstGeom prst="rect">
             <a:avLst/>
@@ -18125,7 +18115,7 @@
                 <a:solidFill>
                   <a:srgbClr val="1F3A5F"/>
                 </a:solidFill>
-                <a:latin typeface="Inter"/>
+                <a:latin typeface="Arial"/>
               </a:rPr>
               <a:t>The base is shrinking in real terms</a:t>
             </a:r>
@@ -18148,9 +18138,9 @@
                 <a:solidFill>
                   <a:srgbClr val="1E2226"/>
                 </a:solidFill>
-                <a:latin typeface="Inter"/>
+                <a:latin typeface="Arial"/>
               </a:rPr>
-              <a:t>66% of Brindle's sales come from established families and older</a:t>
+              <a:t>66% of Brindle's sales come from established families and older traditional</a:t>
             </a:r>
             <a:br/>
             <a:r>
@@ -18158,9 +18148,9 @@
                 <a:solidFill>
                   <a:srgbClr val="1E2226"/>
                 </a:solidFill>
-                <a:latin typeface="Inter"/>
+                <a:latin typeface="Arial"/>
               </a:rPr>
-              <a:t>traditional shoppers, whose spend grows 1.4% and falls 0.6% a year.</a:t>
+              <a:t>shoppers, whose spend grows 1.4% and falls 0.6% a year.</a:t>
             </a:r>
           </a:p>
           <a:p>
@@ -18181,7 +18171,7 @@
                 <a:solidFill>
                   <a:srgbClr val="1F3A5F"/>
                 </a:solidFill>
-                <a:latin typeface="Inter"/>
+                <a:latin typeface="Arial"/>
               </a:rPr>
               <a:t>Growth is where Brindle is weakest</a:t>
             </a:r>
@@ -18204,9 +18194,9 @@
                 <a:solidFill>
                   <a:srgbClr val="1E2226"/>
                 </a:solidFill>
-                <a:latin typeface="Inter"/>
+                <a:latin typeface="Arial"/>
               </a:rPr>
-              <a:t>The three growth segments hold 57% of spend, £26.6bn, and give</a:t>
+              <a:t>The three growth segments hold 57% of spend, £26.6bn, and give Brindle</a:t>
             </a:r>
             <a:br/>
             <a:r>
@@ -18214,9 +18204,9 @@
                 <a:solidFill>
                   <a:srgbClr val="1E2226"/>
                 </a:solidFill>
-                <a:latin typeface="Inter"/>
+                <a:latin typeface="Arial"/>
               </a:rPr>
-              <a:t>Brindle 5.0% of it against 12.9% in the core.</a:t>
+              <a:t>5.0% of it against 12.9% in the core.</a:t>
             </a:r>
           </a:p>
           <a:p>
@@ -18237,7 +18227,7 @@
                 <a:solidFill>
                   <a:srgbClr val="1F3A5F"/>
                 </a:solidFill>
-                <a:latin typeface="Inter"/>
+                <a:latin typeface="Arial"/>
               </a:rPr>
               <a:t>Each point of share is worth £266m</a:t>
             </a:r>
@@ -18260,9 +18250,9 @@
                 <a:solidFill>
                   <a:srgbClr val="1E2226"/>
                 </a:solidFill>
-                <a:latin typeface="Inter"/>
+                <a:latin typeface="Arial"/>
               </a:rPr>
-              <a:t>One point of wallet in the growth segments is £266m of sales; they</a:t>
+              <a:t>One point of wallet in the growth segments is £266m of sales; they shop</a:t>
             </a:r>
             <a:br/>
             <a:r>
@@ -18270,19 +18260,9 @@
                 <a:solidFill>
                   <a:srgbClr val="1E2226"/>
                 </a:solidFill>
-                <a:latin typeface="Inter"/>
+                <a:latin typeface="Arial"/>
               </a:rPr>
-              <a:t>shop top-up, food-for-now and online, the missions small formats</a:t>
-            </a:r>
-            <a:br/>
-            <a:r>
-              <a:rPr sz="900" b="0" i="0">
-                <a:solidFill>
-                  <a:srgbClr val="1E2226"/>
-                </a:solidFill>
-                <a:latin typeface="Inter"/>
-              </a:rPr>
-              <a:t>serve.</a:t>
+              <a:t>top-up, food-for-now and online, the missions small formats serve.</a:t>
             </a:r>
           </a:p>
           <a:p>
@@ -18303,7 +18283,7 @@
                 <a:solidFill>
                   <a:srgbClr val="1F3A5F"/>
                 </a:solidFill>
-                <a:latin typeface="Inter"/>
+                <a:latin typeface="Arial"/>
               </a:rPr>
               <a:t>Half the gap is £1.1bn of sales</a:t>
             </a:r>
@@ -18326,7 +18306,7 @@
                 <a:solidFill>
                   <a:srgbClr val="1E2226"/>
                 </a:solidFill>
-                <a:latin typeface="Inter"/>
+                <a:latin typeface="Arial"/>
               </a:rPr>
               <a:t>Lifting growth-segment share halfway to the core's 12.9% would add</a:t>
             </a:r>
@@ -18336,7 +18316,7 @@
                 <a:solidFill>
                   <a:srgbClr val="1E2226"/>
                 </a:solidFill>
-                <a:latin typeface="Inter"/>
+                <a:latin typeface="Arial"/>
               </a:rPr>
               <a:t>£1.1bn, 28% of today's store sales.</a:t>
             </a:r>
@@ -18359,7 +18339,7 @@
                 <a:solidFill>
                   <a:srgbClr val="1F3A5F"/>
                 </a:solidFill>
-                <a:latin typeface="Inter"/>
+                <a:latin typeface="Arial"/>
               </a:rPr>
               <a:t>Young urban is the extreme case</a:t>
             </a:r>
@@ -18382,9 +18362,9 @@
                 <a:solidFill>
                   <a:srgbClr val="1E2226"/>
                 </a:solidFill>
-                <a:latin typeface="Inter"/>
+                <a:latin typeface="Arial"/>
               </a:rPr>
-              <a:t>Its spend grows fastest, 7.9% a year, and Brindle's share is lowest,</a:t>
+              <a:t>Its spend grows fastest, 7.9% a year, and Brindle's share is lowest, 3.3%:</a:t>
             </a:r>
             <a:br/>
             <a:r>
@@ -18392,9 +18372,9 @@
                 <a:solidFill>
                   <a:srgbClr val="1E2226"/>
                 </a:solidFill>
-                <a:latin typeface="Inter"/>
+                <a:latin typeface="Arial"/>
               </a:rPr>
-              <a:t>3.3%: £140m of sales, from express and online.</a:t>
+              <a:t>£140m of sales, from express and online.</a:t>
             </a:r>
           </a:p>
         </p:txBody>
@@ -18438,7 +18418,7 @@
                 <a:solidFill>
                   <a:srgbClr val="5C6670"/>
                 </a:solidFill>
-                <a:latin typeface="Inter"/>
+                <a:latin typeface="Arial"/>
               </a:rPr>
               <a:t>Source: Brindle store P&amp;L, capital register and loyalty-card data, 2025; regional grocery market model; team analysis. All figures illustrative.</a:t>
             </a:r>
@@ -18475,8 +18455,8 @@
         </p:nvSpPr>
         <p:spPr>
           <a:xfrm>
-            <a:off x="6122586" y="4272449"/>
-            <a:ext cx="1044267" cy="114300"/>
+            <a:off x="6168118" y="4272449"/>
+            <a:ext cx="998735" cy="114300"/>
           </a:xfrm>
           <a:prstGeom prst="rect">
             <a:avLst/>
@@ -18506,7 +18486,7 @@
                 <a:solidFill>
                   <a:srgbClr val="5C6670"/>
                 </a:solidFill>
-                <a:latin typeface="Inter"/>
+                <a:latin typeface="Arial"/>
               </a:rPr>
               <a:t>Brindle average 8.4%</a:t>
             </a:r>
@@ -18544,7 +18524,7 @@
         <p:spPr>
           <a:xfrm>
             <a:off x="3881782" y="3228198"/>
-            <a:ext cx="992084" cy="114300"/>
+            <a:ext cx="934972" cy="114300"/>
           </a:xfrm>
           <a:prstGeom prst="rect">
             <a:avLst/>
@@ -18574,7 +18554,7 @@
                 <a:solidFill>
                   <a:srgbClr val="5C6670"/>
                 </a:solidFill>
-                <a:latin typeface="Inter"/>
+                <a:latin typeface="Arial"/>
               </a:rPr>
               <a:t>Market growth 3.5%</a:t>
             </a:r>
@@ -18604,7 +18584,7 @@
       <p:grpSpPr/>
       <p:cxnSp>
         <p:nvCxnSpPr>
-          <p:cNvPr id="27" name="chrome-1"/>
+          <p:cNvPr id="31" name="chrome-1"/>
           <p:cNvCxnSpPr/>
           <p:nvPr/>
         </p:nvCxnSpPr>
@@ -18625,7 +18605,7 @@
       </p:cxnSp>
       <p:sp>
         <p:nvSpPr>
-          <p:cNvPr id="28" name="chrome-2"/>
+          <p:cNvPr id="32" name="chrome-2"/>
           <p:cNvSpPr txBox="1"/>
           <p:nvPr/>
         </p:nvSpPr>
@@ -18650,7 +18630,7 @@
                 <a:solidFill>
                   <a:srgbClr val="5C6670"/>
                 </a:solidFill>
-                <a:latin typeface="Inter"/>
+                <a:latin typeface="Arial"/>
               </a:rPr>
               <a:t>Brindle Markets  |  Store format strategy  |  Steering committee pre-read  |  Illustrative figures</a:t>
             </a:r>
@@ -18659,7 +18639,7 @@
       </p:sp>
       <p:sp>
         <p:nvSpPr>
-          <p:cNvPr id="29" name="chrome-3"/>
+          <p:cNvPr id="33" name="chrome-3"/>
           <p:cNvSpPr txBox="1"/>
           <p:nvPr/>
         </p:nvSpPr>
@@ -18685,7 +18665,7 @@
                 <a:solidFill>
                   <a:srgbClr val="5C6670"/>
                 </a:solidFill>
-                <a:latin typeface="Inter"/>
+                <a:latin typeface="Arial"/>
               </a:rPr>
               <a:t>1</a:t>
             </a:fld>
@@ -18731,7 +18711,7 @@
                 <a:solidFill>
                   <a:srgbClr val="1F3A5F"/>
                 </a:solidFill>
-                <a:latin typeface="Inter"/>
+                <a:latin typeface="Arial"/>
               </a:rPr>
               <a:t>04  NETWORK RATIONALISATION</a:t>
             </a:r>
@@ -18777,7 +18757,7 @@
                 <a:solidFill>
                   <a:srgbClr val="1E2226"/>
                 </a:solidFill>
-                <a:latin typeface="Gelasio"/>
+                <a:latin typeface="Georgia"/>
               </a:rPr>
               <a:t>128 of 214 stores miss the 12% hurdle: reformat 64 where catchments grow, right-size</a:t>
             </a:r>
@@ -18787,7 +18767,7 @@
                 <a:solidFill>
                   <a:srgbClr val="1E2226"/>
                 </a:solidFill>
-                <a:latin typeface="Gelasio"/>
+                <a:latin typeface="Georgia"/>
               </a:rPr>
               <a:t>49 and exit 15 where they do not</a:t>
             </a:r>
@@ -18833,7 +18813,7 @@
                 <a:solidFill>
                   <a:srgbClr val="1E2226"/>
                 </a:solidFill>
-                <a:latin typeface="Inter"/>
+                <a:latin typeface="Arial"/>
               </a:rPr>
               <a:t>214 stores by return and catchment growth</a:t>
             </a:r>
@@ -18879,7 +18859,7 @@
                 <a:solidFill>
                   <a:srgbClr val="5C6670"/>
                 </a:solidFill>
-                <a:latin typeface="Inter"/>
+                <a:latin typeface="Arial"/>
               </a:rPr>
               <a:t>One point per store; thresholds are the 12% hurdle and 1.5% a year catchment growth</a:t>
             </a:r>
@@ -18924,7 +18904,7 @@
         <p:spPr>
           <a:xfrm>
             <a:off x="888187" y="5424195"/>
-            <a:ext cx="1041653" cy="200660"/>
+            <a:ext cx="1025022" cy="200660"/>
           </a:xfrm>
           <a:prstGeom prst="rect">
             <a:avLst/>
@@ -18954,7 +18934,7 @@
                 <a:solidFill>
                   <a:srgbClr val="1E2226"/>
                 </a:solidFill>
-                <a:latin typeface="Inter"/>
+                <a:latin typeface="Arial"/>
               </a:rPr>
               <a:t>Exit: 15, under 3%</a:t>
             </a:r>
@@ -19018,7 +18998,7 @@
                 <a:solidFill>
                   <a:srgbClr val="1E2226"/>
                 </a:solidFill>
-                <a:latin typeface="Inter"/>
+                <a:latin typeface="Arial"/>
               </a:rPr>
               <a:t>The five actions</a:t>
             </a:r>
@@ -19064,7 +19044,7 @@
                 <a:solidFill>
                   <a:srgbClr val="5C6670"/>
                 </a:solidFill>
-                <a:latin typeface="Inter"/>
+                <a:latin typeface="Arial"/>
               </a:rPr>
               <a:t>2025 sales, store EBITDA and return; capex and EBITDA uplift to 2028; large means superstore or supermarket</a:t>
             </a:r>
@@ -19081,24 +19061,24 @@
         </p:nvGraphicFramePr>
         <p:xfrm>
           <a:off x="6598920" y="1574292"/>
-          <a:ext cx="5181600" cy="1483614"/>
+          <a:ext cx="5181600" cy="1361440"/>
         </p:xfrm>
         <a:graphic>
           <a:graphicData uri="http://schemas.openxmlformats.org/drawingml/2006/table">
             <a:tbl>
               <a:tblPr firstRow="0" bandRow="0" lastRow="0" firstCol="0" lastCol="0" bandCol="0"/>
               <a:tblGrid>
-                <a:gridCol w="580965"/>
+                <a:gridCol w="560526"/>
                 <a:gridCol w="932688"/>
-                <a:gridCol w="396468"/>
-                <a:gridCol w="355143"/>
-                <a:gridCol w="583268"/>
-                <a:gridCol w="583267"/>
-                <a:gridCol w="583267"/>
-                <a:gridCol w="583267"/>
-                <a:gridCol w="583267"/>
+                <a:gridCol w="391309"/>
+                <a:gridCol w="351770"/>
+                <a:gridCol w="583347"/>
+                <a:gridCol w="591086"/>
+                <a:gridCol w="588704"/>
+                <a:gridCol w="591085"/>
+                <a:gridCol w="591085"/>
               </a:tblGrid>
-              <a:tr h="421386">
+              <a:tr h="299212">
                 <a:tc>
                   <a:txBody>
                     <a:bodyPr wrap="square"/>
@@ -19110,7 +19090,7 @@
                           <a:solidFill>
                             <a:srgbClr val="1E2226"/>
                           </a:solidFill>
-                          <a:latin typeface="Inter"/>
+                          <a:latin typeface="Arial"/>
                         </a:rPr>
                         <a:t>Action</a:t>
                       </a:r>
@@ -19118,7 +19098,7 @@
                         <a:solidFill>
                           <a:srgbClr val="1E2226"/>
                         </a:solidFill>
-                        <a:latin typeface="Inter"/>
+                        <a:latin typeface="Arial"/>
                       </a:endParaRPr>
                     </a:p>
                   </a:txBody>
@@ -19151,7 +19131,7 @@
                           <a:solidFill>
                             <a:srgbClr val="1E2226"/>
                           </a:solidFill>
-                          <a:latin typeface="Inter"/>
+                          <a:latin typeface="Arial"/>
                         </a:rPr>
                         <a:t>Return, catchment</a:t>
                       </a:r>
@@ -19159,7 +19139,7 @@
                         <a:solidFill>
                           <a:srgbClr val="1E2226"/>
                         </a:solidFill>
-                        <a:latin typeface="Inter"/>
+                        <a:latin typeface="Arial"/>
                       </a:endParaRPr>
                     </a:p>
                   </a:txBody>
@@ -19192,7 +19172,7 @@
                           <a:solidFill>
                             <a:srgbClr val="1E2226"/>
                           </a:solidFill>
-                          <a:latin typeface="Inter"/>
+                          <a:latin typeface="Arial"/>
                         </a:rPr>
                         <a:t>Stores</a:t>
                       </a:r>
@@ -19200,7 +19180,7 @@
                         <a:solidFill>
                           <a:srgbClr val="1E2226"/>
                         </a:solidFill>
-                        <a:latin typeface="Inter"/>
+                        <a:latin typeface="Arial"/>
                       </a:endParaRPr>
                     </a:p>
                   </a:txBody>
@@ -19233,7 +19213,7 @@
                           <a:solidFill>
                             <a:srgbClr val="1E2226"/>
                           </a:solidFill>
-                          <a:latin typeface="Inter"/>
+                          <a:latin typeface="Arial"/>
                         </a:rPr>
                         <a:t>Large</a:t>
                       </a:r>
@@ -19241,7 +19221,7 @@
                         <a:solidFill>
                           <a:srgbClr val="1E2226"/>
                         </a:solidFill>
-                        <a:latin typeface="Inter"/>
+                        <a:latin typeface="Arial"/>
                       </a:endParaRPr>
                     </a:p>
                   </a:txBody>
@@ -19274,7 +19254,7 @@
                           <a:solidFill>
                             <a:srgbClr val="1E2226"/>
                           </a:solidFill>
-                          <a:latin typeface="Inter"/>
+                          <a:latin typeface="Arial"/>
                         </a:rPr>
                         <a:t>Sales (£m)</a:t>
                       </a:r>
@@ -19282,7 +19262,7 @@
                         <a:solidFill>
                           <a:srgbClr val="1E2226"/>
                         </a:solidFill>
-                        <a:latin typeface="Inter"/>
+                        <a:latin typeface="Arial"/>
                       </a:endParaRPr>
                     </a:p>
                   </a:txBody>
@@ -19315,7 +19295,7 @@
                           <a:solidFill>
                             <a:srgbClr val="1E2226"/>
                           </a:solidFill>
-                          <a:latin typeface="Inter"/>
+                          <a:latin typeface="Arial"/>
                         </a:rPr>
                         <a:t>EBITDA (£m)</a:t>
                       </a:r>
@@ -19323,7 +19303,7 @@
                         <a:solidFill>
                           <a:srgbClr val="1E2226"/>
                         </a:solidFill>
-                        <a:latin typeface="Inter"/>
+                        <a:latin typeface="Arial"/>
                       </a:endParaRPr>
                     </a:p>
                   </a:txBody>
@@ -19356,7 +19336,7 @@
                           <a:solidFill>
                             <a:srgbClr val="1E2226"/>
                           </a:solidFill>
-                          <a:latin typeface="Inter"/>
+                          <a:latin typeface="Arial"/>
                         </a:rPr>
                         <a:t>Return (%)</a:t>
                       </a:r>
@@ -19364,7 +19344,7 @@
                         <a:solidFill>
                           <a:srgbClr val="1E2226"/>
                         </a:solidFill>
-                        <a:latin typeface="Inter"/>
+                        <a:latin typeface="Arial"/>
                       </a:endParaRPr>
                     </a:p>
                   </a:txBody>
@@ -19397,7 +19377,7 @@
                           <a:solidFill>
                             <a:srgbClr val="1E2226"/>
                           </a:solidFill>
-                          <a:latin typeface="Inter"/>
+                          <a:latin typeface="Arial"/>
                         </a:rPr>
                         <a:t>Capex (£m)</a:t>
                       </a:r>
@@ -19405,7 +19385,7 @@
                         <a:solidFill>
                           <a:srgbClr val="1E2226"/>
                         </a:solidFill>
-                        <a:latin typeface="Inter"/>
+                        <a:latin typeface="Arial"/>
                       </a:endParaRPr>
                     </a:p>
                   </a:txBody>
@@ -19438,7 +19418,7 @@
                           <a:solidFill>
                             <a:srgbClr val="1E2226"/>
                           </a:solidFill>
-                          <a:latin typeface="Inter"/>
+                          <a:latin typeface="Arial"/>
                         </a:rPr>
                         <a:t>2028 uplift (£m)</a:t>
                       </a:r>
@@ -19446,7 +19426,7 @@
                         <a:solidFill>
                           <a:srgbClr val="1E2226"/>
                         </a:solidFill>
-                        <a:latin typeface="Inter"/>
+                        <a:latin typeface="Arial"/>
                       </a:endParaRPr>
                     </a:p>
                   </a:txBody>
@@ -19481,7 +19461,7 @@
                           <a:solidFill>
                             <a:srgbClr val="1E2226"/>
                           </a:solidFill>
-                          <a:latin typeface="Inter"/>
+                          <a:latin typeface="Arial"/>
                         </a:rPr>
                         <a:t>Invest</a:t>
                       </a:r>
@@ -19489,7 +19469,7 @@
                         <a:solidFill>
                           <a:srgbClr val="1E2226"/>
                         </a:solidFill>
-                        <a:latin typeface="Inter"/>
+                        <a:latin typeface="Arial"/>
                       </a:endParaRPr>
                     </a:p>
                   </a:txBody>
@@ -19524,7 +19504,7 @@
                           <a:solidFill>
                             <a:srgbClr val="1E2226"/>
                           </a:solidFill>
-                          <a:latin typeface="Inter"/>
+                          <a:latin typeface="Arial"/>
                         </a:rPr>
                         <a:t>≥12%, growing</a:t>
                       </a:r>
@@ -19532,7 +19512,7 @@
                         <a:solidFill>
                           <a:srgbClr val="1E2226"/>
                         </a:solidFill>
-                        <a:latin typeface="Inter"/>
+                        <a:latin typeface="Arial"/>
                       </a:endParaRPr>
                     </a:p>
                   </a:txBody>
@@ -19567,7 +19547,7 @@
                           <a:solidFill>
                             <a:srgbClr val="1E2226"/>
                           </a:solidFill>
-                          <a:latin typeface="Inter"/>
+                          <a:latin typeface="Arial"/>
                         </a:rPr>
                         <a:t>66</a:t>
                       </a:r>
@@ -19575,7 +19555,7 @@
                         <a:solidFill>
                           <a:srgbClr val="1E2226"/>
                         </a:solidFill>
-                        <a:latin typeface="Inter"/>
+                        <a:latin typeface="Arial"/>
                       </a:endParaRPr>
                     </a:p>
                   </a:txBody>
@@ -19610,7 +19590,7 @@
                           <a:solidFill>
                             <a:srgbClr val="1E2226"/>
                           </a:solidFill>
-                          <a:latin typeface="Inter"/>
+                          <a:latin typeface="Arial"/>
                         </a:rPr>
                         <a:t>16</a:t>
                       </a:r>
@@ -19618,7 +19598,7 @@
                         <a:solidFill>
                           <a:srgbClr val="1E2226"/>
                         </a:solidFill>
-                        <a:latin typeface="Inter"/>
+                        <a:latin typeface="Arial"/>
                       </a:endParaRPr>
                     </a:p>
                   </a:txBody>
@@ -19653,7 +19633,7 @@
                           <a:solidFill>
                             <a:srgbClr val="1E2226"/>
                           </a:solidFill>
-                          <a:latin typeface="Inter"/>
+                          <a:latin typeface="Arial"/>
                         </a:rPr>
                         <a:t>500</a:t>
                       </a:r>
@@ -19661,7 +19641,7 @@
                         <a:solidFill>
                           <a:srgbClr val="1E2226"/>
                         </a:solidFill>
-                        <a:latin typeface="Inter"/>
+                        <a:latin typeface="Arial"/>
                       </a:endParaRPr>
                     </a:p>
                   </a:txBody>
@@ -19696,7 +19676,7 @@
                           <a:solidFill>
                             <a:srgbClr val="1E2226"/>
                           </a:solidFill>
-                          <a:latin typeface="Inter"/>
+                          <a:latin typeface="Arial"/>
                         </a:rPr>
                         <a:t>50.6</a:t>
                       </a:r>
@@ -19704,7 +19684,7 @@
                         <a:solidFill>
                           <a:srgbClr val="1E2226"/>
                         </a:solidFill>
-                        <a:latin typeface="Inter"/>
+                        <a:latin typeface="Arial"/>
                       </a:endParaRPr>
                     </a:p>
                   </a:txBody>
@@ -19739,7 +19719,7 @@
                           <a:solidFill>
                             <a:srgbClr val="1E2226"/>
                           </a:solidFill>
-                          <a:latin typeface="Inter"/>
+                          <a:latin typeface="Arial"/>
                         </a:rPr>
                         <a:t>16.7</a:t>
                       </a:r>
@@ -19747,7 +19727,7 @@
                         <a:solidFill>
                           <a:srgbClr val="1E2226"/>
                         </a:solidFill>
-                        <a:latin typeface="Inter"/>
+                        <a:latin typeface="Arial"/>
                       </a:endParaRPr>
                     </a:p>
                   </a:txBody>
@@ -19782,7 +19762,7 @@
                           <a:solidFill>
                             <a:srgbClr val="1E2226"/>
                           </a:solidFill>
-                          <a:latin typeface="Inter"/>
+                          <a:latin typeface="Arial"/>
                         </a:rPr>
                         <a:t>NA</a:t>
                       </a:r>
@@ -19790,7 +19770,7 @@
                         <a:solidFill>
                           <a:srgbClr val="1E2226"/>
                         </a:solidFill>
-                        <a:latin typeface="Inter"/>
+                        <a:latin typeface="Arial"/>
                       </a:endParaRPr>
                     </a:p>
                   </a:txBody>
@@ -19825,7 +19805,7 @@
                           <a:solidFill>
                             <a:srgbClr val="1E2226"/>
                           </a:solidFill>
-                          <a:latin typeface="Inter"/>
+                          <a:latin typeface="Arial"/>
                         </a:rPr>
                         <a:t>NA</a:t>
                       </a:r>
@@ -19833,7 +19813,7 @@
                         <a:solidFill>
                           <a:srgbClr val="1E2226"/>
                         </a:solidFill>
-                        <a:latin typeface="Inter"/>
+                        <a:latin typeface="Arial"/>
                       </a:endParaRPr>
                     </a:p>
                   </a:txBody>
@@ -19870,7 +19850,7 @@
                           <a:solidFill>
                             <a:srgbClr val="1E2226"/>
                           </a:solidFill>
-                          <a:latin typeface="Inter"/>
+                          <a:latin typeface="Arial"/>
                         </a:rPr>
                         <a:t>Keep</a:t>
                       </a:r>
@@ -19878,7 +19858,7 @@
                         <a:solidFill>
                           <a:srgbClr val="1E2226"/>
                         </a:solidFill>
-                        <a:latin typeface="Inter"/>
+                        <a:latin typeface="Arial"/>
                       </a:endParaRPr>
                     </a:p>
                   </a:txBody>
@@ -19913,7 +19893,7 @@
                           <a:solidFill>
                             <a:srgbClr val="1E2226"/>
                           </a:solidFill>
-                          <a:latin typeface="Inter"/>
+                          <a:latin typeface="Arial"/>
                         </a:rPr>
                         <a:t>≥12%, flat</a:t>
                       </a:r>
@@ -19921,7 +19901,7 @@
                         <a:solidFill>
                           <a:srgbClr val="1E2226"/>
                         </a:solidFill>
-                        <a:latin typeface="Inter"/>
+                        <a:latin typeface="Arial"/>
                       </a:endParaRPr>
                     </a:p>
                   </a:txBody>
@@ -19956,7 +19936,7 @@
                           <a:solidFill>
                             <a:srgbClr val="1E2226"/>
                           </a:solidFill>
-                          <a:latin typeface="Inter"/>
+                          <a:latin typeface="Arial"/>
                         </a:rPr>
                         <a:t>20</a:t>
                       </a:r>
@@ -19964,7 +19944,7 @@
                         <a:solidFill>
                           <a:srgbClr val="1E2226"/>
                         </a:solidFill>
-                        <a:latin typeface="Inter"/>
+                        <a:latin typeface="Arial"/>
                       </a:endParaRPr>
                     </a:p>
                   </a:txBody>
@@ -19999,7 +19979,7 @@
                           <a:solidFill>
                             <a:srgbClr val="1E2226"/>
                           </a:solidFill>
-                          <a:latin typeface="Inter"/>
+                          <a:latin typeface="Arial"/>
                         </a:rPr>
                         <a:t>14</a:t>
                       </a:r>
@@ -20007,7 +19987,7 @@
                         <a:solidFill>
                           <a:srgbClr val="1E2226"/>
                         </a:solidFill>
-                        <a:latin typeface="Inter"/>
+                        <a:latin typeface="Arial"/>
                       </a:endParaRPr>
                     </a:p>
                   </a:txBody>
@@ -20042,7 +20022,7 @@
                           <a:solidFill>
                             <a:srgbClr val="1E2226"/>
                           </a:solidFill>
-                          <a:latin typeface="Inter"/>
+                          <a:latin typeface="Arial"/>
                         </a:rPr>
                         <a:t>287</a:t>
                       </a:r>
@@ -20050,7 +20030,7 @@
                         <a:solidFill>
                           <a:srgbClr val="1E2226"/>
                         </a:solidFill>
-                        <a:latin typeface="Inter"/>
+                        <a:latin typeface="Arial"/>
                       </a:endParaRPr>
                     </a:p>
                   </a:txBody>
@@ -20085,7 +20065,7 @@
                           <a:solidFill>
                             <a:srgbClr val="1E2226"/>
                           </a:solidFill>
-                          <a:latin typeface="Inter"/>
+                          <a:latin typeface="Arial"/>
                         </a:rPr>
                         <a:t>30.3</a:t>
                       </a:r>
@@ -20093,7 +20073,7 @@
                         <a:solidFill>
                           <a:srgbClr val="1E2226"/>
                         </a:solidFill>
-                        <a:latin typeface="Inter"/>
+                        <a:latin typeface="Arial"/>
                       </a:endParaRPr>
                     </a:p>
                   </a:txBody>
@@ -20128,7 +20108,7 @@
                           <a:solidFill>
                             <a:srgbClr val="1E2226"/>
                           </a:solidFill>
-                          <a:latin typeface="Inter"/>
+                          <a:latin typeface="Arial"/>
                         </a:rPr>
                         <a:t>14.1</a:t>
                       </a:r>
@@ -20136,7 +20116,7 @@
                         <a:solidFill>
                           <a:srgbClr val="1E2226"/>
                         </a:solidFill>
-                        <a:latin typeface="Inter"/>
+                        <a:latin typeface="Arial"/>
                       </a:endParaRPr>
                     </a:p>
                   </a:txBody>
@@ -20171,7 +20151,7 @@
                           <a:solidFill>
                             <a:srgbClr val="1E2226"/>
                           </a:solidFill>
-                          <a:latin typeface="Inter"/>
+                          <a:latin typeface="Arial"/>
                         </a:rPr>
                         <a:t>NA</a:t>
                       </a:r>
@@ -20179,7 +20159,7 @@
                         <a:solidFill>
                           <a:srgbClr val="1E2226"/>
                         </a:solidFill>
-                        <a:latin typeface="Inter"/>
+                        <a:latin typeface="Arial"/>
                       </a:endParaRPr>
                     </a:p>
                   </a:txBody>
@@ -20214,7 +20194,7 @@
                           <a:solidFill>
                             <a:srgbClr val="1E2226"/>
                           </a:solidFill>
-                          <a:latin typeface="Inter"/>
+                          <a:latin typeface="Arial"/>
                         </a:rPr>
                         <a:t>NA</a:t>
                       </a:r>
@@ -20222,7 +20202,7 @@
                         <a:solidFill>
                           <a:srgbClr val="1E2226"/>
                         </a:solidFill>
-                        <a:latin typeface="Inter"/>
+                        <a:latin typeface="Arial"/>
                       </a:endParaRPr>
                     </a:p>
                   </a:txBody>
@@ -20259,7 +20239,7 @@
                           <a:solidFill>
                             <a:srgbClr val="C24E26"/>
                           </a:solidFill>
-                          <a:latin typeface="Inter"/>
+                          <a:latin typeface="Arial"/>
                         </a:rPr>
                         <a:t>Reformat</a:t>
                       </a:r>
@@ -20267,7 +20247,7 @@
                         <a:solidFill>
                           <a:srgbClr val="C24E26"/>
                         </a:solidFill>
-                        <a:latin typeface="Inter"/>
+                        <a:latin typeface="Arial"/>
                       </a:endParaRPr>
                     </a:p>
                   </a:txBody>
@@ -20302,7 +20282,7 @@
                           <a:solidFill>
                             <a:srgbClr val="1E2226"/>
                           </a:solidFill>
-                          <a:latin typeface="Inter"/>
+                          <a:latin typeface="Arial"/>
                         </a:rPr>
                         <a:t>&lt;12%, growing</a:t>
                       </a:r>
@@ -20310,7 +20290,7 @@
                         <a:solidFill>
                           <a:srgbClr val="1E2226"/>
                         </a:solidFill>
-                        <a:latin typeface="Inter"/>
+                        <a:latin typeface="Arial"/>
                       </a:endParaRPr>
                     </a:p>
                   </a:txBody>
@@ -20345,7 +20325,7 @@
                           <a:solidFill>
                             <a:srgbClr val="1E2226"/>
                           </a:solidFill>
-                          <a:latin typeface="Inter"/>
+                          <a:latin typeface="Arial"/>
                         </a:rPr>
                         <a:t>64</a:t>
                       </a:r>
@@ -20353,7 +20333,7 @@
                         <a:solidFill>
                           <a:srgbClr val="1E2226"/>
                         </a:solidFill>
-                        <a:latin typeface="Inter"/>
+                        <a:latin typeface="Arial"/>
                       </a:endParaRPr>
                     </a:p>
                   </a:txBody>
@@ -20388,7 +20368,7 @@
                           <a:solidFill>
                             <a:srgbClr val="1E2226"/>
                           </a:solidFill>
-                          <a:latin typeface="Inter"/>
+                          <a:latin typeface="Arial"/>
                         </a:rPr>
                         <a:t>61</a:t>
                       </a:r>
@@ -20396,7 +20376,7 @@
                         <a:solidFill>
                           <a:srgbClr val="1E2226"/>
                         </a:solidFill>
-                        <a:latin typeface="Inter"/>
+                        <a:latin typeface="Arial"/>
                       </a:endParaRPr>
                     </a:p>
                   </a:txBody>
@@ -20431,7 +20411,7 @@
                           <a:solidFill>
                             <a:srgbClr val="1E2226"/>
                           </a:solidFill>
-                          <a:latin typeface="Inter"/>
+                          <a:latin typeface="Arial"/>
                         </a:rPr>
                         <a:t>1,386</a:t>
                       </a:r>
@@ -20439,7 +20419,7 @@
                         <a:solidFill>
                           <a:srgbClr val="1E2226"/>
                         </a:solidFill>
-                        <a:latin typeface="Inter"/>
+                        <a:latin typeface="Arial"/>
                       </a:endParaRPr>
                     </a:p>
                   </a:txBody>
@@ -20474,7 +20454,7 @@
                           <a:solidFill>
                             <a:srgbClr val="1E2226"/>
                           </a:solidFill>
-                          <a:latin typeface="Inter"/>
+                          <a:latin typeface="Arial"/>
                         </a:rPr>
                         <a:t>72.7</a:t>
                       </a:r>
@@ -20482,7 +20462,7 @@
                         <a:solidFill>
                           <a:srgbClr val="1E2226"/>
                         </a:solidFill>
-                        <a:latin typeface="Inter"/>
+                        <a:latin typeface="Arial"/>
                       </a:endParaRPr>
                     </a:p>
                   </a:txBody>
@@ -20517,7 +20497,7 @@
                           <a:solidFill>
                             <a:srgbClr val="1E2226"/>
                           </a:solidFill>
-                          <a:latin typeface="Inter"/>
+                          <a:latin typeface="Arial"/>
                         </a:rPr>
                         <a:t>6.7</a:t>
                       </a:r>
@@ -20525,7 +20505,7 @@
                         <a:solidFill>
                           <a:srgbClr val="1E2226"/>
                         </a:solidFill>
-                        <a:latin typeface="Inter"/>
+                        <a:latin typeface="Arial"/>
                       </a:endParaRPr>
                     </a:p>
                   </a:txBody>
@@ -20560,7 +20540,7 @@
                           <a:solidFill>
                             <a:srgbClr val="1E2226"/>
                           </a:solidFill>
-                          <a:latin typeface="Inter"/>
+                          <a:latin typeface="Arial"/>
                         </a:rPr>
                         <a:t>222.0</a:t>
                       </a:r>
@@ -20568,7 +20548,7 @@
                         <a:solidFill>
                           <a:srgbClr val="1E2226"/>
                         </a:solidFill>
-                        <a:latin typeface="Inter"/>
+                        <a:latin typeface="Arial"/>
                       </a:endParaRPr>
                     </a:p>
                   </a:txBody>
@@ -20603,7 +20583,7 @@
                           <a:solidFill>
                             <a:srgbClr val="1E2226"/>
                           </a:solidFill>
-                          <a:latin typeface="Inter"/>
+                          <a:latin typeface="Arial"/>
                         </a:rPr>
                         <a:t>57.5</a:t>
                       </a:r>
@@ -20611,7 +20591,7 @@
                         <a:solidFill>
                           <a:srgbClr val="1E2226"/>
                         </a:solidFill>
-                        <a:latin typeface="Inter"/>
+                        <a:latin typeface="Arial"/>
                       </a:endParaRPr>
                     </a:p>
                   </a:txBody>
@@ -20648,7 +20628,7 @@
                           <a:solidFill>
                             <a:srgbClr val="C24E26"/>
                           </a:solidFill>
-                          <a:latin typeface="Inter"/>
+                          <a:latin typeface="Arial"/>
                         </a:rPr>
                         <a:t>Right-size</a:t>
                       </a:r>
@@ -20656,7 +20636,7 @@
                         <a:solidFill>
                           <a:srgbClr val="C24E26"/>
                         </a:solidFill>
-                        <a:latin typeface="Inter"/>
+                        <a:latin typeface="Arial"/>
                       </a:endParaRPr>
                     </a:p>
                   </a:txBody>
@@ -20691,7 +20671,7 @@
                           <a:solidFill>
                             <a:srgbClr val="1E2226"/>
                           </a:solidFill>
-                          <a:latin typeface="Inter"/>
+                          <a:latin typeface="Arial"/>
                         </a:rPr>
                         <a:t>&lt;12%, flat</a:t>
                       </a:r>
@@ -20699,7 +20679,7 @@
                         <a:solidFill>
                           <a:srgbClr val="1E2226"/>
                         </a:solidFill>
-                        <a:latin typeface="Inter"/>
+                        <a:latin typeface="Arial"/>
                       </a:endParaRPr>
                     </a:p>
                   </a:txBody>
@@ -20734,7 +20714,7 @@
                           <a:solidFill>
                             <a:srgbClr val="1E2226"/>
                           </a:solidFill>
-                          <a:latin typeface="Inter"/>
+                          <a:latin typeface="Arial"/>
                         </a:rPr>
                         <a:t>49</a:t>
                       </a:r>
@@ -20742,7 +20722,7 @@
                         <a:solidFill>
                           <a:srgbClr val="1E2226"/>
                         </a:solidFill>
-                        <a:latin typeface="Inter"/>
+                        <a:latin typeface="Arial"/>
                       </a:endParaRPr>
                     </a:p>
                   </a:txBody>
@@ -20777,7 +20757,7 @@
                           <a:solidFill>
                             <a:srgbClr val="1E2226"/>
                           </a:solidFill>
-                          <a:latin typeface="Inter"/>
+                          <a:latin typeface="Arial"/>
                         </a:rPr>
                         <a:t>48</a:t>
                       </a:r>
@@ -20785,7 +20765,7 @@
                         <a:solidFill>
                           <a:srgbClr val="1E2226"/>
                         </a:solidFill>
-                        <a:latin typeface="Inter"/>
+                        <a:latin typeface="Arial"/>
                       </a:endParaRPr>
                     </a:p>
                   </a:txBody>
@@ -20820,7 +20800,7 @@
                           <a:solidFill>
                             <a:srgbClr val="1E2226"/>
                           </a:solidFill>
-                          <a:latin typeface="Inter"/>
+                          <a:latin typeface="Arial"/>
                         </a:rPr>
                         <a:t>1,207</a:t>
                       </a:r>
@@ -20828,7 +20808,7 @@
                         <a:solidFill>
                           <a:srgbClr val="1E2226"/>
                         </a:solidFill>
-                        <a:latin typeface="Inter"/>
+                        <a:latin typeface="Arial"/>
                       </a:endParaRPr>
                     </a:p>
                   </a:txBody>
@@ -20863,7 +20843,7 @@
                           <a:solidFill>
                             <a:srgbClr val="1E2226"/>
                           </a:solidFill>
-                          <a:latin typeface="Inter"/>
+                          <a:latin typeface="Arial"/>
                         </a:rPr>
                         <a:t>73.2</a:t>
                       </a:r>
@@ -20871,7 +20851,7 @@
                         <a:solidFill>
                           <a:srgbClr val="1E2226"/>
                         </a:solidFill>
-                        <a:latin typeface="Inter"/>
+                        <a:latin typeface="Arial"/>
                       </a:endParaRPr>
                     </a:p>
                   </a:txBody>
@@ -20906,7 +20886,7 @@
                           <a:solidFill>
                             <a:srgbClr val="1E2226"/>
                           </a:solidFill>
-                          <a:latin typeface="Inter"/>
+                          <a:latin typeface="Arial"/>
                         </a:rPr>
                         <a:t>7.3</a:t>
                       </a:r>
@@ -20914,7 +20894,7 @@
                         <a:solidFill>
                           <a:srgbClr val="1E2226"/>
                         </a:solidFill>
-                        <a:latin typeface="Inter"/>
+                        <a:latin typeface="Arial"/>
                       </a:endParaRPr>
                     </a:p>
                   </a:txBody>
@@ -20949,7 +20929,7 @@
                           <a:solidFill>
                             <a:srgbClr val="1E2226"/>
                           </a:solidFill>
-                          <a:latin typeface="Inter"/>
+                          <a:latin typeface="Arial"/>
                         </a:rPr>
                         <a:t>39.2</a:t>
                       </a:r>
@@ -20957,7 +20937,7 @@
                         <a:solidFill>
                           <a:srgbClr val="1E2226"/>
                         </a:solidFill>
-                        <a:latin typeface="Inter"/>
+                        <a:latin typeface="Arial"/>
                       </a:endParaRPr>
                     </a:p>
                   </a:txBody>
@@ -20992,7 +20972,7 @@
                           <a:solidFill>
                             <a:srgbClr val="1E2226"/>
                           </a:solidFill>
-                          <a:latin typeface="Inter"/>
+                          <a:latin typeface="Arial"/>
                         </a:rPr>
                         <a:t>19.3</a:t>
                       </a:r>
@@ -21000,7 +20980,7 @@
                         <a:solidFill>
                           <a:srgbClr val="1E2226"/>
                         </a:solidFill>
-                        <a:latin typeface="Inter"/>
+                        <a:latin typeface="Arial"/>
                       </a:endParaRPr>
                     </a:p>
                   </a:txBody>
@@ -21037,7 +21017,7 @@
                           <a:solidFill>
                             <a:srgbClr val="1E2226"/>
                           </a:solidFill>
-                          <a:latin typeface="Inter"/>
+                          <a:latin typeface="Arial"/>
                         </a:rPr>
                         <a:t>Exit</a:t>
                       </a:r>
@@ -21045,7 +21025,7 @@
                         <a:solidFill>
                           <a:srgbClr val="1E2226"/>
                         </a:solidFill>
-                        <a:latin typeface="Inter"/>
+                        <a:latin typeface="Arial"/>
                       </a:endParaRPr>
                     </a:p>
                   </a:txBody>
@@ -21080,7 +21060,7 @@
                           <a:solidFill>
                             <a:srgbClr val="1E2226"/>
                           </a:solidFill>
-                          <a:latin typeface="Inter"/>
+                          <a:latin typeface="Arial"/>
                         </a:rPr>
                         <a:t>&lt;3%, flat</a:t>
                       </a:r>
@@ -21088,7 +21068,7 @@
                         <a:solidFill>
                           <a:srgbClr val="1E2226"/>
                         </a:solidFill>
-                        <a:latin typeface="Inter"/>
+                        <a:latin typeface="Arial"/>
                       </a:endParaRPr>
                     </a:p>
                   </a:txBody>
@@ -21123,7 +21103,7 @@
                           <a:solidFill>
                             <a:srgbClr val="1E2226"/>
                           </a:solidFill>
-                          <a:latin typeface="Inter"/>
+                          <a:latin typeface="Arial"/>
                         </a:rPr>
                         <a:t>15</a:t>
                       </a:r>
@@ -21131,7 +21111,7 @@
                         <a:solidFill>
                           <a:srgbClr val="1E2226"/>
                         </a:solidFill>
-                        <a:latin typeface="Inter"/>
+                        <a:latin typeface="Arial"/>
                       </a:endParaRPr>
                     </a:p>
                   </a:txBody>
@@ -21166,7 +21146,7 @@
                           <a:solidFill>
                             <a:srgbClr val="1E2226"/>
                           </a:solidFill>
-                          <a:latin typeface="Inter"/>
+                          <a:latin typeface="Arial"/>
                         </a:rPr>
                         <a:t>15</a:t>
                       </a:r>
@@ -21174,7 +21154,7 @@
                         <a:solidFill>
                           <a:srgbClr val="1E2226"/>
                         </a:solidFill>
-                        <a:latin typeface="Inter"/>
+                        <a:latin typeface="Arial"/>
                       </a:endParaRPr>
                     </a:p>
                   </a:txBody>
@@ -21209,7 +21189,7 @@
                           <a:solidFill>
                             <a:srgbClr val="1E2226"/>
                           </a:solidFill>
-                          <a:latin typeface="Inter"/>
+                          <a:latin typeface="Arial"/>
                         </a:rPr>
                         <a:t>510</a:t>
                       </a:r>
@@ -21217,7 +21197,7 @@
                         <a:solidFill>
                           <a:srgbClr val="1E2226"/>
                         </a:solidFill>
-                        <a:latin typeface="Inter"/>
+                        <a:latin typeface="Arial"/>
                       </a:endParaRPr>
                     </a:p>
                   </a:txBody>
@@ -21252,7 +21232,7 @@
                           <a:solidFill>
                             <a:srgbClr val="1E2226"/>
                           </a:solidFill>
-                          <a:latin typeface="Inter"/>
+                          <a:latin typeface="Arial"/>
                         </a:rPr>
                         <a:t>0.6</a:t>
                       </a:r>
@@ -21260,7 +21240,7 @@
                         <a:solidFill>
                           <a:srgbClr val="1E2226"/>
                         </a:solidFill>
-                        <a:latin typeface="Inter"/>
+                        <a:latin typeface="Arial"/>
                       </a:endParaRPr>
                     </a:p>
                   </a:txBody>
@@ -21295,7 +21275,7 @@
                           <a:solidFill>
                             <a:srgbClr val="1E2226"/>
                           </a:solidFill>
-                          <a:latin typeface="Inter"/>
+                          <a:latin typeface="Arial"/>
                         </a:rPr>
                         <a:t>0.1</a:t>
                       </a:r>
@@ -21303,7 +21283,7 @@
                         <a:solidFill>
                           <a:srgbClr val="1E2226"/>
                         </a:solidFill>
-                        <a:latin typeface="Inter"/>
+                        <a:latin typeface="Arial"/>
                       </a:endParaRPr>
                     </a:p>
                   </a:txBody>
@@ -21338,7 +21318,7 @@
                           <a:solidFill>
                             <a:srgbClr val="1E2226"/>
                           </a:solidFill>
-                          <a:latin typeface="Inter"/>
+                          <a:latin typeface="Arial"/>
                         </a:rPr>
                         <a:t>36.0</a:t>
                       </a:r>
@@ -21346,7 +21326,7 @@
                         <a:solidFill>
                           <a:srgbClr val="1E2226"/>
                         </a:solidFill>
-                        <a:latin typeface="Inter"/>
+                        <a:latin typeface="Arial"/>
                       </a:endParaRPr>
                     </a:p>
                   </a:txBody>
@@ -21381,7 +21361,7 @@
                           <a:solidFill>
                             <a:srgbClr val="1E2226"/>
                           </a:solidFill>
-                          <a:latin typeface="Inter"/>
+                          <a:latin typeface="Arial"/>
                         </a:rPr>
                         <a:t>11.8</a:t>
                       </a:r>
@@ -21389,7 +21369,7 @@
                         <a:solidFill>
                           <a:srgbClr val="1E2226"/>
                         </a:solidFill>
-                        <a:latin typeface="Inter"/>
+                        <a:latin typeface="Arial"/>
                       </a:endParaRPr>
                     </a:p>
                   </a:txBody>
@@ -21426,7 +21406,7 @@
                           <a:solidFill>
                             <a:srgbClr val="1E2226"/>
                           </a:solidFill>
-                          <a:latin typeface="Inter"/>
+                          <a:latin typeface="Arial"/>
                         </a:rPr>
                         <a:t>Estate</a:t>
                       </a:r>
@@ -21434,7 +21414,7 @@
                         <a:solidFill>
                           <a:srgbClr val="1E2226"/>
                         </a:solidFill>
-                        <a:latin typeface="Inter"/>
+                        <a:latin typeface="Arial"/>
                       </a:endParaRPr>
                     </a:p>
                   </a:txBody>
@@ -21468,7 +21448,7 @@
                         <a:solidFill>
                           <a:srgbClr val="1E2226"/>
                         </a:solidFill>
-                        <a:latin typeface="Inter"/>
+                        <a:latin typeface="Arial"/>
                       </a:endParaRPr>
                     </a:p>
                   </a:txBody>
@@ -21503,7 +21483,7 @@
                           <a:solidFill>
                             <a:srgbClr val="1E2226"/>
                           </a:solidFill>
-                          <a:latin typeface="Inter"/>
+                          <a:latin typeface="Arial"/>
                         </a:rPr>
                         <a:t>214</a:t>
                       </a:r>
@@ -21511,7 +21491,7 @@
                         <a:solidFill>
                           <a:srgbClr val="1E2226"/>
                         </a:solidFill>
-                        <a:latin typeface="Inter"/>
+                        <a:latin typeface="Arial"/>
                       </a:endParaRPr>
                     </a:p>
                   </a:txBody>
@@ -21546,7 +21526,7 @@
                           <a:solidFill>
                             <a:srgbClr val="1E2226"/>
                           </a:solidFill>
-                          <a:latin typeface="Inter"/>
+                          <a:latin typeface="Arial"/>
                         </a:rPr>
                         <a:t>154</a:t>
                       </a:r>
@@ -21554,7 +21534,7 @@
                         <a:solidFill>
                           <a:srgbClr val="1E2226"/>
                         </a:solidFill>
-                        <a:latin typeface="Inter"/>
+                        <a:latin typeface="Arial"/>
                       </a:endParaRPr>
                     </a:p>
                   </a:txBody>
@@ -21589,7 +21569,7 @@
                           <a:solidFill>
                             <a:srgbClr val="1E2226"/>
                           </a:solidFill>
-                          <a:latin typeface="Inter"/>
+                          <a:latin typeface="Arial"/>
                         </a:rPr>
                         <a:t>3,890</a:t>
                       </a:r>
@@ -21597,7 +21577,7 @@
                         <a:solidFill>
                           <a:srgbClr val="1E2226"/>
                         </a:solidFill>
-                        <a:latin typeface="Inter"/>
+                        <a:latin typeface="Arial"/>
                       </a:endParaRPr>
                     </a:p>
                   </a:txBody>
@@ -21632,7 +21612,7 @@
                           <a:solidFill>
                             <a:srgbClr val="1E2226"/>
                           </a:solidFill>
-                          <a:latin typeface="Inter"/>
+                          <a:latin typeface="Arial"/>
                         </a:rPr>
                         <a:t>227.4</a:t>
                       </a:r>
@@ -21640,7 +21620,7 @@
                         <a:solidFill>
                           <a:srgbClr val="1E2226"/>
                         </a:solidFill>
-                        <a:latin typeface="Inter"/>
+                        <a:latin typeface="Arial"/>
                       </a:endParaRPr>
                     </a:p>
                   </a:txBody>
@@ -21675,7 +21655,7 @@
                           <a:solidFill>
                             <a:srgbClr val="1E2226"/>
                           </a:solidFill>
-                          <a:latin typeface="Inter"/>
+                          <a:latin typeface="Arial"/>
                         </a:rPr>
                         <a:t>7.6</a:t>
                       </a:r>
@@ -21683,7 +21663,7 @@
                         <a:solidFill>
                           <a:srgbClr val="1E2226"/>
                         </a:solidFill>
-                        <a:latin typeface="Inter"/>
+                        <a:latin typeface="Arial"/>
                       </a:endParaRPr>
                     </a:p>
                   </a:txBody>
@@ -21718,7 +21698,7 @@
                           <a:solidFill>
                             <a:srgbClr val="1E2226"/>
                           </a:solidFill>
-                          <a:latin typeface="Inter"/>
+                          <a:latin typeface="Arial"/>
                         </a:rPr>
                         <a:t>297.2</a:t>
                       </a:r>
@@ -21726,7 +21706,7 @@
                         <a:solidFill>
                           <a:srgbClr val="1E2226"/>
                         </a:solidFill>
-                        <a:latin typeface="Inter"/>
+                        <a:latin typeface="Arial"/>
                       </a:endParaRPr>
                     </a:p>
                   </a:txBody>
@@ -21761,7 +21741,7 @@
                           <a:solidFill>
                             <a:srgbClr val="1E2226"/>
                           </a:solidFill>
-                          <a:latin typeface="Inter"/>
+                          <a:latin typeface="Arial"/>
                         </a:rPr>
                         <a:t>88.6</a:t>
                       </a:r>
@@ -21769,7 +21749,7 @@
                         <a:solidFill>
                           <a:srgbClr val="1E2226"/>
                         </a:solidFill>
-                        <a:latin typeface="Inter"/>
+                        <a:latin typeface="Arial"/>
                       </a:endParaRPr>
                     </a:p>
                   </a:txBody>
@@ -21806,8 +21786,8 @@
         </p:nvSpPr>
         <p:spPr>
           <a:xfrm>
-            <a:off x="6598920" y="3167634"/>
-            <a:ext cx="5181600" cy="3062478"/>
+            <a:off x="6598920" y="3045460"/>
+            <a:ext cx="5181600" cy="3184652"/>
           </a:xfrm>
           <a:prstGeom prst="rect">
             <a:avLst/>
@@ -21829,14 +21809,14 @@
       </p:sp>
       <p:sp>
         <p:nvSpPr>
-          <p:cNvPr id="13" name="side-t"/>
+          <p:cNvPr id="13" name="side-t1"/>
           <p:cNvSpPr/>
           <p:nvPr/>
         </p:nvSpPr>
         <p:spPr>
           <a:xfrm>
-            <a:off x="6708648" y="3277362"/>
-            <a:ext cx="4962144" cy="2376805"/>
+            <a:off x="6708648" y="3155188"/>
+            <a:ext cx="4962144" cy="501650"/>
           </a:xfrm>
           <a:prstGeom prst="rect">
             <a:avLst/>
@@ -21866,7 +21846,7 @@
                 <a:solidFill>
                   <a:srgbClr val="1F3A5F"/>
                 </a:solidFill>
-                <a:latin typeface="Inter"/>
+                <a:latin typeface="Arial"/>
               </a:rPr>
               <a:t>Reformat where demand is growing</a:t>
             </a:r>
@@ -21889,9 +21869,9 @@
                 <a:solidFill>
                   <a:srgbClr val="1E2226"/>
                 </a:solidFill>
-                <a:latin typeface="Inter"/>
+                <a:latin typeface="Arial"/>
               </a:rPr>
-              <a:t>64 stores, 20 of them superstores, give space back to fresh, food-to-go and click-and-</a:t>
+              <a:t>64 stores, 20 of them superstores, give space back to fresh, food-to-go and click-and-collect and</a:t>
             </a:r>
             <a:br/>
             <a:r>
@@ -21899,11 +21879,34 @@
                 <a:solidFill>
                   <a:srgbClr val="1E2226"/>
                 </a:solidFill>
-                <a:latin typeface="Inter"/>
+                <a:latin typeface="Arial"/>
               </a:rPr>
-              <a:t>collect and sublet the rest; capex £222m lifts them to a 10% return.</a:t>
+              <a:t>sublet the rest; capex £222m lifts them to a 10% return.</a:t>
             </a:r>
           </a:p>
+        </p:txBody>
+      </p:sp>
+      <p:sp>
+        <p:nvSpPr>
+          <p:cNvPr id="14" name="side-t2"/>
+          <p:cNvSpPr/>
+          <p:nvPr/>
+        </p:nvSpPr>
+        <p:spPr>
+          <a:xfrm>
+            <a:off x="6708648" y="3869658"/>
+            <a:ext cx="4962144" cy="370205"/>
+          </a:xfrm>
+          <a:prstGeom prst="rect">
+            <a:avLst/>
+          </a:prstGeom>
+          <a:noFill/>
+        </p:spPr>
+        <p:txBody>
+          <a:bodyPr wrap="square" lIns="0" tIns="0" rIns="0" bIns="0" anchor="t">
+            <a:noAutofit/>
+          </a:bodyPr>
+          <a:lstStyle/>
           <a:p>
             <a:pPr algn="l" marL="0" indent="0">
               <a:lnSpc>
@@ -21922,7 +21925,7 @@
                 <a:solidFill>
                   <a:srgbClr val="1F3A5F"/>
                 </a:solidFill>
-                <a:latin typeface="Inter"/>
+                <a:latin typeface="Arial"/>
               </a:rPr>
               <a:t>Right-size where it is not</a:t>
             </a:r>
@@ -21945,11 +21948,34 @@
                 <a:solidFill>
                   <a:srgbClr val="1E2226"/>
                 </a:solidFill>
-                <a:latin typeface="Inter"/>
+                <a:latin typeface="Arial"/>
               </a:rPr>
               <a:t>49 stores cut space and move to the leaner labour model; £39.2m of capex adds £19.3m.</a:t>
             </a:r>
           </a:p>
+        </p:txBody>
+      </p:sp>
+      <p:sp>
+        <p:nvSpPr>
+          <p:cNvPr id="15" name="side-t3"/>
+          <p:cNvSpPr/>
+          <p:nvPr/>
+        </p:nvSpPr>
+        <p:spPr>
+          <a:xfrm>
+            <a:off x="6708648" y="4452683"/>
+            <a:ext cx="4962144" cy="501650"/>
+          </a:xfrm>
+          <a:prstGeom prst="rect">
+            <a:avLst/>
+          </a:prstGeom>
+          <a:noFill/>
+        </p:spPr>
+        <p:txBody>
+          <a:bodyPr wrap="square" lIns="0" tIns="0" rIns="0" bIns="0" anchor="t">
+            <a:noAutofit/>
+          </a:bodyPr>
+          <a:lstStyle/>
           <a:p>
             <a:pPr algn="l" marL="0" indent="0">
               <a:lnSpc>
@@ -21968,7 +21994,7 @@
                 <a:solidFill>
                   <a:srgbClr val="1F3A5F"/>
                 </a:solidFill>
-                <a:latin typeface="Inter"/>
+                <a:latin typeface="Arial"/>
               </a:rPr>
               <a:t>Exit releases capital, not EBITDA</a:t>
             </a:r>
@@ -21991,9 +22017,9 @@
                 <a:solidFill>
                   <a:srgbClr val="1E2226"/>
                 </a:solidFill>
-                <a:latin typeface="Inter"/>
+                <a:latin typeface="Arial"/>
               </a:rPr>
-              <a:t>The 15 exits earn £0.6m on £408m of capital; 30% of their sales move to nearby stores,</a:t>
+              <a:t>The 15 exits earn £0.6m on £408m of capital; 30% of their sales move to nearby stores, worth</a:t>
             </a:r>
             <a:br/>
             <a:r>
@@ -22001,11 +22027,34 @@
                 <a:solidFill>
                   <a:srgbClr val="1E2226"/>
                 </a:solidFill>
-                <a:latin typeface="Inter"/>
+                <a:latin typeface="Arial"/>
               </a:rPr>
-              <a:t>worth £12.4m.</a:t>
+              <a:t>£12.4m.</a:t>
             </a:r>
           </a:p>
+        </p:txBody>
+      </p:sp>
+      <p:sp>
+        <p:nvSpPr>
+          <p:cNvPr id="16" name="side-t4"/>
+          <p:cNvSpPr/>
+          <p:nvPr/>
+        </p:nvSpPr>
+        <p:spPr>
+          <a:xfrm>
+            <a:off x="6708648" y="5167154"/>
+            <a:ext cx="4962144" cy="370205"/>
+          </a:xfrm>
+          <a:prstGeom prst="rect">
+            <a:avLst/>
+          </a:prstGeom>
+          <a:noFill/>
+        </p:spPr>
+        <p:txBody>
+          <a:bodyPr wrap="square" lIns="0" tIns="0" rIns="0" bIns="0" anchor="t">
+            <a:noAutofit/>
+          </a:bodyPr>
+          <a:lstStyle/>
           <a:p>
             <a:pPr algn="l" marL="0" indent="0">
               <a:lnSpc>
@@ -22024,7 +22073,7 @@
                 <a:solidFill>
                   <a:srgbClr val="1F3A5F"/>
                 </a:solidFill>
-                <a:latin typeface="Inter"/>
+                <a:latin typeface="Arial"/>
               </a:rPr>
               <a:t>Invest where return and demand meet</a:t>
             </a:r>
@@ -22047,21 +22096,34 @@
                 <a:solidFill>
                   <a:srgbClr val="1E2226"/>
                 </a:solidFill>
-                <a:latin typeface="Inter"/>
+                <a:latin typeface="Arial"/>
               </a:rPr>
-              <a:t>66 stores clear both lines, 50 of them neighbourhood or express: the model for the 30 new</a:t>
-            </a:r>
-            <a:br/>
-            <a:r>
-              <a:rPr sz="900" b="0" i="0">
-                <a:solidFill>
-                  <a:srgbClr val="1E2226"/>
-                </a:solidFill>
-                <a:latin typeface="Inter"/>
-              </a:rPr>
-              <a:t>stores.</a:t>
+              <a:t>66 stores clear both lines, 50 of them neighbourhood or express: the model for the 30 new stores.</a:t>
             </a:r>
           </a:p>
+        </p:txBody>
+      </p:sp>
+      <p:sp>
+        <p:nvSpPr>
+          <p:cNvPr id="17" name="side-t5"/>
+          <p:cNvSpPr/>
+          <p:nvPr/>
+        </p:nvSpPr>
+        <p:spPr>
+          <a:xfrm>
+            <a:off x="6708648" y="5750179"/>
+            <a:ext cx="4962144" cy="370205"/>
+          </a:xfrm>
+          <a:prstGeom prst="rect">
+            <a:avLst/>
+          </a:prstGeom>
+          <a:noFill/>
+        </p:spPr>
+        <p:txBody>
+          <a:bodyPr wrap="square" lIns="0" tIns="0" rIns="0" bIns="0" anchor="t">
+            <a:noAutofit/>
+          </a:bodyPr>
+          <a:lstStyle/>
           <a:p>
             <a:pPr algn="l" marL="0" indent="0">
               <a:lnSpc>
@@ -22080,7 +22142,7 @@
                 <a:solidFill>
                   <a:srgbClr val="1F3A5F"/>
                 </a:solidFill>
-                <a:latin typeface="Inter"/>
+                <a:latin typeface="Arial"/>
               </a:rPr>
               <a:t>The problem is the large stores</a:t>
             </a:r>
@@ -22103,26 +22165,16 @@
                 <a:solidFill>
                   <a:srgbClr val="1E2226"/>
                 </a:solidFill>
-                <a:latin typeface="Inter"/>
+                <a:latin typeface="Arial"/>
               </a:rPr>
-              <a:t>124 of the 128 stores under the hurdle are superstores or supermarkets; 4 are small</a:t>
-            </a:r>
-            <a:br/>
-            <a:r>
-              <a:rPr sz="900" b="0" i="0">
-                <a:solidFill>
-                  <a:srgbClr val="1E2226"/>
-                </a:solidFill>
-                <a:latin typeface="Inter"/>
-              </a:rPr>
-              <a:t>formats.</a:t>
+              <a:t>124 of the 128 stores under the hurdle are superstores or supermarkets; 4 are small formats.</a:t>
             </a:r>
           </a:p>
         </p:txBody>
       </p:sp>
       <p:sp>
         <p:nvSpPr>
-          <p:cNvPr id="14" name="source"/>
+          <p:cNvPr id="18" name="source"/>
           <p:cNvSpPr/>
           <p:nvPr/>
         </p:nvSpPr>
@@ -22159,7 +22211,7 @@
                 <a:solidFill>
                   <a:srgbClr val="5C6670"/>
                 </a:solidFill>
-                <a:latin typeface="Inter"/>
+                <a:latin typeface="Arial"/>
               </a:rPr>
               <a:t>Source: Brindle store P&amp;L, capital register and loyalty-card data, 2025; regional grocery market model; team analysis. All figures illustrative.</a:t>
             </a:r>
@@ -22168,7 +22220,7 @@
       </p:sp>
       <p:cxnSp>
         <p:nvCxnSpPr>
-          <p:cNvPr id="15" name="hurdle-line"/>
+          <p:cNvPr id="19" name="hurdle-line"/>
           <p:cNvCxnSpPr/>
           <p:nvPr/>
         </p:nvCxnSpPr>
@@ -22190,14 +22242,14 @@
       </p:cxnSp>
       <p:sp>
         <p:nvSpPr>
-          <p:cNvPr id="16" name="hurdle-label"/>
+          <p:cNvPr id="20" name="hurdle-label"/>
           <p:cNvSpPr/>
           <p:nvPr/>
         </p:nvSpPr>
         <p:spPr>
           <a:xfrm>
             <a:off x="5655259" y="3612261"/>
-            <a:ext cx="570343" cy="114300"/>
+            <a:ext cx="559227" cy="114300"/>
           </a:xfrm>
           <a:prstGeom prst="rect">
             <a:avLst/>
@@ -22227,7 +22279,7 @@
                 <a:solidFill>
                   <a:srgbClr val="1E2226"/>
                 </a:solidFill>
-                <a:latin typeface="Inter"/>
+                <a:latin typeface="Arial"/>
               </a:rPr>
               <a:t>Hurdle 12%</a:t>
             </a:r>
@@ -22236,7 +22288,7 @@
       </p:sp>
       <p:cxnSp>
         <p:nvCxnSpPr>
-          <p:cNvPr id="17" name="growth-cut-line"/>
+          <p:cNvPr id="21" name="growth-cut-line"/>
           <p:cNvCxnSpPr/>
           <p:nvPr/>
         </p:nvCxnSpPr>
@@ -22258,14 +22310,14 @@
       </p:cxnSp>
       <p:sp>
         <p:nvSpPr>
-          <p:cNvPr id="18" name="growth-cut-label"/>
+          <p:cNvPr id="22" name="growth-cut-label"/>
           <p:cNvSpPr/>
           <p:nvPr/>
         </p:nvSpPr>
         <p:spPr>
           <a:xfrm>
             <a:off x="3431574" y="1713967"/>
-            <a:ext cx="1157516" cy="114300"/>
+            <a:ext cx="1120123" cy="114300"/>
           </a:xfrm>
           <a:prstGeom prst="rect">
             <a:avLst/>
@@ -22295,7 +22347,7 @@
                 <a:solidFill>
                   <a:srgbClr val="1E2226"/>
                 </a:solidFill>
-                <a:latin typeface="Inter"/>
+                <a:latin typeface="Arial"/>
               </a:rPr>
               <a:t>Catchment growth 1.5%</a:t>
             </a:r>
@@ -22304,7 +22356,7 @@
       </p:sp>
       <p:sp>
         <p:nvSpPr>
-          <p:cNvPr id="19" name="q-invest-mark"/>
+          <p:cNvPr id="23" name="q-invest-mark"/>
           <p:cNvSpPr/>
           <p:nvPr/>
         </p:nvSpPr>
@@ -22333,14 +22385,14 @@
       </p:sp>
       <p:sp>
         <p:nvSpPr>
-          <p:cNvPr id="20" name="q-invest-label"/>
+          <p:cNvPr id="24" name="q-invest-label"/>
           <p:cNvSpPr/>
           <p:nvPr/>
         </p:nvSpPr>
         <p:spPr>
           <a:xfrm>
-            <a:off x="5059364" y="1784738"/>
-            <a:ext cx="595895" cy="200660"/>
+            <a:off x="5087493" y="1784738"/>
+            <a:ext cx="567766" cy="200660"/>
           </a:xfrm>
           <a:prstGeom prst="rect">
             <a:avLst/>
@@ -22370,7 +22422,7 @@
                 <a:solidFill>
                   <a:srgbClr val="1F3A5F"/>
                 </a:solidFill>
-                <a:latin typeface="Inter"/>
+                <a:latin typeface="Arial"/>
               </a:rPr>
               <a:t>Invest: 66</a:t>
             </a:r>
@@ -22379,7 +22431,7 @@
       </p:sp>
       <p:sp>
         <p:nvSpPr>
-          <p:cNvPr id="21" name="q-keep-mark"/>
+          <p:cNvPr id="25" name="q-keep-mark"/>
           <p:cNvSpPr/>
           <p:nvPr/>
         </p:nvSpPr>
@@ -22408,14 +22460,14 @@
       </p:sp>
       <p:sp>
         <p:nvSpPr>
-          <p:cNvPr id="22" name="q-keep-label"/>
+          <p:cNvPr id="26" name="q-keep-label"/>
           <p:cNvSpPr/>
           <p:nvPr/>
         </p:nvSpPr>
         <p:spPr>
           <a:xfrm>
             <a:off x="888187" y="1784738"/>
-            <a:ext cx="540698" cy="200660"/>
+            <a:ext cx="516923" cy="200660"/>
           </a:xfrm>
           <a:prstGeom prst="rect">
             <a:avLst/>
@@ -22445,7 +22497,7 @@
                 <a:solidFill>
                   <a:srgbClr val="1F3A5F"/>
                 </a:solidFill>
-                <a:latin typeface="Inter"/>
+                <a:latin typeface="Arial"/>
               </a:rPr>
               <a:t>Keep: 20</a:t>
             </a:r>
@@ -22454,7 +22506,7 @@
       </p:sp>
       <p:sp>
         <p:nvSpPr>
-          <p:cNvPr id="23" name="q-reformat-mark"/>
+          <p:cNvPr id="27" name="q-reformat-mark"/>
           <p:cNvSpPr/>
           <p:nvPr/>
         </p:nvSpPr>
@@ -22483,14 +22535,14 @@
       </p:sp>
       <p:sp>
         <p:nvSpPr>
-          <p:cNvPr id="24" name="q-reformat-label"/>
+          <p:cNvPr id="28" name="q-reformat-label"/>
           <p:cNvSpPr/>
           <p:nvPr/>
         </p:nvSpPr>
         <p:spPr>
           <a:xfrm>
-            <a:off x="4883226" y="4180157"/>
-            <a:ext cx="772033" cy="200660"/>
+            <a:off x="4916099" y="4180157"/>
+            <a:ext cx="739160" cy="200660"/>
           </a:xfrm>
           <a:prstGeom prst="rect">
             <a:avLst/>
@@ -22520,7 +22572,7 @@
                 <a:solidFill>
                   <a:srgbClr val="C24E26"/>
                 </a:solidFill>
-                <a:latin typeface="Inter"/>
+                <a:latin typeface="Arial"/>
               </a:rPr>
               <a:t>Reformat: 64</a:t>
             </a:r>
@@ -22529,7 +22581,7 @@
       </p:sp>
       <p:sp>
         <p:nvSpPr>
-          <p:cNvPr id="25" name="q-rightsize-mark"/>
+          <p:cNvPr id="29" name="q-rightsize-mark"/>
           <p:cNvSpPr/>
           <p:nvPr/>
         </p:nvSpPr>
@@ -22558,14 +22610,14 @@
       </p:sp>
       <p:sp>
         <p:nvSpPr>
-          <p:cNvPr id="26" name="q-rightsize-label"/>
+          <p:cNvPr id="30" name="q-rightsize-label"/>
           <p:cNvSpPr/>
           <p:nvPr/>
         </p:nvSpPr>
         <p:spPr>
           <a:xfrm>
             <a:off x="888187" y="3789068"/>
-            <a:ext cx="826336" cy="200660"/>
+            <a:ext cx="783530" cy="200660"/>
           </a:xfrm>
           <a:prstGeom prst="rect">
             <a:avLst/>
@@ -22595,7 +22647,7 @@
                 <a:solidFill>
                   <a:srgbClr val="C24E26"/>
                 </a:solidFill>
-                <a:latin typeface="Inter"/>
+                <a:latin typeface="Arial"/>
               </a:rPr>
               <a:t>Right-size: 49</a:t>
             </a:r>
@@ -22671,7 +22723,7 @@
                 <a:solidFill>
                   <a:srgbClr val="5C6670"/>
                 </a:solidFill>
-                <a:latin typeface="Inter"/>
+                <a:latin typeface="Arial"/>
               </a:rPr>
               <a:t>Brindle Markets  |  Store format strategy  |  Steering committee pre-read  |  Illustrative figures</a:t>
             </a:r>
@@ -22706,7 +22758,7 @@
                 <a:solidFill>
                   <a:srgbClr val="5C6670"/>
                 </a:solidFill>
-                <a:latin typeface="Inter"/>
+                <a:latin typeface="Arial"/>
               </a:rPr>
               <a:t>1</a:t>
             </a:fld>
@@ -22752,7 +22804,7 @@
                 <a:solidFill>
                   <a:srgbClr val="1F3A5F"/>
                 </a:solidFill>
-                <a:latin typeface="Inter"/>
+                <a:latin typeface="Arial"/>
               </a:rPr>
               <a:t>05  THREE-YEAR PLAN</a:t>
             </a:r>
@@ -22798,7 +22850,7 @@
                 <a:solidFill>
                   <a:srgbClr val="1E2226"/>
                 </a:solidFill>
-                <a:latin typeface="Gelasio"/>
+                <a:latin typeface="Georgia"/>
               </a:rPr>
               <a:t>The plan lifts store EBITDA 42% to £323m by 2028 on £387m of capex; reformats carry</a:t>
             </a:r>
@@ -22808,7 +22860,7 @@
                 <a:solidFill>
                   <a:srgbClr val="1E2226"/>
                 </a:solidFill>
-                <a:latin typeface="Gelasio"/>
+                <a:latin typeface="Georgia"/>
               </a:rPr>
               <a:t>60% of the gain</a:t>
             </a:r>
@@ -22854,7 +22906,7 @@
                 <a:solidFill>
                   <a:srgbClr val="1E2226"/>
                 </a:solidFill>
-                <a:latin typeface="Inter"/>
+                <a:latin typeface="Arial"/>
               </a:rPr>
               <a:t>Store EBITDA, 2025 to 2028</a:t>
             </a:r>
@@ -22900,7 +22952,7 @@
                 <a:solidFill>
                   <a:srgbClr val="5C6670"/>
                 </a:solidFill>
-                <a:latin typeface="Inter"/>
+                <a:latin typeface="Arial"/>
               </a:rPr>
               <a:t>£m; exits net of the 30% of their sales recaptured nearby; new stores at 70% of mature EBITDA</a:t>
             </a:r>
@@ -22993,7 +23045,7 @@
                 <a:solidFill>
                   <a:srgbClr val="1E2226"/>
                 </a:solidFill>
-                <a:latin typeface="Inter"/>
+                <a:latin typeface="Arial"/>
               </a:rPr>
               <a:t>What the board is asked to fund</a:t>
             </a:r>
@@ -23039,7 +23091,7 @@
                 <a:solidFill>
                   <a:srgbClr val="1F3A5F"/>
                 </a:solidFill>
-                <a:latin typeface="Gelasio"/>
+                <a:latin typeface="Georgia"/>
               </a:rPr>
               <a:t>£387m</a:t>
             </a:r>
@@ -23085,9 +23137,9 @@
                 <a:solidFill>
                   <a:srgbClr val="1E2226"/>
                 </a:solidFill>
-                <a:latin typeface="Inter"/>
+                <a:latin typeface="Arial"/>
               </a:rPr>
-              <a:t>capex over three years, 81% of it reformats</a:t>
+              <a:t>capex over three years, 81% of it reformats and</a:t>
             </a:r>
             <a:br/>
             <a:r>
@@ -23095,9 +23147,9 @@
                 <a:solidFill>
                   <a:srgbClr val="1E2226"/>
                 </a:solidFill>
-                <a:latin typeface="Inter"/>
+                <a:latin typeface="Arial"/>
               </a:rPr>
-              <a:t>and new stores</a:t>
+              <a:t>new stores</a:t>
             </a:r>
           </a:p>
         </p:txBody>
@@ -23141,7 +23193,7 @@
                 <a:solidFill>
                   <a:srgbClr val="1F3A5F"/>
                 </a:solidFill>
-                <a:latin typeface="Gelasio"/>
+                <a:latin typeface="Georgia"/>
               </a:rPr>
               <a:t>4.0 years</a:t>
             </a:r>
@@ -23187,7 +23239,7 @@
                 <a:solidFill>
                   <a:srgbClr val="1E2226"/>
                 </a:solidFill>
-                <a:latin typeface="Inter"/>
+                <a:latin typeface="Arial"/>
               </a:rPr>
               <a:t>payback on the 2028 EBITDA uplift of £95.9m</a:t>
             </a:r>
@@ -23233,7 +23285,7 @@
                 <a:solidFill>
                   <a:srgbClr val="1F3A5F"/>
                 </a:solidFill>
-                <a:latin typeface="Gelasio"/>
+                <a:latin typeface="Georgia"/>
               </a:rPr>
               <a:t>11.0%</a:t>
             </a:r>
@@ -23279,9 +23331,9 @@
                 <a:solidFill>
                   <a:srgbClr val="1E2226"/>
                 </a:solidFill>
-                <a:latin typeface="Inter"/>
+                <a:latin typeface="Arial"/>
               </a:rPr>
-              <a:t>estate cash return in 2028, from 7.6% today,</a:t>
+              <a:t>estate cash return in 2028, from 7.6% today, on</a:t>
             </a:r>
             <a:br/>
             <a:r>
@@ -23289,9 +23341,9 @@
                 <a:solidFill>
                   <a:srgbClr val="1E2226"/>
                 </a:solidFill>
-                <a:latin typeface="Inter"/>
+                <a:latin typeface="Arial"/>
               </a:rPr>
-              <a:t>on 229 stores</a:t>
+              <a:t>229 stores</a:t>
             </a:r>
           </a:p>
         </p:txBody>
@@ -23335,7 +23387,7 @@
                 <a:solidFill>
                   <a:srgbClr val="1F3A5F"/>
                 </a:solidFill>
-                <a:latin typeface="Gelasio"/>
+                <a:latin typeface="Georgia"/>
               </a:rPr>
               <a:t>£408m</a:t>
             </a:r>
@@ -23381,7 +23433,7 @@
                 <a:solidFill>
                   <a:srgbClr val="1E2226"/>
                 </a:solidFill>
-                <a:latin typeface="Inter"/>
+                <a:latin typeface="Arial"/>
               </a:rPr>
               <a:t>of capital released by the 15 exits, which earn</a:t>
             </a:r>
@@ -23391,7 +23443,7 @@
                 <a:solidFill>
                   <a:srgbClr val="1E2226"/>
                 </a:solidFill>
-                <a:latin typeface="Inter"/>
+                <a:latin typeface="Arial"/>
               </a:rPr>
               <a:t>£0.6m today</a:t>
             </a:r>
@@ -23437,7 +23489,7 @@
                 <a:solidFill>
                   <a:srgbClr val="1E2226"/>
                 </a:solidFill>
-                <a:latin typeface="Inter"/>
+                <a:latin typeface="Arial"/>
               </a:rPr>
               <a:t>Phasing, money and gates</a:t>
             </a:r>
@@ -23483,7 +23535,7 @@
                 <a:solidFill>
                   <a:srgbClr val="5C6670"/>
                 </a:solidFill>
-                <a:latin typeface="Inter"/>
+                <a:latin typeface="Arial"/>
               </a:rPr>
               <a:t>Stores started each year; capex and 2028 EBITDA uplift in £m</a:t>
             </a:r>
@@ -23507,14 +23559,14 @@
             <a:tbl>
               <a:tblPr firstRow="0" bandRow="0" lastRow="0" firstCol="0" lastCol="0" bandCol="0"/>
               <a:tblGrid>
-                <a:gridCol w="2933999"/>
+                <a:gridCol w="2994629"/>
                 <a:gridCol w="3751783"/>
-                <a:gridCol w="475944"/>
-                <a:gridCol w="466221"/>
-                <a:gridCol w="476154"/>
-                <a:gridCol w="558965"/>
-                <a:gridCol w="914972"/>
-                <a:gridCol w="1791002"/>
+                <a:gridCol w="443241"/>
+                <a:gridCol w="443241"/>
+                <a:gridCol w="443241"/>
+                <a:gridCol w="575999"/>
+                <a:gridCol w="916729"/>
+                <a:gridCol w="1800177"/>
               </a:tblGrid>
               <a:tr h="177038">
                 <a:tc>
@@ -23528,7 +23580,7 @@
                           <a:solidFill>
                             <a:srgbClr val="1E2226"/>
                           </a:solidFill>
-                          <a:latin typeface="Inter"/>
+                          <a:latin typeface="Arial"/>
                         </a:rPr>
                         <a:t>Workstream</a:t>
                       </a:r>
@@ -23536,7 +23588,7 @@
                         <a:solidFill>
                           <a:srgbClr val="1E2226"/>
                         </a:solidFill>
-                        <a:latin typeface="Inter"/>
+                        <a:latin typeface="Arial"/>
                       </a:endParaRPr>
                     </a:p>
                   </a:txBody>
@@ -23569,7 +23621,7 @@
                           <a:solidFill>
                             <a:srgbClr val="1E2226"/>
                           </a:solidFill>
-                          <a:latin typeface="Inter"/>
+                          <a:latin typeface="Arial"/>
                         </a:rPr>
                         <a:t>Gate to pass</a:t>
                       </a:r>
@@ -23577,7 +23629,7 @@
                         <a:solidFill>
                           <a:srgbClr val="1E2226"/>
                         </a:solidFill>
-                        <a:latin typeface="Inter"/>
+                        <a:latin typeface="Arial"/>
                       </a:endParaRPr>
                     </a:p>
                   </a:txBody>
@@ -23610,7 +23662,7 @@
                           <a:solidFill>
                             <a:srgbClr val="1E2226"/>
                           </a:solidFill>
-                          <a:latin typeface="Inter"/>
+                          <a:latin typeface="Arial"/>
                         </a:rPr>
                         <a:t>2026</a:t>
                       </a:r>
@@ -23618,7 +23670,7 @@
                         <a:solidFill>
                           <a:srgbClr val="1E2226"/>
                         </a:solidFill>
-                        <a:latin typeface="Inter"/>
+                        <a:latin typeface="Arial"/>
                       </a:endParaRPr>
                     </a:p>
                   </a:txBody>
@@ -23651,7 +23703,7 @@
                           <a:solidFill>
                             <a:srgbClr val="1E2226"/>
                           </a:solidFill>
-                          <a:latin typeface="Inter"/>
+                          <a:latin typeface="Arial"/>
                         </a:rPr>
                         <a:t>2027</a:t>
                       </a:r>
@@ -23659,7 +23711,7 @@
                         <a:solidFill>
                           <a:srgbClr val="1E2226"/>
                         </a:solidFill>
-                        <a:latin typeface="Inter"/>
+                        <a:latin typeface="Arial"/>
                       </a:endParaRPr>
                     </a:p>
                   </a:txBody>
@@ -23692,7 +23744,7 @@
                           <a:solidFill>
                             <a:srgbClr val="1E2226"/>
                           </a:solidFill>
-                          <a:latin typeface="Inter"/>
+                          <a:latin typeface="Arial"/>
                         </a:rPr>
                         <a:t>2028</a:t>
                       </a:r>
@@ -23700,7 +23752,7 @@
                         <a:solidFill>
                           <a:srgbClr val="1E2226"/>
                         </a:solidFill>
-                        <a:latin typeface="Inter"/>
+                        <a:latin typeface="Arial"/>
                       </a:endParaRPr>
                     </a:p>
                   </a:txBody>
@@ -23733,7 +23785,7 @@
                           <a:solidFill>
                             <a:srgbClr val="1E2226"/>
                           </a:solidFill>
-                          <a:latin typeface="Inter"/>
+                          <a:latin typeface="Arial"/>
                         </a:rPr>
                         <a:t>Stores</a:t>
                       </a:r>
@@ -23741,7 +23793,7 @@
                         <a:solidFill>
                           <a:srgbClr val="1E2226"/>
                         </a:solidFill>
-                        <a:latin typeface="Inter"/>
+                        <a:latin typeface="Arial"/>
                       </a:endParaRPr>
                     </a:p>
                   </a:txBody>
@@ -23774,7 +23826,7 @@
                           <a:solidFill>
                             <a:srgbClr val="1E2226"/>
                           </a:solidFill>
-                          <a:latin typeface="Inter"/>
+                          <a:latin typeface="Arial"/>
                         </a:rPr>
                         <a:t>Capex (£m)</a:t>
                       </a:r>
@@ -23782,7 +23834,7 @@
                         <a:solidFill>
                           <a:srgbClr val="1E2226"/>
                         </a:solidFill>
-                        <a:latin typeface="Inter"/>
+                        <a:latin typeface="Arial"/>
                       </a:endParaRPr>
                     </a:p>
                   </a:txBody>
@@ -23815,7 +23867,7 @@
                           <a:solidFill>
                             <a:srgbClr val="1E2226"/>
                           </a:solidFill>
-                          <a:latin typeface="Inter"/>
+                          <a:latin typeface="Arial"/>
                         </a:rPr>
                         <a:t>EBITDA uplift 2028 (£m)</a:t>
                       </a:r>
@@ -23823,7 +23875,7 @@
                         <a:solidFill>
                           <a:srgbClr val="1E2226"/>
                         </a:solidFill>
-                        <a:latin typeface="Inter"/>
+                        <a:latin typeface="Arial"/>
                       </a:endParaRPr>
                     </a:p>
                   </a:txBody>
@@ -23856,17 +23908,17 @@
                       <a:r>
                         <a:rPr sz="800" b="1" i="0">
                           <a:solidFill>
-                            <a:srgbClr val="C24E26"/>
-                          </a:solidFill>
-                          <a:latin typeface="Inter"/>
+                            <a:srgbClr val="1F3A5F"/>
+                          </a:solidFill>
+                          <a:latin typeface="Arial"/>
                         </a:rPr>
                         <a:t>Reformat superstores and supermarkets</a:t>
                       </a:r>
                       <a:endParaRPr sz="800" b="1" i="0">
                         <a:solidFill>
-                          <a:srgbClr val="C24E26"/>
-                        </a:solidFill>
-                        <a:latin typeface="Inter"/>
+                          <a:srgbClr val="1F3A5F"/>
+                        </a:solidFill>
+                        <a:latin typeface="Arial"/>
                       </a:endParaRPr>
                     </a:p>
                   </a:txBody>
@@ -23901,7 +23953,7 @@
                           <a:solidFill>
                             <a:srgbClr val="1E2226"/>
                           </a:solidFill>
-                          <a:latin typeface="Inter"/>
+                          <a:latin typeface="Arial"/>
                         </a:rPr>
                         <a:t>Pilot 4 stores by Q2 2026; roll out only above a 10% return</a:t>
                       </a:r>
@@ -23909,7 +23961,7 @@
                         <a:solidFill>
                           <a:srgbClr val="1E2226"/>
                         </a:solidFill>
-                        <a:latin typeface="Inter"/>
+                        <a:latin typeface="Arial"/>
                       </a:endParaRPr>
                     </a:p>
                   </a:txBody>
@@ -23944,7 +23996,7 @@
                           <a:solidFill>
                             <a:srgbClr val="1E2226"/>
                           </a:solidFill>
-                          <a:latin typeface="Inter"/>
+                          <a:latin typeface="Arial"/>
                         </a:rPr>
                         <a:t>16</a:t>
                       </a:r>
@@ -23952,7 +24004,7 @@
                         <a:solidFill>
                           <a:srgbClr val="1E2226"/>
                         </a:solidFill>
-                        <a:latin typeface="Inter"/>
+                        <a:latin typeface="Arial"/>
                       </a:endParaRPr>
                     </a:p>
                   </a:txBody>
@@ -23987,7 +24039,7 @@
                           <a:solidFill>
                             <a:srgbClr val="1E2226"/>
                           </a:solidFill>
-                          <a:latin typeface="Inter"/>
+                          <a:latin typeface="Arial"/>
                         </a:rPr>
                         <a:t>25</a:t>
                       </a:r>
@@ -23995,7 +24047,7 @@
                         <a:solidFill>
                           <a:srgbClr val="1E2226"/>
                         </a:solidFill>
-                        <a:latin typeface="Inter"/>
+                        <a:latin typeface="Arial"/>
                       </a:endParaRPr>
                     </a:p>
                   </a:txBody>
@@ -24030,7 +24082,7 @@
                           <a:solidFill>
                             <a:srgbClr val="1E2226"/>
                           </a:solidFill>
-                          <a:latin typeface="Inter"/>
+                          <a:latin typeface="Arial"/>
                         </a:rPr>
                         <a:t>23</a:t>
                       </a:r>
@@ -24038,7 +24090,7 @@
                         <a:solidFill>
                           <a:srgbClr val="1E2226"/>
                         </a:solidFill>
-                        <a:latin typeface="Inter"/>
+                        <a:latin typeface="Arial"/>
                       </a:endParaRPr>
                     </a:p>
                   </a:txBody>
@@ -24073,7 +24125,7 @@
                           <a:solidFill>
                             <a:srgbClr val="1E2226"/>
                           </a:solidFill>
-                          <a:latin typeface="Inter"/>
+                          <a:latin typeface="Arial"/>
                         </a:rPr>
                         <a:t>64</a:t>
                       </a:r>
@@ -24081,7 +24133,7 @@
                         <a:solidFill>
                           <a:srgbClr val="1E2226"/>
                         </a:solidFill>
-                        <a:latin typeface="Inter"/>
+                        <a:latin typeface="Arial"/>
                       </a:endParaRPr>
                     </a:p>
                   </a:txBody>
@@ -24116,7 +24168,7 @@
                           <a:solidFill>
                             <a:srgbClr val="1E2226"/>
                           </a:solidFill>
-                          <a:latin typeface="Inter"/>
+                          <a:latin typeface="Arial"/>
                         </a:rPr>
                         <a:t>222.0</a:t>
                       </a:r>
@@ -24124,7 +24176,7 @@
                         <a:solidFill>
                           <a:srgbClr val="1E2226"/>
                         </a:solidFill>
-                        <a:latin typeface="Inter"/>
+                        <a:latin typeface="Arial"/>
                       </a:endParaRPr>
                     </a:p>
                   </a:txBody>
@@ -24157,17 +24209,17 @@
                       <a:r>
                         <a:rPr sz="800" b="1" i="0">
                           <a:solidFill>
-                            <a:srgbClr val="C24E26"/>
-                          </a:solidFill>
-                          <a:latin typeface="Inter"/>
+                            <a:srgbClr val="1F3A5F"/>
+                          </a:solidFill>
+                          <a:latin typeface="Arial"/>
                         </a:rPr>
                         <a:t>57.5</a:t>
                       </a:r>
                       <a:endParaRPr sz="800" b="1" i="0">
                         <a:solidFill>
-                          <a:srgbClr val="C24E26"/>
-                        </a:solidFill>
-                        <a:latin typeface="Inter"/>
+                          <a:srgbClr val="1F3A5F"/>
+                        </a:solidFill>
+                        <a:latin typeface="Arial"/>
                       </a:endParaRPr>
                     </a:p>
                   </a:txBody>
@@ -24204,7 +24256,7 @@
                           <a:solidFill>
                             <a:srgbClr val="1E2226"/>
                           </a:solidFill>
-                          <a:latin typeface="Inter"/>
+                          <a:latin typeface="Arial"/>
                         </a:rPr>
                         <a:t>Right-size flat-catchment stores</a:t>
                       </a:r>
@@ -24212,7 +24264,7 @@
                         <a:solidFill>
                           <a:srgbClr val="1E2226"/>
                         </a:solidFill>
-                        <a:latin typeface="Inter"/>
+                        <a:latin typeface="Arial"/>
                       </a:endParaRPr>
                     </a:p>
                   </a:txBody>
@@ -24247,7 +24299,7 @@
                           <a:solidFill>
                             <a:srgbClr val="1E2226"/>
                           </a:solidFill>
-                          <a:latin typeface="Inter"/>
+                          <a:latin typeface="Arial"/>
                         </a:rPr>
                         <a:t>Landlord talks on sublets; labour model agreed with unions</a:t>
                       </a:r>
@@ -24255,7 +24307,7 @@
                         <a:solidFill>
                           <a:srgbClr val="1E2226"/>
                         </a:solidFill>
-                        <a:latin typeface="Inter"/>
+                        <a:latin typeface="Arial"/>
                       </a:endParaRPr>
                     </a:p>
                   </a:txBody>
@@ -24290,7 +24342,7 @@
                           <a:solidFill>
                             <a:srgbClr val="1E2226"/>
                           </a:solidFill>
-                          <a:latin typeface="Inter"/>
+                          <a:latin typeface="Arial"/>
                         </a:rPr>
                         <a:t>22</a:t>
                       </a:r>
@@ -24298,7 +24350,7 @@
                         <a:solidFill>
                           <a:srgbClr val="1E2226"/>
                         </a:solidFill>
-                        <a:latin typeface="Inter"/>
+                        <a:latin typeface="Arial"/>
                       </a:endParaRPr>
                     </a:p>
                   </a:txBody>
@@ -24333,7 +24385,7 @@
                           <a:solidFill>
                             <a:srgbClr val="1E2226"/>
                           </a:solidFill>
-                          <a:latin typeface="Inter"/>
+                          <a:latin typeface="Arial"/>
                         </a:rPr>
                         <a:t>17</a:t>
                       </a:r>
@@ -24341,7 +24393,7 @@
                         <a:solidFill>
                           <a:srgbClr val="1E2226"/>
                         </a:solidFill>
-                        <a:latin typeface="Inter"/>
+                        <a:latin typeface="Arial"/>
                       </a:endParaRPr>
                     </a:p>
                   </a:txBody>
@@ -24376,7 +24428,7 @@
                           <a:solidFill>
                             <a:srgbClr val="1E2226"/>
                           </a:solidFill>
-                          <a:latin typeface="Inter"/>
+                          <a:latin typeface="Arial"/>
                         </a:rPr>
                         <a:t>10</a:t>
                       </a:r>
@@ -24384,7 +24436,7 @@
                         <a:solidFill>
                           <a:srgbClr val="1E2226"/>
                         </a:solidFill>
-                        <a:latin typeface="Inter"/>
+                        <a:latin typeface="Arial"/>
                       </a:endParaRPr>
                     </a:p>
                   </a:txBody>
@@ -24419,7 +24471,7 @@
                           <a:solidFill>
                             <a:srgbClr val="1E2226"/>
                           </a:solidFill>
-                          <a:latin typeface="Inter"/>
+                          <a:latin typeface="Arial"/>
                         </a:rPr>
                         <a:t>49</a:t>
                       </a:r>
@@ -24427,7 +24479,7 @@
                         <a:solidFill>
                           <a:srgbClr val="1E2226"/>
                         </a:solidFill>
-                        <a:latin typeface="Inter"/>
+                        <a:latin typeface="Arial"/>
                       </a:endParaRPr>
                     </a:p>
                   </a:txBody>
@@ -24462,7 +24514,7 @@
                           <a:solidFill>
                             <a:srgbClr val="1E2226"/>
                           </a:solidFill>
-                          <a:latin typeface="Inter"/>
+                          <a:latin typeface="Arial"/>
                         </a:rPr>
                         <a:t>39.2</a:t>
                       </a:r>
@@ -24470,7 +24522,7 @@
                         <a:solidFill>
                           <a:srgbClr val="1E2226"/>
                         </a:solidFill>
-                        <a:latin typeface="Inter"/>
+                        <a:latin typeface="Arial"/>
                       </a:endParaRPr>
                     </a:p>
                   </a:txBody>
@@ -24505,7 +24557,7 @@
                           <a:solidFill>
                             <a:srgbClr val="1E2226"/>
                           </a:solidFill>
-                          <a:latin typeface="Inter"/>
+                          <a:latin typeface="Arial"/>
                         </a:rPr>
                         <a:t>19.3</a:t>
                       </a:r>
@@ -24513,7 +24565,7 @@
                         <a:solidFill>
                           <a:srgbClr val="1E2226"/>
                         </a:solidFill>
-                        <a:latin typeface="Inter"/>
+                        <a:latin typeface="Arial"/>
                       </a:endParaRPr>
                     </a:p>
                   </a:txBody>
@@ -24550,7 +24602,7 @@
                           <a:solidFill>
                             <a:srgbClr val="1E2226"/>
                           </a:solidFill>
-                          <a:latin typeface="Inter"/>
+                          <a:latin typeface="Arial"/>
                         </a:rPr>
                         <a:t>Exit loss-making stores</a:t>
                       </a:r>
@@ -24558,7 +24610,7 @@
                         <a:solidFill>
                           <a:srgbClr val="1E2226"/>
                         </a:solidFill>
-                        <a:latin typeface="Inter"/>
+                        <a:latin typeface="Arial"/>
                       </a:endParaRPr>
                     </a:p>
                   </a:txBody>
@@ -24593,7 +24645,7 @@
                           <a:solidFill>
                             <a:srgbClr val="1E2226"/>
                           </a:solidFill>
-                          <a:latin typeface="Inter"/>
+                          <a:latin typeface="Arial"/>
                         </a:rPr>
                         <a:t>Lease breaks and disposals; staff offered nearby roles</a:t>
                       </a:r>
@@ -24601,7 +24653,7 @@
                         <a:solidFill>
                           <a:srgbClr val="1E2226"/>
                         </a:solidFill>
-                        <a:latin typeface="Inter"/>
+                        <a:latin typeface="Arial"/>
                       </a:endParaRPr>
                     </a:p>
                   </a:txBody>
@@ -24636,7 +24688,7 @@
                           <a:solidFill>
                             <a:srgbClr val="1E2226"/>
                           </a:solidFill>
-                          <a:latin typeface="Inter"/>
+                          <a:latin typeface="Arial"/>
                         </a:rPr>
                         <a:t>7</a:t>
                       </a:r>
@@ -24644,7 +24696,7 @@
                         <a:solidFill>
                           <a:srgbClr val="1E2226"/>
                         </a:solidFill>
-                        <a:latin typeface="Inter"/>
+                        <a:latin typeface="Arial"/>
                       </a:endParaRPr>
                     </a:p>
                   </a:txBody>
@@ -24679,7 +24731,7 @@
                           <a:solidFill>
                             <a:srgbClr val="1E2226"/>
                           </a:solidFill>
-                          <a:latin typeface="Inter"/>
+                          <a:latin typeface="Arial"/>
                         </a:rPr>
                         <a:t>5</a:t>
                       </a:r>
@@ -24687,7 +24739,7 @@
                         <a:solidFill>
                           <a:srgbClr val="1E2226"/>
                         </a:solidFill>
-                        <a:latin typeface="Inter"/>
+                        <a:latin typeface="Arial"/>
                       </a:endParaRPr>
                     </a:p>
                   </a:txBody>
@@ -24722,7 +24774,7 @@
                           <a:solidFill>
                             <a:srgbClr val="1E2226"/>
                           </a:solidFill>
-                          <a:latin typeface="Inter"/>
+                          <a:latin typeface="Arial"/>
                         </a:rPr>
                         <a:t>3</a:t>
                       </a:r>
@@ -24730,7 +24782,7 @@
                         <a:solidFill>
                           <a:srgbClr val="1E2226"/>
                         </a:solidFill>
-                        <a:latin typeface="Inter"/>
+                        <a:latin typeface="Arial"/>
                       </a:endParaRPr>
                     </a:p>
                   </a:txBody>
@@ -24765,7 +24817,7 @@
                           <a:solidFill>
                             <a:srgbClr val="1E2226"/>
                           </a:solidFill>
-                          <a:latin typeface="Inter"/>
+                          <a:latin typeface="Arial"/>
                         </a:rPr>
                         <a:t>15</a:t>
                       </a:r>
@@ -24773,7 +24825,7 @@
                         <a:solidFill>
                           <a:srgbClr val="1E2226"/>
                         </a:solidFill>
-                        <a:latin typeface="Inter"/>
+                        <a:latin typeface="Arial"/>
                       </a:endParaRPr>
                     </a:p>
                   </a:txBody>
@@ -24808,7 +24860,7 @@
                           <a:solidFill>
                             <a:srgbClr val="1E2226"/>
                           </a:solidFill>
-                          <a:latin typeface="Inter"/>
+                          <a:latin typeface="Arial"/>
                         </a:rPr>
                         <a:t>36.0</a:t>
                       </a:r>
@@ -24816,7 +24868,7 @@
                         <a:solidFill>
                           <a:srgbClr val="1E2226"/>
                         </a:solidFill>
-                        <a:latin typeface="Inter"/>
+                        <a:latin typeface="Arial"/>
                       </a:endParaRPr>
                     </a:p>
                   </a:txBody>
@@ -24851,7 +24903,7 @@
                           <a:solidFill>
                             <a:srgbClr val="1E2226"/>
                           </a:solidFill>
-                          <a:latin typeface="Inter"/>
+                          <a:latin typeface="Arial"/>
                         </a:rPr>
                         <a:t>11.8</a:t>
                       </a:r>
@@ -24859,7 +24911,7 @@
                         <a:solidFill>
                           <a:srgbClr val="1E2226"/>
                         </a:solidFill>
-                        <a:latin typeface="Inter"/>
+                        <a:latin typeface="Arial"/>
                       </a:endParaRPr>
                     </a:p>
                   </a:txBody>
@@ -24896,7 +24948,7 @@
                           <a:solidFill>
                             <a:srgbClr val="1E2226"/>
                           </a:solidFill>
-                          <a:latin typeface="Inter"/>
+                          <a:latin typeface="Arial"/>
                         </a:rPr>
                         <a:t>Open neighbourhood stores</a:t>
                       </a:r>
@@ -24904,7 +24956,7 @@
                         <a:solidFill>
                           <a:srgbClr val="1E2226"/>
                         </a:solidFill>
-                        <a:latin typeface="Inter"/>
+                        <a:latin typeface="Arial"/>
                       </a:endParaRPr>
                     </a:p>
                   </a:txBody>
@@ -24939,7 +24991,7 @@
                           <a:solidFill>
                             <a:srgbClr val="1E2226"/>
                           </a:solidFill>
-                          <a:latin typeface="Inter"/>
+                          <a:latin typeface="Arial"/>
                         </a:rPr>
                         <a:t>30 sites in the growth catchments; 70% of mature EBITDA by 2028</a:t>
                       </a:r>
@@ -24947,7 +24999,7 @@
                         <a:solidFill>
                           <a:srgbClr val="1E2226"/>
                         </a:solidFill>
-                        <a:latin typeface="Inter"/>
+                        <a:latin typeface="Arial"/>
                       </a:endParaRPr>
                     </a:p>
                   </a:txBody>
@@ -24982,7 +25034,7 @@
                           <a:solidFill>
                             <a:srgbClr val="1E2226"/>
                           </a:solidFill>
-                          <a:latin typeface="Inter"/>
+                          <a:latin typeface="Arial"/>
                         </a:rPr>
                         <a:t>6</a:t>
                       </a:r>
@@ -24990,7 +25042,7 @@
                         <a:solidFill>
                           <a:srgbClr val="1E2226"/>
                         </a:solidFill>
-                        <a:latin typeface="Inter"/>
+                        <a:latin typeface="Arial"/>
                       </a:endParaRPr>
                     </a:p>
                   </a:txBody>
@@ -25025,7 +25077,7 @@
                           <a:solidFill>
                             <a:srgbClr val="1E2226"/>
                           </a:solidFill>
-                          <a:latin typeface="Inter"/>
+                          <a:latin typeface="Arial"/>
                         </a:rPr>
                         <a:t>12</a:t>
                       </a:r>
@@ -25033,7 +25085,7 @@
                         <a:solidFill>
                           <a:srgbClr val="1E2226"/>
                         </a:solidFill>
-                        <a:latin typeface="Inter"/>
+                        <a:latin typeface="Arial"/>
                       </a:endParaRPr>
                     </a:p>
                   </a:txBody>
@@ -25068,7 +25120,7 @@
                           <a:solidFill>
                             <a:srgbClr val="1E2226"/>
                           </a:solidFill>
-                          <a:latin typeface="Inter"/>
+                          <a:latin typeface="Arial"/>
                         </a:rPr>
                         <a:t>12</a:t>
                       </a:r>
@@ -25076,7 +25128,7 @@
                         <a:solidFill>
                           <a:srgbClr val="1E2226"/>
                         </a:solidFill>
-                        <a:latin typeface="Inter"/>
+                        <a:latin typeface="Arial"/>
                       </a:endParaRPr>
                     </a:p>
                   </a:txBody>
@@ -25111,7 +25163,7 @@
                           <a:solidFill>
                             <a:srgbClr val="1E2226"/>
                           </a:solidFill>
-                          <a:latin typeface="Inter"/>
+                          <a:latin typeface="Arial"/>
                         </a:rPr>
                         <a:t>30</a:t>
                       </a:r>
@@ -25119,7 +25171,7 @@
                         <a:solidFill>
                           <a:srgbClr val="1E2226"/>
                         </a:solidFill>
-                        <a:latin typeface="Inter"/>
+                        <a:latin typeface="Arial"/>
                       </a:endParaRPr>
                     </a:p>
                   </a:txBody>
@@ -25154,7 +25206,7 @@
                           <a:solidFill>
                             <a:srgbClr val="1E2226"/>
                           </a:solidFill>
-                          <a:latin typeface="Inter"/>
+                          <a:latin typeface="Arial"/>
                         </a:rPr>
                         <a:t>90.0</a:t>
                       </a:r>
@@ -25162,7 +25214,7 @@
                         <a:solidFill>
                           <a:srgbClr val="1E2226"/>
                         </a:solidFill>
-                        <a:latin typeface="Inter"/>
+                        <a:latin typeface="Arial"/>
                       </a:endParaRPr>
                     </a:p>
                   </a:txBody>
@@ -25197,7 +25249,7 @@
                           <a:solidFill>
                             <a:srgbClr val="1E2226"/>
                           </a:solidFill>
-                          <a:latin typeface="Inter"/>
+                          <a:latin typeface="Arial"/>
                         </a:rPr>
                         <a:t>11.7</a:t>
                       </a:r>
@@ -25205,7 +25257,7 @@
                         <a:solidFill>
                           <a:srgbClr val="1E2226"/>
                         </a:solidFill>
-                        <a:latin typeface="Inter"/>
+                        <a:latin typeface="Arial"/>
                       </a:endParaRPr>
                     </a:p>
                   </a:txBody>
@@ -25242,7 +25294,7 @@
                           <a:solidFill>
                             <a:srgbClr val="1E2226"/>
                           </a:solidFill>
-                          <a:latin typeface="Inter"/>
+                          <a:latin typeface="Arial"/>
                         </a:rPr>
                         <a:t>Unchanged large stores</a:t>
                       </a:r>
@@ -25250,7 +25302,7 @@
                         <a:solidFill>
                           <a:srgbClr val="1E2226"/>
                         </a:solidFill>
-                        <a:latin typeface="Inter"/>
+                        <a:latin typeface="Arial"/>
                       </a:endParaRPr>
                     </a:p>
                   </a:txBody>
@@ -25285,7 +25337,7 @@
                           <a:solidFill>
                             <a:srgbClr val="1E2226"/>
                           </a:solidFill>
-                          <a:latin typeface="Inter"/>
+                          <a:latin typeface="Arial"/>
                         </a:rPr>
                         <a:t>Price and range reset in the 30 unchanged large stores</a:t>
                       </a:r>
@@ -25293,7 +25345,7 @@
                         <a:solidFill>
                           <a:srgbClr val="1E2226"/>
                         </a:solidFill>
-                        <a:latin typeface="Inter"/>
+                        <a:latin typeface="Arial"/>
                       </a:endParaRPr>
                     </a:p>
                   </a:txBody>
@@ -25327,7 +25379,7 @@
                         <a:solidFill>
                           <a:srgbClr val="1E2226"/>
                         </a:solidFill>
-                        <a:latin typeface="Inter"/>
+                        <a:latin typeface="Arial"/>
                       </a:endParaRPr>
                     </a:p>
                   </a:txBody>
@@ -25361,7 +25413,7 @@
                         <a:solidFill>
                           <a:srgbClr val="1E2226"/>
                         </a:solidFill>
-                        <a:latin typeface="Inter"/>
+                        <a:latin typeface="Arial"/>
                       </a:endParaRPr>
                     </a:p>
                   </a:txBody>
@@ -25395,7 +25447,7 @@
                         <a:solidFill>
                           <a:srgbClr val="1E2226"/>
                         </a:solidFill>
-                        <a:latin typeface="Inter"/>
+                        <a:latin typeface="Arial"/>
                       </a:endParaRPr>
                     </a:p>
                   </a:txBody>
@@ -25430,7 +25482,7 @@
                           <a:solidFill>
                             <a:srgbClr val="1E2226"/>
                           </a:solidFill>
-                          <a:latin typeface="Inter"/>
+                          <a:latin typeface="Arial"/>
                         </a:rPr>
                         <a:t>30</a:t>
                       </a:r>
@@ -25438,7 +25490,7 @@
                         <a:solidFill>
                           <a:srgbClr val="1E2226"/>
                         </a:solidFill>
-                        <a:latin typeface="Inter"/>
+                        <a:latin typeface="Arial"/>
                       </a:endParaRPr>
                     </a:p>
                   </a:txBody>
@@ -25473,7 +25525,7 @@
                           <a:solidFill>
                             <a:srgbClr val="1E2226"/>
                           </a:solidFill>
-                          <a:latin typeface="Inter"/>
+                          <a:latin typeface="Arial"/>
                         </a:rPr>
                         <a:t>0.0</a:t>
                       </a:r>
@@ -25481,7 +25533,7 @@
                         <a:solidFill>
                           <a:srgbClr val="1E2226"/>
                         </a:solidFill>
-                        <a:latin typeface="Inter"/>
+                        <a:latin typeface="Arial"/>
                       </a:endParaRPr>
                     </a:p>
                   </a:txBody>
@@ -25516,7 +25568,7 @@
                           <a:solidFill>
                             <a:srgbClr val="1E2226"/>
                           </a:solidFill>
-                          <a:latin typeface="Inter"/>
+                          <a:latin typeface="Arial"/>
                         </a:rPr>
                         <a:t>(4.4)</a:t>
                       </a:r>
@@ -25524,7 +25576,7 @@
                         <a:solidFill>
                           <a:srgbClr val="1E2226"/>
                         </a:solidFill>
-                        <a:latin typeface="Inter"/>
+                        <a:latin typeface="Arial"/>
                       </a:endParaRPr>
                     </a:p>
                   </a:txBody>
@@ -25561,7 +25613,7 @@
                           <a:solidFill>
                             <a:srgbClr val="1E2226"/>
                           </a:solidFill>
-                          <a:latin typeface="Inter"/>
+                          <a:latin typeface="Arial"/>
                         </a:rPr>
                         <a:t>Programme</a:t>
                       </a:r>
@@ -25569,7 +25621,7 @@
                         <a:solidFill>
                           <a:srgbClr val="1E2226"/>
                         </a:solidFill>
-                        <a:latin typeface="Inter"/>
+                        <a:latin typeface="Arial"/>
                       </a:endParaRPr>
                     </a:p>
                   </a:txBody>
@@ -25603,7 +25655,7 @@
                         <a:solidFill>
                           <a:srgbClr val="1E2226"/>
                         </a:solidFill>
-                        <a:latin typeface="Inter"/>
+                        <a:latin typeface="Arial"/>
                       </a:endParaRPr>
                     </a:p>
                   </a:txBody>
@@ -25637,7 +25689,7 @@
                         <a:solidFill>
                           <a:srgbClr val="1E2226"/>
                         </a:solidFill>
-                        <a:latin typeface="Inter"/>
+                        <a:latin typeface="Arial"/>
                       </a:endParaRPr>
                     </a:p>
                   </a:txBody>
@@ -25671,7 +25723,7 @@
                         <a:solidFill>
                           <a:srgbClr val="1E2226"/>
                         </a:solidFill>
-                        <a:latin typeface="Inter"/>
+                        <a:latin typeface="Arial"/>
                       </a:endParaRPr>
                     </a:p>
                   </a:txBody>
@@ -25705,7 +25757,7 @@
                         <a:solidFill>
                           <a:srgbClr val="1E2226"/>
                         </a:solidFill>
-                        <a:latin typeface="Inter"/>
+                        <a:latin typeface="Arial"/>
                       </a:endParaRPr>
                     </a:p>
                   </a:txBody>
@@ -25739,7 +25791,7 @@
                         <a:solidFill>
                           <a:srgbClr val="1E2226"/>
                         </a:solidFill>
-                        <a:latin typeface="Inter"/>
+                        <a:latin typeface="Arial"/>
                       </a:endParaRPr>
                     </a:p>
                   </a:txBody>
@@ -25774,7 +25826,7 @@
                           <a:solidFill>
                             <a:srgbClr val="1E2226"/>
                           </a:solidFill>
-                          <a:latin typeface="Inter"/>
+                          <a:latin typeface="Arial"/>
                         </a:rPr>
                         <a:t>387.2</a:t>
                       </a:r>
@@ -25782,7 +25834,7 @@
                         <a:solidFill>
                           <a:srgbClr val="1E2226"/>
                         </a:solidFill>
-                        <a:latin typeface="Inter"/>
+                        <a:latin typeface="Arial"/>
                       </a:endParaRPr>
                     </a:p>
                   </a:txBody>
@@ -25817,7 +25869,7 @@
                           <a:solidFill>
                             <a:srgbClr val="1E2226"/>
                           </a:solidFill>
-                          <a:latin typeface="Inter"/>
+                          <a:latin typeface="Arial"/>
                         </a:rPr>
                         <a:t>95.9</a:t>
                       </a:r>
@@ -25825,7 +25877,7 @@
                         <a:solidFill>
                           <a:srgbClr val="1E2226"/>
                         </a:solidFill>
-                        <a:latin typeface="Inter"/>
+                        <a:latin typeface="Arial"/>
                       </a:endParaRPr>
                     </a:p>
                   </a:txBody>
@@ -25893,7 +25945,7 @@
                 <a:solidFill>
                   <a:srgbClr val="5C6670"/>
                 </a:solidFill>
-                <a:latin typeface="Inter"/>
+                <a:latin typeface="Arial"/>
               </a:rPr>
               <a:t>Source: Brindle store P&amp;L, capital register and loyalty-card data, 2025; regional grocery market model; team analysis. All figures illustrative.</a:t>
             </a:r>

--- a/docs/showcase/grocery-strategy.pptx
+++ b/docs/showcase/grocery-strategy.pptx
@@ -7986,7 +7986,7 @@
           <a:spcPct val="20000"/>
         </a:spcBef>
         <a:buFont typeface="Arial"/>
-        <a:buChar char="–"/>
+        <a:buChar char="•"/>
         <a:defRPr sz="2800" kern="1200">
           <a:solidFill>
             <a:schemeClr val="tx1"/>
@@ -8016,7 +8016,7 @@
           <a:spcPct val="20000"/>
         </a:spcBef>
         <a:buFont typeface="Arial"/>
-        <a:buChar char="–"/>
+        <a:buChar char="•"/>
         <a:defRPr sz="2000" kern="1200">
           <a:solidFill>
             <a:schemeClr val="tx1"/>

--- a/docs/showcase/grocery-strategy.pptx
+++ b/docs/showcase/grocery-strategy.pptx
@@ -8749,7 +8749,7 @@
                 </a:solidFill>
                 <a:latin typeface="Georgia"/>
               </a:rPr>
-              <a:t>56%</a:t>
+              <a:t>92%</a:t>
             </a:r>
           </a:p>
         </p:txBody>
@@ -8795,7 +8795,7 @@
                 </a:solidFill>
                 <a:latin typeface="Arial"/>
               </a:rPr>
-              <a:t>of Brindle's store sales come from its 58</a:t>
+              <a:t>of Brindle's store sales come from its 154</a:t>
             </a:r>
             <a:br/>
             <a:r>
@@ -8805,7 +8805,7 @@
                 </a:solidFill>
                 <a:latin typeface="Arial"/>
               </a:rPr>
-              <a:t>superstores, against a 40% large-store share of</a:t>
+              <a:t>superstores and supermarkets, against a 40%</a:t>
             </a:r>
             <a:br/>
             <a:r>
@@ -8815,7 +8815,7 @@
                 </a:solidFill>
                 <a:latin typeface="Arial"/>
               </a:rPr>
-              <a:t>the market</a:t>
+              <a:t>large-store share of the market</a:t>
             </a:r>
           </a:p>
         </p:txBody>
@@ -18285,7 +18285,7 @@
                 </a:solidFill>
                 <a:latin typeface="Arial"/>
               </a:rPr>
-              <a:t>Half the gap is £1.1bn of sales</a:t>
+              <a:t>Half the gap is £1.0bn of sales</a:t>
             </a:r>
           </a:p>
           <a:p>
@@ -18318,7 +18318,7 @@
                 </a:solidFill>
                 <a:latin typeface="Arial"/>
               </a:rPr>
-              <a:t>£1.1bn, 28% of today's store sales.</a:t>
+              <a:t>£1.0bn, 27% of today's store sales.</a:t>
             </a:r>
           </a:p>
           <a:p>
